--- a/deck/UP-Excise-Ask-the-Data-Demo-Short.pptx
+++ b/deck/UP-Excise-Ask-the-Data-Demo-Short.pptx
@@ -4024,9 +4024,11 @@
       </p:sp>
       <p:sp>
         <p:nvSpPr>
-          <p:cNvPr id="8" name="TextBox 7"/>
-          <p:cNvSpPr txBox="1"/>
-          <p:nvPr/>
+          <p:cNvPr id="8" name="Title"/>
+          <p:cNvSpPr/>
+          <p:nvPr>
+            <p:ph type="ctrTitle"/>
+          </p:nvPr>
         </p:nvSpPr>
         <p:spPr>
           <a:xfrm>
@@ -4143,2703 +4145,6 @@
                 <a:latin typeface="Calibri"/>
               </a:rPr>
               <a:t>Proof of concept</a:t>
-            </a:r>
-          </a:p>
-        </p:txBody>
-      </p:sp>
-    </p:spTree>
-  </p:cSld>
-  <p:clrMapOvr>
-    <a:masterClrMapping/>
-  </p:clrMapOvr>
-</p:sld>
-</file>
-
-<file path=ppt/slides/slide10.xml><?xml version="1.0" encoding="utf-8"?>
-<p:sld xmlns:a="http://schemas.openxmlformats.org/drawingml/2006/main" xmlns:r="http://schemas.openxmlformats.org/officeDocument/2006/relationships" xmlns:p="http://schemas.openxmlformats.org/presentationml/2006/main">
-  <p:cSld>
-    <p:spTree>
-      <p:nvGrpSpPr>
-        <p:cNvPr id="1" name=""/>
-        <p:cNvGrpSpPr/>
-        <p:nvPr/>
-      </p:nvGrpSpPr>
-      <p:grpSpPr>
-        <a:xfrm>
-          <a:off x="0" y="0"/>
-          <a:ext cx="0" cy="0"/>
-          <a:chOff x="0" y="0"/>
-          <a:chExt cx="0" cy="0"/>
-        </a:xfrm>
-      </p:grpSpPr>
-      <p:sp>
-        <p:nvSpPr>
-          <p:cNvPr id="2" name="Rectangle 1"/>
-          <p:cNvSpPr/>
-          <p:nvPr/>
-        </p:nvSpPr>
-        <p:spPr>
-          <a:xfrm>
-            <a:off x="0" y="0"/>
-            <a:ext cx="12191695" cy="914400"/>
-          </a:xfrm>
-          <a:prstGeom prst="rect">
-            <a:avLst/>
-          </a:prstGeom>
-          <a:solidFill>
-            <a:srgbClr val="EAF0FB"/>
-          </a:solidFill>
-          <a:ln>
-            <a:noFill/>
-          </a:ln>
-        </p:spPr>
-        <p:style>
-          <a:lnRef idx="1">
-            <a:schemeClr val="accent1"/>
-          </a:lnRef>
-          <a:fillRef idx="3">
-            <a:schemeClr val="accent1"/>
-          </a:fillRef>
-          <a:effectRef idx="2">
-            <a:schemeClr val="accent1"/>
-          </a:effectRef>
-          <a:fontRef idx="minor">
-            <a:schemeClr val="lt1"/>
-          </a:fontRef>
-        </p:style>
-        <p:txBody>
-          <a:bodyPr rtlCol="0" anchor="ctr"/>
-          <a:lstStyle/>
-          <a:p>
-            <a:pPr algn="ctr"/>
-            <a:endParaRPr/>
-          </a:p>
-        </p:txBody>
-      </p:sp>
-      <p:sp>
-        <p:nvSpPr>
-          <p:cNvPr id="3" name="Rectangle 2"/>
-          <p:cNvSpPr/>
-          <p:nvPr/>
-        </p:nvSpPr>
-        <p:spPr>
-          <a:xfrm>
-            <a:off x="0" y="914400"/>
-            <a:ext cx="12191695" cy="64008"/>
-          </a:xfrm>
-          <a:prstGeom prst="rect">
-            <a:avLst/>
-          </a:prstGeom>
-          <a:solidFill>
-            <a:srgbClr val="E0B12A"/>
-          </a:solidFill>
-          <a:ln>
-            <a:noFill/>
-          </a:ln>
-        </p:spPr>
-        <p:style>
-          <a:lnRef idx="1">
-            <a:schemeClr val="accent1"/>
-          </a:lnRef>
-          <a:fillRef idx="3">
-            <a:schemeClr val="accent1"/>
-          </a:fillRef>
-          <a:effectRef idx="2">
-            <a:schemeClr val="accent1"/>
-          </a:effectRef>
-          <a:fontRef idx="minor">
-            <a:schemeClr val="lt1"/>
-          </a:fontRef>
-        </p:style>
-        <p:txBody>
-          <a:bodyPr rtlCol="0" anchor="ctr"/>
-          <a:lstStyle/>
-          <a:p>
-            <a:pPr algn="ctr"/>
-            <a:endParaRPr/>
-          </a:p>
-        </p:txBody>
-      </p:sp>
-      <p:sp>
-        <p:nvSpPr>
-          <p:cNvPr id="4" name="TextBox 3"/>
-          <p:cNvSpPr txBox="1"/>
-          <p:nvPr/>
-        </p:nvSpPr>
-        <p:spPr>
-          <a:xfrm>
-            <a:off x="548640" y="109728"/>
-            <a:ext cx="10424160" cy="694944"/>
-          </a:xfrm>
-          <a:prstGeom prst="rect">
-            <a:avLst/>
-          </a:prstGeom>
-          <a:noFill/>
-        </p:spPr>
-        <p:txBody>
-          <a:bodyPr wrap="square" lIns="45720" tIns="27432" rIns="45720" bIns="27432" anchor="ctr">
-            <a:spAutoFit/>
-          </a:bodyPr>
-          <a:lstStyle/>
-          <a:p>
-            <a:pPr algn="l"/>
-            <a:r>
-              <a:rPr sz="3000" b="1">
-                <a:solidFill>
-                  <a:srgbClr val="243B7A"/>
-                </a:solidFill>
-                <a:latin typeface="Calibri"/>
-              </a:rPr>
-              <a:t>Safety and control</a:t>
-            </a:r>
-          </a:p>
-        </p:txBody>
-      </p:sp>
-      <p:pic>
-        <p:nvPicPr>
-          <p:cNvPr id="5" name="Picture 4" descr="emblem-dark.png"/>
-          <p:cNvPicPr>
-            <a:picLocks noChangeAspect="1"/>
-          </p:cNvPicPr>
-          <p:nvPr/>
-        </p:nvPicPr>
-        <p:blipFill>
-          <a:blip r:embed="rId3"/>
-          <a:stretch>
-            <a:fillRect/>
-          </a:stretch>
-        </p:blipFill>
-        <p:spPr>
-          <a:xfrm>
-            <a:off x="11247120" y="91440"/>
-            <a:ext cx="731520" cy="731520"/>
-          </a:xfrm>
-          <a:prstGeom prst="rect">
-            <a:avLst/>
-          </a:prstGeom>
-        </p:spPr>
-      </p:pic>
-      <p:sp>
-        <p:nvSpPr>
-          <p:cNvPr id="6" name="TextBox 5"/>
-          <p:cNvSpPr txBox="1"/>
-          <p:nvPr/>
-        </p:nvSpPr>
-        <p:spPr>
-          <a:xfrm>
-            <a:off x="548640" y="6455664"/>
-            <a:ext cx="8229600" cy="274320"/>
-          </a:xfrm>
-          <a:prstGeom prst="rect">
-            <a:avLst/>
-          </a:prstGeom>
-          <a:noFill/>
-        </p:spPr>
-        <p:txBody>
-          <a:bodyPr wrap="square" lIns="45720" tIns="27432" rIns="45720" bIns="27432" anchor="t">
-            <a:spAutoFit/>
-          </a:bodyPr>
-          <a:lstStyle/>
-          <a:p>
-            <a:pPr algn="l"/>
-            <a:r>
-              <a:rPr sz="1000" b="0">
-                <a:solidFill>
-                  <a:srgbClr val="4B5563"/>
-                </a:solidFill>
-                <a:latin typeface="Calibri"/>
-              </a:rPr>
-              <a:t>Government of Uttar Pradesh  |  Department of Excise  |  Ask the Data: proof of concept</a:t>
-            </a:r>
-          </a:p>
-        </p:txBody>
-      </p:sp>
-      <p:sp>
-        <p:nvSpPr>
-          <p:cNvPr id="7" name="TextBox 6"/>
-          <p:cNvSpPr txBox="1"/>
-          <p:nvPr/>
-        </p:nvSpPr>
-        <p:spPr>
-          <a:xfrm>
-            <a:off x="10972800" y="6455664"/>
-            <a:ext cx="731520" cy="274320"/>
-          </a:xfrm>
-          <a:prstGeom prst="rect">
-            <a:avLst/>
-          </a:prstGeom>
-          <a:noFill/>
-        </p:spPr>
-        <p:txBody>
-          <a:bodyPr wrap="square" lIns="45720" tIns="27432" rIns="45720" bIns="27432" anchor="t">
-            <a:spAutoFit/>
-          </a:bodyPr>
-          <a:lstStyle/>
-          <a:p>
-            <a:pPr algn="r"/>
-            <a:r>
-              <a:rPr sz="1000" b="0">
-                <a:solidFill>
-                  <a:srgbClr val="4B5563"/>
-                </a:solidFill>
-                <a:latin typeface="Calibri"/>
-              </a:rPr>
-              <a:t>6</a:t>
-            </a:r>
-          </a:p>
-        </p:txBody>
-      </p:sp>
-      <p:sp>
-        <p:nvSpPr>
-          <p:cNvPr id="8" name="Rounded Rectangle 7"/>
-          <p:cNvSpPr/>
-          <p:nvPr/>
-        </p:nvSpPr>
-        <p:spPr>
-          <a:xfrm>
-            <a:off x="548640" y="1280160"/>
-            <a:ext cx="11064240" cy="868680"/>
-          </a:xfrm>
-          <a:prstGeom prst="roundRect">
-            <a:avLst>
-              <a:gd name="adj" fmla="val 8000"/>
-            </a:avLst>
-          </a:prstGeom>
-          <a:solidFill>
-            <a:srgbClr val="EAF0FB"/>
-          </a:solidFill>
-          <a:ln w="15875">
-            <a:solidFill>
-              <a:srgbClr val="D0DBF0"/>
-            </a:solidFill>
-          </a:ln>
-          <a:effectLst/>
-        </p:spPr>
-        <p:style>
-          <a:lnRef idx="1">
-            <a:schemeClr val="accent1"/>
-          </a:lnRef>
-          <a:fillRef idx="3">
-            <a:schemeClr val="accent1"/>
-          </a:fillRef>
-          <a:effectRef idx="2">
-            <a:schemeClr val="accent1"/>
-          </a:effectRef>
-          <a:fontRef idx="minor">
-            <a:schemeClr val="lt1"/>
-          </a:fontRef>
-        </p:style>
-        <p:txBody>
-          <a:bodyPr rtlCol="0" anchor="ctr"/>
-          <a:lstStyle/>
-          <a:p>
-            <a:pPr algn="ctr"/>
-            <a:endParaRPr/>
-          </a:p>
-        </p:txBody>
-      </p:sp>
-      <p:sp>
-        <p:nvSpPr>
-          <p:cNvPr id="9" name="Oval 8"/>
-          <p:cNvSpPr/>
-          <p:nvPr/>
-        </p:nvSpPr>
-        <p:spPr>
-          <a:xfrm>
-            <a:off x="731520" y="1371600"/>
-            <a:ext cx="685800" cy="685800"/>
-          </a:xfrm>
-          <a:prstGeom prst="ellipse">
-            <a:avLst/>
-          </a:prstGeom>
-          <a:solidFill>
-            <a:srgbClr val="3E5CA8"/>
-          </a:solidFill>
-          <a:ln>
-            <a:noFill/>
-          </a:ln>
-          <a:effectLst/>
-        </p:spPr>
-        <p:style>
-          <a:lnRef idx="1">
-            <a:schemeClr val="accent1"/>
-          </a:lnRef>
-          <a:fillRef idx="3">
-            <a:schemeClr val="accent1"/>
-          </a:fillRef>
-          <a:effectRef idx="2">
-            <a:schemeClr val="accent1"/>
-          </a:effectRef>
-          <a:fontRef idx="minor">
-            <a:schemeClr val="lt1"/>
-          </a:fontRef>
-        </p:style>
-        <p:txBody>
-          <a:bodyPr rtlCol="0" anchor="ctr"/>
-          <a:lstStyle/>
-          <a:p>
-            <a:pPr algn="ctr"/>
-            <a:endParaRPr/>
-          </a:p>
-        </p:txBody>
-      </p:sp>
-      <p:pic>
-        <p:nvPicPr>
-          <p:cNvPr id="10" name="Picture 9" descr="lock-white.png"/>
-          <p:cNvPicPr>
-            <a:picLocks noChangeAspect="1"/>
-          </p:cNvPicPr>
-          <p:nvPr/>
-        </p:nvPicPr>
-        <p:blipFill>
-          <a:blip r:embed="rId4"/>
-          <a:stretch>
-            <a:fillRect/>
-          </a:stretch>
-        </p:blipFill>
-        <p:spPr>
-          <a:xfrm>
-            <a:off x="882396" y="1522476"/>
-            <a:ext cx="384048" cy="384048"/>
-          </a:xfrm>
-          <a:prstGeom prst="rect">
-            <a:avLst/>
-          </a:prstGeom>
-        </p:spPr>
-      </p:pic>
-      <p:sp>
-        <p:nvSpPr>
-          <p:cNvPr id="11" name="TextBox 10"/>
-          <p:cNvSpPr txBox="1"/>
-          <p:nvPr/>
-        </p:nvSpPr>
-        <p:spPr>
-          <a:xfrm>
-            <a:off x="1600200" y="1325880"/>
-            <a:ext cx="3017520" cy="777240"/>
-          </a:xfrm>
-          <a:prstGeom prst="rect">
-            <a:avLst/>
-          </a:prstGeom>
-          <a:noFill/>
-        </p:spPr>
-        <p:txBody>
-          <a:bodyPr wrap="square" lIns="45720" tIns="27432" rIns="45720" bIns="27432" anchor="ctr">
-            <a:spAutoFit/>
-          </a:bodyPr>
-          <a:lstStyle/>
-          <a:p>
-            <a:pPr algn="l"/>
-            <a:r>
-              <a:rPr sz="2100" b="1">
-                <a:solidFill>
-                  <a:srgbClr val="243B7A"/>
-                </a:solidFill>
-                <a:latin typeface="Calibri"/>
-              </a:rPr>
-              <a:t>Sign-in</a:t>
-            </a:r>
-          </a:p>
-        </p:txBody>
-      </p:sp>
-      <p:sp>
-        <p:nvSpPr>
-          <p:cNvPr id="12" name="TextBox 11"/>
-          <p:cNvSpPr txBox="1"/>
-          <p:nvPr/>
-        </p:nvSpPr>
-        <p:spPr>
-          <a:xfrm>
-            <a:off x="4572000" y="1325880"/>
-            <a:ext cx="6949440" cy="777240"/>
-          </a:xfrm>
-          <a:prstGeom prst="rect">
-            <a:avLst/>
-          </a:prstGeom>
-          <a:noFill/>
-        </p:spPr>
-        <p:txBody>
-          <a:bodyPr wrap="square" lIns="45720" tIns="27432" rIns="45720" bIns="27432" anchor="ctr">
-            <a:spAutoFit/>
-          </a:bodyPr>
-          <a:lstStyle/>
-          <a:p>
-            <a:pPr algn="l"/>
-            <a:r>
-              <a:rPr sz="1600" b="0">
-                <a:solidFill>
-                  <a:srgbClr val="1F2937"/>
-                </a:solidFill>
-                <a:latin typeface="Calibri"/>
-              </a:rPr>
-              <a:t>Email one-time code. Each person has a role: Admin or Analyst.</a:t>
-            </a:r>
-          </a:p>
-        </p:txBody>
-      </p:sp>
-      <p:sp>
-        <p:nvSpPr>
-          <p:cNvPr id="13" name="Rounded Rectangle 12"/>
-          <p:cNvSpPr/>
-          <p:nvPr/>
-        </p:nvSpPr>
-        <p:spPr>
-          <a:xfrm>
-            <a:off x="548640" y="2267712"/>
-            <a:ext cx="11064240" cy="868680"/>
-          </a:xfrm>
-          <a:prstGeom prst="roundRect">
-            <a:avLst>
-              <a:gd name="adj" fmla="val 8000"/>
-            </a:avLst>
-          </a:prstGeom>
-          <a:solidFill>
-            <a:srgbClr val="EAF0FB"/>
-          </a:solidFill>
-          <a:ln w="15875">
-            <a:solidFill>
-              <a:srgbClr val="D0DBF0"/>
-            </a:solidFill>
-          </a:ln>
-          <a:effectLst/>
-        </p:spPr>
-        <p:style>
-          <a:lnRef idx="1">
-            <a:schemeClr val="accent1"/>
-          </a:lnRef>
-          <a:fillRef idx="3">
-            <a:schemeClr val="accent1"/>
-          </a:fillRef>
-          <a:effectRef idx="2">
-            <a:schemeClr val="accent1"/>
-          </a:effectRef>
-          <a:fontRef idx="minor">
-            <a:schemeClr val="lt1"/>
-          </a:fontRef>
-        </p:style>
-        <p:txBody>
-          <a:bodyPr rtlCol="0" anchor="ctr"/>
-          <a:lstStyle/>
-          <a:p>
-            <a:pPr algn="ctr"/>
-            <a:endParaRPr/>
-          </a:p>
-        </p:txBody>
-      </p:sp>
-      <p:sp>
-        <p:nvSpPr>
-          <p:cNvPr id="14" name="Oval 13"/>
-          <p:cNvSpPr/>
-          <p:nvPr/>
-        </p:nvSpPr>
-        <p:spPr>
-          <a:xfrm>
-            <a:off x="731520" y="2359152"/>
-            <a:ext cx="685800" cy="685800"/>
-          </a:xfrm>
-          <a:prstGeom prst="ellipse">
-            <a:avLst/>
-          </a:prstGeom>
-          <a:solidFill>
-            <a:srgbClr val="3E5CA8"/>
-          </a:solidFill>
-          <a:ln>
-            <a:noFill/>
-          </a:ln>
-          <a:effectLst/>
-        </p:spPr>
-        <p:style>
-          <a:lnRef idx="1">
-            <a:schemeClr val="accent1"/>
-          </a:lnRef>
-          <a:fillRef idx="3">
-            <a:schemeClr val="accent1"/>
-          </a:fillRef>
-          <a:effectRef idx="2">
-            <a:schemeClr val="accent1"/>
-          </a:effectRef>
-          <a:fontRef idx="minor">
-            <a:schemeClr val="lt1"/>
-          </a:fontRef>
-        </p:style>
-        <p:txBody>
-          <a:bodyPr rtlCol="0" anchor="ctr"/>
-          <a:lstStyle/>
-          <a:p>
-            <a:pPr algn="ctr"/>
-            <a:endParaRPr/>
-          </a:p>
-        </p:txBody>
-      </p:sp>
-      <p:pic>
-        <p:nvPicPr>
-          <p:cNvPr id="15" name="Picture 14" descr="eye-white.png"/>
-          <p:cNvPicPr>
-            <a:picLocks noChangeAspect="1"/>
-          </p:cNvPicPr>
-          <p:nvPr/>
-        </p:nvPicPr>
-        <p:blipFill>
-          <a:blip r:embed="rId5"/>
-          <a:stretch>
-            <a:fillRect/>
-          </a:stretch>
-        </p:blipFill>
-        <p:spPr>
-          <a:xfrm>
-            <a:off x="882396" y="2510028"/>
-            <a:ext cx="384048" cy="384048"/>
-          </a:xfrm>
-          <a:prstGeom prst="rect">
-            <a:avLst/>
-          </a:prstGeom>
-        </p:spPr>
-      </p:pic>
-      <p:sp>
-        <p:nvSpPr>
-          <p:cNvPr id="16" name="TextBox 15"/>
-          <p:cNvSpPr txBox="1"/>
-          <p:nvPr/>
-        </p:nvSpPr>
-        <p:spPr>
-          <a:xfrm>
-            <a:off x="1600200" y="2313432"/>
-            <a:ext cx="3017520" cy="777240"/>
-          </a:xfrm>
-          <a:prstGeom prst="rect">
-            <a:avLst/>
-          </a:prstGeom>
-          <a:noFill/>
-        </p:spPr>
-        <p:txBody>
-          <a:bodyPr wrap="square" lIns="45720" tIns="27432" rIns="45720" bIns="27432" anchor="ctr">
-            <a:spAutoFit/>
-          </a:bodyPr>
-          <a:lstStyle/>
-          <a:p>
-            <a:pPr algn="l"/>
-            <a:r>
-              <a:rPr sz="2100" b="1">
-                <a:solidFill>
-                  <a:srgbClr val="243B7A"/>
-                </a:solidFill>
-                <a:latin typeface="Calibri"/>
-              </a:rPr>
-              <a:t>Read-only data</a:t>
-            </a:r>
-          </a:p>
-        </p:txBody>
-      </p:sp>
-      <p:sp>
-        <p:nvSpPr>
-          <p:cNvPr id="17" name="TextBox 16"/>
-          <p:cNvSpPr txBox="1"/>
-          <p:nvPr/>
-        </p:nvSpPr>
-        <p:spPr>
-          <a:xfrm>
-            <a:off x="4572000" y="2313432"/>
-            <a:ext cx="6949440" cy="777240"/>
-          </a:xfrm>
-          <a:prstGeom prst="rect">
-            <a:avLst/>
-          </a:prstGeom>
-          <a:noFill/>
-        </p:spPr>
-        <p:txBody>
-          <a:bodyPr wrap="square" lIns="45720" tIns="27432" rIns="45720" bIns="27432" anchor="ctr">
-            <a:spAutoFit/>
-          </a:bodyPr>
-          <a:lstStyle/>
-          <a:p>
-            <a:pPr algn="l"/>
-            <a:r>
-              <a:rPr sz="1600" b="0">
-                <a:solidFill>
-                  <a:srgbClr val="1F2937"/>
-                </a:solidFill>
-                <a:latin typeface="Calibri"/>
-              </a:rPr>
-              <a:t>The AI connects with a database account that can read but cannot change anything.</a:t>
-            </a:r>
-          </a:p>
-        </p:txBody>
-      </p:sp>
-      <p:sp>
-        <p:nvSpPr>
-          <p:cNvPr id="18" name="Rounded Rectangle 17"/>
-          <p:cNvSpPr/>
-          <p:nvPr/>
-        </p:nvSpPr>
-        <p:spPr>
-          <a:xfrm>
-            <a:off x="548640" y="3255264"/>
-            <a:ext cx="11064240" cy="868680"/>
-          </a:xfrm>
-          <a:prstGeom prst="roundRect">
-            <a:avLst>
-              <a:gd name="adj" fmla="val 8000"/>
-            </a:avLst>
-          </a:prstGeom>
-          <a:solidFill>
-            <a:srgbClr val="EAF0FB"/>
-          </a:solidFill>
-          <a:ln w="15875">
-            <a:solidFill>
-              <a:srgbClr val="D0DBF0"/>
-            </a:solidFill>
-          </a:ln>
-          <a:effectLst/>
-        </p:spPr>
-        <p:style>
-          <a:lnRef idx="1">
-            <a:schemeClr val="accent1"/>
-          </a:lnRef>
-          <a:fillRef idx="3">
-            <a:schemeClr val="accent1"/>
-          </a:fillRef>
-          <a:effectRef idx="2">
-            <a:schemeClr val="accent1"/>
-          </a:effectRef>
-          <a:fontRef idx="minor">
-            <a:schemeClr val="lt1"/>
-          </a:fontRef>
-        </p:style>
-        <p:txBody>
-          <a:bodyPr rtlCol="0" anchor="ctr"/>
-          <a:lstStyle/>
-          <a:p>
-            <a:pPr algn="ctr"/>
-            <a:endParaRPr/>
-          </a:p>
-        </p:txBody>
-      </p:sp>
-      <p:sp>
-        <p:nvSpPr>
-          <p:cNvPr id="19" name="Oval 18"/>
-          <p:cNvSpPr/>
-          <p:nvPr/>
-        </p:nvSpPr>
-        <p:spPr>
-          <a:xfrm>
-            <a:off x="731520" y="3346704"/>
-            <a:ext cx="685800" cy="685800"/>
-          </a:xfrm>
-          <a:prstGeom prst="ellipse">
-            <a:avLst/>
-          </a:prstGeom>
-          <a:solidFill>
-            <a:srgbClr val="3E5CA8"/>
-          </a:solidFill>
-          <a:ln>
-            <a:noFill/>
-          </a:ln>
-          <a:effectLst/>
-        </p:spPr>
-        <p:style>
-          <a:lnRef idx="1">
-            <a:schemeClr val="accent1"/>
-          </a:lnRef>
-          <a:fillRef idx="3">
-            <a:schemeClr val="accent1"/>
-          </a:fillRef>
-          <a:effectRef idx="2">
-            <a:schemeClr val="accent1"/>
-          </a:effectRef>
-          <a:fontRef idx="minor">
-            <a:schemeClr val="lt1"/>
-          </a:fontRef>
-        </p:style>
-        <p:txBody>
-          <a:bodyPr rtlCol="0" anchor="ctr"/>
-          <a:lstStyle/>
-          <a:p>
-            <a:pPr algn="ctr"/>
-            <a:endParaRPr/>
-          </a:p>
-        </p:txBody>
-      </p:sp>
-      <p:pic>
-        <p:nvPicPr>
-          <p:cNvPr id="20" name="Picture 19" descr="search-white.png"/>
-          <p:cNvPicPr>
-            <a:picLocks noChangeAspect="1"/>
-          </p:cNvPicPr>
-          <p:nvPr/>
-        </p:nvPicPr>
-        <p:blipFill>
-          <a:blip r:embed="rId6"/>
-          <a:stretch>
-            <a:fillRect/>
-          </a:stretch>
-        </p:blipFill>
-        <p:spPr>
-          <a:xfrm>
-            <a:off x="882396" y="3497580"/>
-            <a:ext cx="384048" cy="384048"/>
-          </a:xfrm>
-          <a:prstGeom prst="rect">
-            <a:avLst/>
-          </a:prstGeom>
-        </p:spPr>
-      </p:pic>
-      <p:sp>
-        <p:nvSpPr>
-          <p:cNvPr id="21" name="TextBox 20"/>
-          <p:cNvSpPr txBox="1"/>
-          <p:nvPr/>
-        </p:nvSpPr>
-        <p:spPr>
-          <a:xfrm>
-            <a:off x="1600200" y="3300984"/>
-            <a:ext cx="3017520" cy="777240"/>
-          </a:xfrm>
-          <a:prstGeom prst="rect">
-            <a:avLst/>
-          </a:prstGeom>
-          <a:noFill/>
-        </p:spPr>
-        <p:txBody>
-          <a:bodyPr wrap="square" lIns="45720" tIns="27432" rIns="45720" bIns="27432" anchor="ctr">
-            <a:spAutoFit/>
-          </a:bodyPr>
-          <a:lstStyle/>
-          <a:p>
-            <a:pPr algn="l"/>
-            <a:r>
-              <a:rPr sz="2100" b="1">
-                <a:solidFill>
-                  <a:srgbClr val="243B7A"/>
-                </a:solidFill>
-                <a:latin typeface="Calibri"/>
-              </a:rPr>
-              <a:t>Checked queries</a:t>
-            </a:r>
-          </a:p>
-        </p:txBody>
-      </p:sp>
-      <p:sp>
-        <p:nvSpPr>
-          <p:cNvPr id="22" name="TextBox 21"/>
-          <p:cNvSpPr txBox="1"/>
-          <p:nvPr/>
-        </p:nvSpPr>
-        <p:spPr>
-          <a:xfrm>
-            <a:off x="4572000" y="3300984"/>
-            <a:ext cx="6949440" cy="777240"/>
-          </a:xfrm>
-          <a:prstGeom prst="rect">
-            <a:avLst/>
-          </a:prstGeom>
-          <a:noFill/>
-        </p:spPr>
-        <p:txBody>
-          <a:bodyPr wrap="square" lIns="45720" tIns="27432" rIns="45720" bIns="27432" anchor="ctr">
-            <a:spAutoFit/>
-          </a:bodyPr>
-          <a:lstStyle/>
-          <a:p>
-            <a:pPr algn="l"/>
-            <a:r>
-              <a:rPr sz="1600" b="0">
-                <a:solidFill>
-                  <a:srgbClr val="1F2937"/>
-                </a:solidFill>
-                <a:latin typeface="Calibri"/>
-              </a:rPr>
-              <a:t>Every query is inspected first. Only a single read request is allowed.</a:t>
-            </a:r>
-          </a:p>
-        </p:txBody>
-      </p:sp>
-      <p:sp>
-        <p:nvSpPr>
-          <p:cNvPr id="23" name="Rounded Rectangle 22"/>
-          <p:cNvSpPr/>
-          <p:nvPr/>
-        </p:nvSpPr>
-        <p:spPr>
-          <a:xfrm>
-            <a:off x="548640" y="4242816"/>
-            <a:ext cx="11064240" cy="868680"/>
-          </a:xfrm>
-          <a:prstGeom prst="roundRect">
-            <a:avLst>
-              <a:gd name="adj" fmla="val 8000"/>
-            </a:avLst>
-          </a:prstGeom>
-          <a:solidFill>
-            <a:srgbClr val="EAF0FB"/>
-          </a:solidFill>
-          <a:ln w="15875">
-            <a:solidFill>
-              <a:srgbClr val="D0DBF0"/>
-            </a:solidFill>
-          </a:ln>
-          <a:effectLst/>
-        </p:spPr>
-        <p:style>
-          <a:lnRef idx="1">
-            <a:schemeClr val="accent1"/>
-          </a:lnRef>
-          <a:fillRef idx="3">
-            <a:schemeClr val="accent1"/>
-          </a:fillRef>
-          <a:effectRef idx="2">
-            <a:schemeClr val="accent1"/>
-          </a:effectRef>
-          <a:fontRef idx="minor">
-            <a:schemeClr val="lt1"/>
-          </a:fontRef>
-        </p:style>
-        <p:txBody>
-          <a:bodyPr rtlCol="0" anchor="ctr"/>
-          <a:lstStyle/>
-          <a:p>
-            <a:pPr algn="ctr"/>
-            <a:endParaRPr/>
-          </a:p>
-        </p:txBody>
-      </p:sp>
-      <p:sp>
-        <p:nvSpPr>
-          <p:cNvPr id="24" name="Oval 23"/>
-          <p:cNvSpPr/>
-          <p:nvPr/>
-        </p:nvSpPr>
-        <p:spPr>
-          <a:xfrm>
-            <a:off x="731520" y="4334256"/>
-            <a:ext cx="685800" cy="685800"/>
-          </a:xfrm>
-          <a:prstGeom prst="ellipse">
-            <a:avLst/>
-          </a:prstGeom>
-          <a:solidFill>
-            <a:srgbClr val="3E5CA8"/>
-          </a:solidFill>
-          <a:ln>
-            <a:noFill/>
-          </a:ln>
-          <a:effectLst/>
-        </p:spPr>
-        <p:style>
-          <a:lnRef idx="1">
-            <a:schemeClr val="accent1"/>
-          </a:lnRef>
-          <a:fillRef idx="3">
-            <a:schemeClr val="accent1"/>
-          </a:fillRef>
-          <a:effectRef idx="2">
-            <a:schemeClr val="accent1"/>
-          </a:effectRef>
-          <a:fontRef idx="minor">
-            <a:schemeClr val="lt1"/>
-          </a:fontRef>
-        </p:style>
-        <p:txBody>
-          <a:bodyPr rtlCol="0" anchor="ctr"/>
-          <a:lstStyle/>
-          <a:p>
-            <a:pPr algn="ctr"/>
-            <a:endParaRPr/>
-          </a:p>
-        </p:txBody>
-      </p:sp>
-      <p:pic>
-        <p:nvPicPr>
-          <p:cNvPr id="25" name="Picture 24" descr="shield-white.png"/>
-          <p:cNvPicPr>
-            <a:picLocks noChangeAspect="1"/>
-          </p:cNvPicPr>
-          <p:nvPr/>
-        </p:nvPicPr>
-        <p:blipFill>
-          <a:blip r:embed="rId7"/>
-          <a:stretch>
-            <a:fillRect/>
-          </a:stretch>
-        </p:blipFill>
-        <p:spPr>
-          <a:xfrm>
-            <a:off x="882396" y="4485132"/>
-            <a:ext cx="384048" cy="384048"/>
-          </a:xfrm>
-          <a:prstGeom prst="rect">
-            <a:avLst/>
-          </a:prstGeom>
-        </p:spPr>
-      </p:pic>
-      <p:sp>
-        <p:nvSpPr>
-          <p:cNvPr id="26" name="TextBox 25"/>
-          <p:cNvSpPr txBox="1"/>
-          <p:nvPr/>
-        </p:nvSpPr>
-        <p:spPr>
-          <a:xfrm>
-            <a:off x="1600200" y="4288536"/>
-            <a:ext cx="3017520" cy="777240"/>
-          </a:xfrm>
-          <a:prstGeom prst="rect">
-            <a:avLst/>
-          </a:prstGeom>
-          <a:noFill/>
-        </p:spPr>
-        <p:txBody>
-          <a:bodyPr wrap="square" lIns="45720" tIns="27432" rIns="45720" bIns="27432" anchor="ctr">
-            <a:spAutoFit/>
-          </a:bodyPr>
-          <a:lstStyle/>
-          <a:p>
-            <a:pPr algn="l"/>
-            <a:r>
-              <a:rPr sz="2100" b="1">
-                <a:solidFill>
-                  <a:srgbClr val="243B7A"/>
-                </a:solidFill>
-                <a:latin typeface="Calibri"/>
-              </a:rPr>
-              <a:t>Locked box for charts</a:t>
-            </a:r>
-          </a:p>
-        </p:txBody>
-      </p:sp>
-      <p:sp>
-        <p:nvSpPr>
-          <p:cNvPr id="27" name="TextBox 26"/>
-          <p:cNvSpPr txBox="1"/>
-          <p:nvPr/>
-        </p:nvSpPr>
-        <p:spPr>
-          <a:xfrm>
-            <a:off x="4572000" y="4288536"/>
-            <a:ext cx="6949440" cy="777240"/>
-          </a:xfrm>
-          <a:prstGeom prst="rect">
-            <a:avLst/>
-          </a:prstGeom>
-          <a:noFill/>
-        </p:spPr>
-        <p:txBody>
-          <a:bodyPr wrap="square" lIns="45720" tIns="27432" rIns="45720" bIns="27432" anchor="ctr">
-            <a:spAutoFit/>
-          </a:bodyPr>
-          <a:lstStyle/>
-          <a:p>
-            <a:pPr algn="l"/>
-            <a:r>
-              <a:rPr sz="1600" b="0">
-                <a:solidFill>
-                  <a:srgbClr val="1F2937"/>
-                </a:solidFill>
-                <a:latin typeface="Calibri"/>
-              </a:rPr>
-              <a:t>Chart code runs in an isolated space: no network, limited time and memory.</a:t>
-            </a:r>
-          </a:p>
-        </p:txBody>
-      </p:sp>
-      <p:sp>
-        <p:nvSpPr>
-          <p:cNvPr id="28" name="Rounded Rectangle 27"/>
-          <p:cNvSpPr/>
-          <p:nvPr/>
-        </p:nvSpPr>
-        <p:spPr>
-          <a:xfrm>
-            <a:off x="548640" y="5230368"/>
-            <a:ext cx="11064240" cy="868680"/>
-          </a:xfrm>
-          <a:prstGeom prst="roundRect">
-            <a:avLst>
-              <a:gd name="adj" fmla="val 8000"/>
-            </a:avLst>
-          </a:prstGeom>
-          <a:solidFill>
-            <a:srgbClr val="EAF0FB"/>
-          </a:solidFill>
-          <a:ln w="15875">
-            <a:solidFill>
-              <a:srgbClr val="D0DBF0"/>
-            </a:solidFill>
-          </a:ln>
-          <a:effectLst/>
-        </p:spPr>
-        <p:style>
-          <a:lnRef idx="1">
-            <a:schemeClr val="accent1"/>
-          </a:lnRef>
-          <a:fillRef idx="3">
-            <a:schemeClr val="accent1"/>
-          </a:fillRef>
-          <a:effectRef idx="2">
-            <a:schemeClr val="accent1"/>
-          </a:effectRef>
-          <a:fontRef idx="minor">
-            <a:schemeClr val="lt1"/>
-          </a:fontRef>
-        </p:style>
-        <p:txBody>
-          <a:bodyPr rtlCol="0" anchor="ctr"/>
-          <a:lstStyle/>
-          <a:p>
-            <a:pPr algn="ctr"/>
-            <a:endParaRPr/>
-          </a:p>
-        </p:txBody>
-      </p:sp>
-      <p:sp>
-        <p:nvSpPr>
-          <p:cNvPr id="29" name="Oval 28"/>
-          <p:cNvSpPr/>
-          <p:nvPr/>
-        </p:nvSpPr>
-        <p:spPr>
-          <a:xfrm>
-            <a:off x="731520" y="5321808"/>
-            <a:ext cx="685800" cy="685800"/>
-          </a:xfrm>
-          <a:prstGeom prst="ellipse">
-            <a:avLst/>
-          </a:prstGeom>
-          <a:solidFill>
-            <a:srgbClr val="3E5CA8"/>
-          </a:solidFill>
-          <a:ln>
-            <a:noFill/>
-          </a:ln>
-          <a:effectLst/>
-        </p:spPr>
-        <p:style>
-          <a:lnRef idx="1">
-            <a:schemeClr val="accent1"/>
-          </a:lnRef>
-          <a:fillRef idx="3">
-            <a:schemeClr val="accent1"/>
-          </a:fillRef>
-          <a:effectRef idx="2">
-            <a:schemeClr val="accent1"/>
-          </a:effectRef>
-          <a:fontRef idx="minor">
-            <a:schemeClr val="lt1"/>
-          </a:fontRef>
-        </p:style>
-        <p:txBody>
-          <a:bodyPr rtlCol="0" anchor="ctr"/>
-          <a:lstStyle/>
-          <a:p>
-            <a:pPr algn="ctr"/>
-            <a:endParaRPr/>
-          </a:p>
-        </p:txBody>
-      </p:sp>
-      <p:pic>
-        <p:nvPicPr>
-          <p:cNvPr id="30" name="Picture 29" descr="report-white.png"/>
-          <p:cNvPicPr>
-            <a:picLocks noChangeAspect="1"/>
-          </p:cNvPicPr>
-          <p:nvPr/>
-        </p:nvPicPr>
-        <p:blipFill>
-          <a:blip r:embed="rId8"/>
-          <a:stretch>
-            <a:fillRect/>
-          </a:stretch>
-        </p:blipFill>
-        <p:spPr>
-          <a:xfrm>
-            <a:off x="882396" y="5472684"/>
-            <a:ext cx="384048" cy="384048"/>
-          </a:xfrm>
-          <a:prstGeom prst="rect">
-            <a:avLst/>
-          </a:prstGeom>
-        </p:spPr>
-      </p:pic>
-      <p:sp>
-        <p:nvSpPr>
-          <p:cNvPr id="31" name="TextBox 30"/>
-          <p:cNvSpPr txBox="1"/>
-          <p:nvPr/>
-        </p:nvSpPr>
-        <p:spPr>
-          <a:xfrm>
-            <a:off x="1600200" y="5276088"/>
-            <a:ext cx="3017520" cy="777240"/>
-          </a:xfrm>
-          <a:prstGeom prst="rect">
-            <a:avLst/>
-          </a:prstGeom>
-          <a:noFill/>
-        </p:spPr>
-        <p:txBody>
-          <a:bodyPr wrap="square" lIns="45720" tIns="27432" rIns="45720" bIns="27432" anchor="ctr">
-            <a:spAutoFit/>
-          </a:bodyPr>
-          <a:lstStyle/>
-          <a:p>
-            <a:pPr algn="l"/>
-            <a:r>
-              <a:rPr sz="2100" b="1">
-                <a:solidFill>
-                  <a:srgbClr val="243B7A"/>
-                </a:solidFill>
-                <a:latin typeface="Calibri"/>
-              </a:rPr>
-              <a:t>Full record</a:t>
-            </a:r>
-          </a:p>
-        </p:txBody>
-      </p:sp>
-      <p:sp>
-        <p:nvSpPr>
-          <p:cNvPr id="32" name="TextBox 31"/>
-          <p:cNvSpPr txBox="1"/>
-          <p:nvPr/>
-        </p:nvSpPr>
-        <p:spPr>
-          <a:xfrm>
-            <a:off x="4572000" y="5276088"/>
-            <a:ext cx="6949440" cy="777240"/>
-          </a:xfrm>
-          <a:prstGeom prst="rect">
-            <a:avLst/>
-          </a:prstGeom>
-          <a:noFill/>
-        </p:spPr>
-        <p:txBody>
-          <a:bodyPr wrap="square" lIns="45720" tIns="27432" rIns="45720" bIns="27432" anchor="ctr">
-            <a:spAutoFit/>
-          </a:bodyPr>
-          <a:lstStyle/>
-          <a:p>
-            <a:pPr algn="l"/>
-            <a:r>
-              <a:rPr sz="1600" b="0">
-                <a:solidFill>
-                  <a:srgbClr val="1F2937"/>
-                </a:solidFill>
-                <a:latin typeface="Calibri"/>
-              </a:rPr>
-              <a:t>Every question, query and action is logged for audit.</a:t>
-            </a:r>
-          </a:p>
-        </p:txBody>
-      </p:sp>
-    </p:spTree>
-  </p:cSld>
-  <p:clrMapOvr>
-    <a:masterClrMapping/>
-  </p:clrMapOvr>
-</p:sld>
-</file>
-
-<file path=ppt/slides/slide14.xml><?xml version="1.0" encoding="utf-8"?>
-<p:sld xmlns:a="http://schemas.openxmlformats.org/drawingml/2006/main" xmlns:r="http://schemas.openxmlformats.org/officeDocument/2006/relationships" xmlns:p="http://schemas.openxmlformats.org/presentationml/2006/main">
-  <p:cSld>
-    <p:spTree>
-      <p:nvGrpSpPr>
-        <p:cNvPr id="1" name=""/>
-        <p:cNvGrpSpPr/>
-        <p:nvPr/>
-      </p:nvGrpSpPr>
-      <p:grpSpPr>
-        <a:xfrm>
-          <a:off x="0" y="0"/>
-          <a:ext cx="0" cy="0"/>
-          <a:chOff x="0" y="0"/>
-          <a:chExt cx="0" cy="0"/>
-        </a:xfrm>
-      </p:grpSpPr>
-      <p:sp>
-        <p:nvSpPr>
-          <p:cNvPr id="2" name="Rectangle 1"/>
-          <p:cNvSpPr/>
-          <p:nvPr/>
-        </p:nvSpPr>
-        <p:spPr>
-          <a:xfrm>
-            <a:off x="0" y="0"/>
-            <a:ext cx="12191695" cy="914400"/>
-          </a:xfrm>
-          <a:prstGeom prst="rect">
-            <a:avLst/>
-          </a:prstGeom>
-          <a:solidFill>
-            <a:srgbClr val="EAF0FB"/>
-          </a:solidFill>
-          <a:ln>
-            <a:noFill/>
-          </a:ln>
-        </p:spPr>
-        <p:style>
-          <a:lnRef idx="1">
-            <a:schemeClr val="accent1"/>
-          </a:lnRef>
-          <a:fillRef idx="3">
-            <a:schemeClr val="accent1"/>
-          </a:fillRef>
-          <a:effectRef idx="2">
-            <a:schemeClr val="accent1"/>
-          </a:effectRef>
-          <a:fontRef idx="minor">
-            <a:schemeClr val="lt1"/>
-          </a:fontRef>
-        </p:style>
-        <p:txBody>
-          <a:bodyPr rtlCol="0" anchor="ctr"/>
-          <a:lstStyle/>
-          <a:p>
-            <a:pPr algn="ctr"/>
-            <a:endParaRPr/>
-          </a:p>
-        </p:txBody>
-      </p:sp>
-      <p:sp>
-        <p:nvSpPr>
-          <p:cNvPr id="3" name="Rectangle 2"/>
-          <p:cNvSpPr/>
-          <p:nvPr/>
-        </p:nvSpPr>
-        <p:spPr>
-          <a:xfrm>
-            <a:off x="0" y="914400"/>
-            <a:ext cx="12191695" cy="64008"/>
-          </a:xfrm>
-          <a:prstGeom prst="rect">
-            <a:avLst/>
-          </a:prstGeom>
-          <a:solidFill>
-            <a:srgbClr val="E0B12A"/>
-          </a:solidFill>
-          <a:ln>
-            <a:noFill/>
-          </a:ln>
-        </p:spPr>
-        <p:style>
-          <a:lnRef idx="1">
-            <a:schemeClr val="accent1"/>
-          </a:lnRef>
-          <a:fillRef idx="3">
-            <a:schemeClr val="accent1"/>
-          </a:fillRef>
-          <a:effectRef idx="2">
-            <a:schemeClr val="accent1"/>
-          </a:effectRef>
-          <a:fontRef idx="minor">
-            <a:schemeClr val="lt1"/>
-          </a:fontRef>
-        </p:style>
-        <p:txBody>
-          <a:bodyPr rtlCol="0" anchor="ctr"/>
-          <a:lstStyle/>
-          <a:p>
-            <a:pPr algn="ctr"/>
-            <a:endParaRPr/>
-          </a:p>
-        </p:txBody>
-      </p:sp>
-      <p:sp>
-        <p:nvSpPr>
-          <p:cNvPr id="4" name="TextBox 3"/>
-          <p:cNvSpPr txBox="1"/>
-          <p:nvPr/>
-        </p:nvSpPr>
-        <p:spPr>
-          <a:xfrm>
-            <a:off x="548640" y="109728"/>
-            <a:ext cx="10424160" cy="694944"/>
-          </a:xfrm>
-          <a:prstGeom prst="rect">
-            <a:avLst/>
-          </a:prstGeom>
-          <a:noFill/>
-        </p:spPr>
-        <p:txBody>
-          <a:bodyPr wrap="square" lIns="45720" tIns="27432" rIns="45720" bIns="27432" anchor="ctr">
-            <a:spAutoFit/>
-          </a:bodyPr>
-          <a:lstStyle/>
-          <a:p>
-            <a:pPr algn="l"/>
-            <a:r>
-              <a:rPr sz="3000" b="1">
-                <a:solidFill>
-                  <a:srgbClr val="243B7A"/>
-                </a:solidFill>
-                <a:latin typeface="Calibri"/>
-              </a:rPr>
-              <a:t>What comes next</a:t>
-            </a:r>
-          </a:p>
-        </p:txBody>
-      </p:sp>
-      <p:pic>
-        <p:nvPicPr>
-          <p:cNvPr id="5" name="Picture 4" descr="emblem-dark.png"/>
-          <p:cNvPicPr>
-            <a:picLocks noChangeAspect="1"/>
-          </p:cNvPicPr>
-          <p:nvPr/>
-        </p:nvPicPr>
-        <p:blipFill>
-          <a:blip r:embed="rId3"/>
-          <a:stretch>
-            <a:fillRect/>
-          </a:stretch>
-        </p:blipFill>
-        <p:spPr>
-          <a:xfrm>
-            <a:off x="11247120" y="91440"/>
-            <a:ext cx="731520" cy="731520"/>
-          </a:xfrm>
-          <a:prstGeom prst="rect">
-            <a:avLst/>
-          </a:prstGeom>
-        </p:spPr>
-      </p:pic>
-      <p:sp>
-        <p:nvSpPr>
-          <p:cNvPr id="6" name="TextBox 5"/>
-          <p:cNvSpPr txBox="1"/>
-          <p:nvPr/>
-        </p:nvSpPr>
-        <p:spPr>
-          <a:xfrm>
-            <a:off x="548640" y="6455664"/>
-            <a:ext cx="8229600" cy="274320"/>
-          </a:xfrm>
-          <a:prstGeom prst="rect">
-            <a:avLst/>
-          </a:prstGeom>
-          <a:noFill/>
-        </p:spPr>
-        <p:txBody>
-          <a:bodyPr wrap="square" lIns="45720" tIns="27432" rIns="45720" bIns="27432" anchor="t">
-            <a:spAutoFit/>
-          </a:bodyPr>
-          <a:lstStyle/>
-          <a:p>
-            <a:pPr algn="l"/>
-            <a:r>
-              <a:rPr sz="1000" b="0">
-                <a:solidFill>
-                  <a:srgbClr val="4B5563"/>
-                </a:solidFill>
-                <a:latin typeface="Calibri"/>
-              </a:rPr>
-              <a:t>Government of Uttar Pradesh  |  Department of Excise  |  Ask the Data: proof of concept</a:t>
-            </a:r>
-          </a:p>
-        </p:txBody>
-      </p:sp>
-      <p:sp>
-        <p:nvSpPr>
-          <p:cNvPr id="7" name="TextBox 6"/>
-          <p:cNvSpPr txBox="1"/>
-          <p:nvPr/>
-        </p:nvSpPr>
-        <p:spPr>
-          <a:xfrm>
-            <a:off x="10972800" y="6455664"/>
-            <a:ext cx="731520" cy="274320"/>
-          </a:xfrm>
-          <a:prstGeom prst="rect">
-            <a:avLst/>
-          </a:prstGeom>
-          <a:noFill/>
-        </p:spPr>
-        <p:txBody>
-          <a:bodyPr wrap="square" lIns="45720" tIns="27432" rIns="45720" bIns="27432" anchor="t">
-            <a:spAutoFit/>
-          </a:bodyPr>
-          <a:lstStyle/>
-          <a:p>
-            <a:pPr algn="r"/>
-            <a:r>
-              <a:rPr sz="1000" b="0">
-                <a:solidFill>
-                  <a:srgbClr val="4B5563"/>
-                </a:solidFill>
-                <a:latin typeface="Calibri"/>
-              </a:rPr>
-              <a:t>7</a:t>
-            </a:r>
-          </a:p>
-        </p:txBody>
-      </p:sp>
-      <p:sp>
-        <p:nvSpPr>
-          <p:cNvPr id="8" name="Rounded Rectangle 7"/>
-          <p:cNvSpPr/>
-          <p:nvPr/>
-        </p:nvSpPr>
-        <p:spPr>
-          <a:xfrm>
-            <a:off x="548640" y="1371600"/>
-            <a:ext cx="5440680" cy="2148840"/>
-          </a:xfrm>
-          <a:prstGeom prst="roundRect">
-            <a:avLst>
-              <a:gd name="adj" fmla="val 8000"/>
-            </a:avLst>
-          </a:prstGeom>
-          <a:solidFill>
-            <a:srgbClr val="EAF0FB"/>
-          </a:solidFill>
-          <a:ln w="15875">
-            <a:solidFill>
-              <a:srgbClr val="D0DBF0"/>
-            </a:solidFill>
-          </a:ln>
-          <a:effectLst/>
-        </p:spPr>
-        <p:style>
-          <a:lnRef idx="1">
-            <a:schemeClr val="accent1"/>
-          </a:lnRef>
-          <a:fillRef idx="3">
-            <a:schemeClr val="accent1"/>
-          </a:fillRef>
-          <a:effectRef idx="2">
-            <a:schemeClr val="accent1"/>
-          </a:effectRef>
-          <a:fontRef idx="minor">
-            <a:schemeClr val="lt1"/>
-          </a:fontRef>
-        </p:style>
-        <p:txBody>
-          <a:bodyPr rtlCol="0" anchor="ctr"/>
-          <a:lstStyle/>
-          <a:p>
-            <a:pPr algn="ctr"/>
-            <a:endParaRPr/>
-          </a:p>
-        </p:txBody>
-      </p:sp>
-      <p:sp>
-        <p:nvSpPr>
-          <p:cNvPr id="9" name="Oval 8"/>
-          <p:cNvSpPr/>
-          <p:nvPr/>
-        </p:nvSpPr>
-        <p:spPr>
-          <a:xfrm>
-            <a:off x="822959" y="1645920"/>
-            <a:ext cx="731520" cy="731520"/>
-          </a:xfrm>
-          <a:prstGeom prst="ellipse">
-            <a:avLst/>
-          </a:prstGeom>
-          <a:solidFill>
-            <a:srgbClr val="3E5CA8"/>
-          </a:solidFill>
-          <a:ln>
-            <a:noFill/>
-          </a:ln>
-          <a:effectLst/>
-        </p:spPr>
-        <p:style>
-          <a:lnRef idx="1">
-            <a:schemeClr val="accent1"/>
-          </a:lnRef>
-          <a:fillRef idx="3">
-            <a:schemeClr val="accent1"/>
-          </a:fillRef>
-          <a:effectRef idx="2">
-            <a:schemeClr val="accent1"/>
-          </a:effectRef>
-          <a:fontRef idx="minor">
-            <a:schemeClr val="lt1"/>
-          </a:fontRef>
-        </p:style>
-        <p:txBody>
-          <a:bodyPr rtlCol="0" anchor="ctr"/>
-          <a:lstStyle/>
-          <a:p>
-            <a:pPr algn="ctr"/>
-            <a:endParaRPr/>
-          </a:p>
-        </p:txBody>
-      </p:sp>
-      <p:pic>
-        <p:nvPicPr>
-          <p:cNvPr id="10" name="Picture 9" descr="server-white.png"/>
-          <p:cNvPicPr>
-            <a:picLocks noChangeAspect="1"/>
-          </p:cNvPicPr>
-          <p:nvPr/>
-        </p:nvPicPr>
-        <p:blipFill>
-          <a:blip r:embed="rId4"/>
-          <a:stretch>
-            <a:fillRect/>
-          </a:stretch>
-        </p:blipFill>
-        <p:spPr>
-          <a:xfrm>
-            <a:off x="983894" y="1806854"/>
-            <a:ext cx="409651" cy="409651"/>
-          </a:xfrm>
-          <a:prstGeom prst="rect">
-            <a:avLst/>
-          </a:prstGeom>
-        </p:spPr>
-      </p:pic>
-      <p:sp>
-        <p:nvSpPr>
-          <p:cNvPr id="11" name="TextBox 10"/>
-          <p:cNvSpPr txBox="1"/>
-          <p:nvPr/>
-        </p:nvSpPr>
-        <p:spPr>
-          <a:xfrm>
-            <a:off x="1783080" y="1645920"/>
-            <a:ext cx="4023360" cy="548640"/>
-          </a:xfrm>
-          <a:prstGeom prst="rect">
-            <a:avLst/>
-          </a:prstGeom>
-          <a:noFill/>
-        </p:spPr>
-        <p:txBody>
-          <a:bodyPr wrap="square" lIns="45720" tIns="27432" rIns="45720" bIns="27432" anchor="ctr">
-            <a:spAutoFit/>
-          </a:bodyPr>
-          <a:lstStyle/>
-          <a:p>
-            <a:pPr algn="l"/>
-            <a:r>
-              <a:rPr sz="2200" b="1">
-                <a:solidFill>
-                  <a:srgbClr val="243B7A"/>
-                </a:solidFill>
-                <a:latin typeface="Calibri"/>
-              </a:rPr>
-              <a:t>High-performance compute</a:t>
-            </a:r>
-          </a:p>
-        </p:txBody>
-      </p:sp>
-      <p:sp>
-        <p:nvSpPr>
-          <p:cNvPr id="12" name="TextBox 11"/>
-          <p:cNvSpPr txBox="1"/>
-          <p:nvPr/>
-        </p:nvSpPr>
-        <p:spPr>
-          <a:xfrm>
-            <a:off x="822959" y="2468880"/>
-            <a:ext cx="4937760" cy="1005840"/>
-          </a:xfrm>
-          <a:prstGeom prst="rect">
-            <a:avLst/>
-          </a:prstGeom>
-          <a:noFill/>
-        </p:spPr>
-        <p:txBody>
-          <a:bodyPr wrap="square" lIns="45720" tIns="27432" rIns="45720" bIns="27432" anchor="t">
-            <a:spAutoFit/>
-          </a:bodyPr>
-          <a:lstStyle/>
-          <a:p>
-            <a:pPr algn="l"/>
-            <a:r>
-              <a:rPr sz="1600" b="0">
-                <a:solidFill>
-                  <a:srgbClr val="1F2937"/>
-                </a:solidFill>
-                <a:latin typeface="Calibri"/>
-              </a:rPr>
-              <a:t>A high-performance computing (HPC) node with high-end GPU servers runs larger, more capable models and shortens response times.</a:t>
-            </a:r>
-          </a:p>
-        </p:txBody>
-      </p:sp>
-      <p:sp>
-        <p:nvSpPr>
-          <p:cNvPr id="13" name="Rounded Rectangle 12"/>
-          <p:cNvSpPr/>
-          <p:nvPr/>
-        </p:nvSpPr>
-        <p:spPr>
-          <a:xfrm>
-            <a:off x="6172200" y="1371600"/>
-            <a:ext cx="5440680" cy="2148840"/>
-          </a:xfrm>
-          <a:prstGeom prst="roundRect">
-            <a:avLst>
-              <a:gd name="adj" fmla="val 8000"/>
-            </a:avLst>
-          </a:prstGeom>
-          <a:solidFill>
-            <a:srgbClr val="EAF0FB"/>
-          </a:solidFill>
-          <a:ln w="15875">
-            <a:solidFill>
-              <a:srgbClr val="D0DBF0"/>
-            </a:solidFill>
-          </a:ln>
-          <a:effectLst/>
-        </p:spPr>
-        <p:style>
-          <a:lnRef idx="1">
-            <a:schemeClr val="accent1"/>
-          </a:lnRef>
-          <a:fillRef idx="3">
-            <a:schemeClr val="accent1"/>
-          </a:fillRef>
-          <a:effectRef idx="2">
-            <a:schemeClr val="accent1"/>
-          </a:effectRef>
-          <a:fontRef idx="minor">
-            <a:schemeClr val="lt1"/>
-          </a:fontRef>
-        </p:style>
-        <p:txBody>
-          <a:bodyPr rtlCol="0" anchor="ctr"/>
-          <a:lstStyle/>
-          <a:p>
-            <a:pPr algn="ctr"/>
-            <a:endParaRPr/>
-          </a:p>
-        </p:txBody>
-      </p:sp>
-      <p:sp>
-        <p:nvSpPr>
-          <p:cNvPr id="14" name="Oval 13"/>
-          <p:cNvSpPr/>
-          <p:nvPr/>
-        </p:nvSpPr>
-        <p:spPr>
-          <a:xfrm>
-            <a:off x="6446520" y="1645920"/>
-            <a:ext cx="731520" cy="731520"/>
-          </a:xfrm>
-          <a:prstGeom prst="ellipse">
-            <a:avLst/>
-          </a:prstGeom>
-          <a:solidFill>
-            <a:srgbClr val="3E5CA8"/>
-          </a:solidFill>
-          <a:ln>
-            <a:noFill/>
-          </a:ln>
-          <a:effectLst/>
-        </p:spPr>
-        <p:style>
-          <a:lnRef idx="1">
-            <a:schemeClr val="accent1"/>
-          </a:lnRef>
-          <a:fillRef idx="3">
-            <a:schemeClr val="accent1"/>
-          </a:fillRef>
-          <a:effectRef idx="2">
-            <a:schemeClr val="accent1"/>
-          </a:effectRef>
-          <a:fontRef idx="minor">
-            <a:schemeClr val="lt1"/>
-          </a:fontRef>
-        </p:style>
-        <p:txBody>
-          <a:bodyPr rtlCol="0" anchor="ctr"/>
-          <a:lstStyle/>
-          <a:p>
-            <a:pPr algn="ctr"/>
-            <a:endParaRPr/>
-          </a:p>
-        </p:txBody>
-      </p:sp>
-      <p:pic>
-        <p:nvPicPr>
-          <p:cNvPr id="15" name="Picture 14" descr="database-white.png"/>
-          <p:cNvPicPr>
-            <a:picLocks noChangeAspect="1"/>
-          </p:cNvPicPr>
-          <p:nvPr/>
-        </p:nvPicPr>
-        <p:blipFill>
-          <a:blip r:embed="rId5"/>
-          <a:stretch>
-            <a:fillRect/>
-          </a:stretch>
-        </p:blipFill>
-        <p:spPr>
-          <a:xfrm>
-            <a:off x="6607454" y="1806854"/>
-            <a:ext cx="409651" cy="409651"/>
-          </a:xfrm>
-          <a:prstGeom prst="rect">
-            <a:avLst/>
-          </a:prstGeom>
-        </p:spPr>
-      </p:pic>
-      <p:sp>
-        <p:nvSpPr>
-          <p:cNvPr id="16" name="TextBox 15"/>
-          <p:cNvSpPr txBox="1"/>
-          <p:nvPr/>
-        </p:nvSpPr>
-        <p:spPr>
-          <a:xfrm>
-            <a:off x="7406640" y="1645920"/>
-            <a:ext cx="4023360" cy="548640"/>
-          </a:xfrm>
-          <a:prstGeom prst="rect">
-            <a:avLst/>
-          </a:prstGeom>
-          <a:noFill/>
-        </p:spPr>
-        <p:txBody>
-          <a:bodyPr wrap="square" lIns="45720" tIns="27432" rIns="45720" bIns="27432" anchor="ctr">
-            <a:spAutoFit/>
-          </a:bodyPr>
-          <a:lstStyle/>
-          <a:p>
-            <a:pPr algn="l"/>
-            <a:r>
-              <a:rPr sz="2200" b="1">
-                <a:solidFill>
-                  <a:srgbClr val="243B7A"/>
-                </a:solidFill>
-                <a:latin typeface="Calibri"/>
-              </a:rPr>
-              <a:t>More data</a:t>
-            </a:r>
-          </a:p>
-        </p:txBody>
-      </p:sp>
-      <p:sp>
-        <p:nvSpPr>
-          <p:cNvPr id="17" name="TextBox 16"/>
-          <p:cNvSpPr txBox="1"/>
-          <p:nvPr/>
-        </p:nvSpPr>
-        <p:spPr>
-          <a:xfrm>
-            <a:off x="6446520" y="2468880"/>
-            <a:ext cx="4937760" cy="1005840"/>
-          </a:xfrm>
-          <a:prstGeom prst="rect">
-            <a:avLst/>
-          </a:prstGeom>
-          <a:noFill/>
-        </p:spPr>
-        <p:txBody>
-          <a:bodyPr wrap="square" lIns="45720" tIns="27432" rIns="45720" bIns="27432" anchor="t">
-            <a:spAutoFit/>
-          </a:bodyPr>
-          <a:lstStyle/>
-          <a:p>
-            <a:pPr algn="l"/>
-            <a:r>
-              <a:rPr sz="1600" b="0">
-                <a:solidFill>
-                  <a:srgbClr val="1F2937"/>
-                </a:solidFill>
-                <a:latin typeface="Calibri"/>
-              </a:rPr>
-              <a:t>Monthly feeds for every district, and the missing sources such as Bhang shops.</a:t>
-            </a:r>
-          </a:p>
-        </p:txBody>
-      </p:sp>
-      <p:sp>
-        <p:nvSpPr>
-          <p:cNvPr id="18" name="Rounded Rectangle 17"/>
-          <p:cNvSpPr/>
-          <p:nvPr/>
-        </p:nvSpPr>
-        <p:spPr>
-          <a:xfrm>
-            <a:off x="548640" y="3749039"/>
-            <a:ext cx="5440680" cy="2148840"/>
-          </a:xfrm>
-          <a:prstGeom prst="roundRect">
-            <a:avLst>
-              <a:gd name="adj" fmla="val 8000"/>
-            </a:avLst>
-          </a:prstGeom>
-          <a:solidFill>
-            <a:srgbClr val="EAF0FB"/>
-          </a:solidFill>
-          <a:ln w="15875">
-            <a:solidFill>
-              <a:srgbClr val="D0DBF0"/>
-            </a:solidFill>
-          </a:ln>
-          <a:effectLst/>
-        </p:spPr>
-        <p:style>
-          <a:lnRef idx="1">
-            <a:schemeClr val="accent1"/>
-          </a:lnRef>
-          <a:fillRef idx="3">
-            <a:schemeClr val="accent1"/>
-          </a:fillRef>
-          <a:effectRef idx="2">
-            <a:schemeClr val="accent1"/>
-          </a:effectRef>
-          <a:fontRef idx="minor">
-            <a:schemeClr val="lt1"/>
-          </a:fontRef>
-        </p:style>
-        <p:txBody>
-          <a:bodyPr rtlCol="0" anchor="ctr"/>
-          <a:lstStyle/>
-          <a:p>
-            <a:pPr algn="ctr"/>
-            <a:endParaRPr/>
-          </a:p>
-        </p:txBody>
-      </p:sp>
-      <p:sp>
-        <p:nvSpPr>
-          <p:cNvPr id="19" name="Oval 18"/>
-          <p:cNvSpPr/>
-          <p:nvPr/>
-        </p:nvSpPr>
-        <p:spPr>
-          <a:xfrm>
-            <a:off x="822959" y="4023359"/>
-            <a:ext cx="731520" cy="731520"/>
-          </a:xfrm>
-          <a:prstGeom prst="ellipse">
-            <a:avLst/>
-          </a:prstGeom>
-          <a:solidFill>
-            <a:srgbClr val="3E5CA8"/>
-          </a:solidFill>
-          <a:ln>
-            <a:noFill/>
-          </a:ln>
-          <a:effectLst/>
-        </p:spPr>
-        <p:style>
-          <a:lnRef idx="1">
-            <a:schemeClr val="accent1"/>
-          </a:lnRef>
-          <a:fillRef idx="3">
-            <a:schemeClr val="accent1"/>
-          </a:fillRef>
-          <a:effectRef idx="2">
-            <a:schemeClr val="accent1"/>
-          </a:effectRef>
-          <a:fontRef idx="minor">
-            <a:schemeClr val="lt1"/>
-          </a:fontRef>
-        </p:style>
-        <p:txBody>
-          <a:bodyPr rtlCol="0" anchor="ctr"/>
-          <a:lstStyle/>
-          <a:p>
-            <a:pPr algn="ctr"/>
-            <a:endParaRPr/>
-          </a:p>
-        </p:txBody>
-      </p:sp>
-      <p:pic>
-        <p:nvPicPr>
-          <p:cNvPr id="20" name="Picture 19" descr="doc-white.png"/>
-          <p:cNvPicPr>
-            <a:picLocks noChangeAspect="1"/>
-          </p:cNvPicPr>
-          <p:nvPr/>
-        </p:nvPicPr>
-        <p:blipFill>
-          <a:blip r:embed="rId6"/>
-          <a:stretch>
-            <a:fillRect/>
-          </a:stretch>
-        </p:blipFill>
-        <p:spPr>
-          <a:xfrm>
-            <a:off x="983894" y="4184294"/>
-            <a:ext cx="409651" cy="409651"/>
-          </a:xfrm>
-          <a:prstGeom prst="rect">
-            <a:avLst/>
-          </a:prstGeom>
-        </p:spPr>
-      </p:pic>
-      <p:sp>
-        <p:nvSpPr>
-          <p:cNvPr id="21" name="TextBox 20"/>
-          <p:cNvSpPr txBox="1"/>
-          <p:nvPr/>
-        </p:nvSpPr>
-        <p:spPr>
-          <a:xfrm>
-            <a:off x="1783080" y="4023359"/>
-            <a:ext cx="4023360" cy="548640"/>
-          </a:xfrm>
-          <a:prstGeom prst="rect">
-            <a:avLst/>
-          </a:prstGeom>
-          <a:noFill/>
-        </p:spPr>
-        <p:txBody>
-          <a:bodyPr wrap="square" lIns="45720" tIns="27432" rIns="45720" bIns="27432" anchor="ctr">
-            <a:spAutoFit/>
-          </a:bodyPr>
-          <a:lstStyle/>
-          <a:p>
-            <a:pPr algn="l"/>
-            <a:r>
-              <a:rPr sz="2200" b="1">
-                <a:solidFill>
-                  <a:srgbClr val="243B7A"/>
-                </a:solidFill>
-                <a:latin typeface="Calibri"/>
-              </a:rPr>
-              <a:t>Saved analyses and reports</a:t>
-            </a:r>
-          </a:p>
-        </p:txBody>
-      </p:sp>
-      <p:sp>
-        <p:nvSpPr>
-          <p:cNvPr id="22" name="TextBox 21"/>
-          <p:cNvSpPr txBox="1"/>
-          <p:nvPr/>
-        </p:nvSpPr>
-        <p:spPr>
-          <a:xfrm>
-            <a:off x="822959" y="4846320"/>
-            <a:ext cx="4937760" cy="1005840"/>
-          </a:xfrm>
-          <a:prstGeom prst="rect">
-            <a:avLst/>
-          </a:prstGeom>
-          <a:noFill/>
-        </p:spPr>
-        <p:txBody>
-          <a:bodyPr wrap="square" lIns="45720" tIns="27432" rIns="45720" bIns="27432" anchor="t">
-            <a:spAutoFit/>
-          </a:bodyPr>
-          <a:lstStyle/>
-          <a:p>
-            <a:pPr algn="l"/>
-            <a:r>
-              <a:rPr sz="1600" b="0">
-                <a:solidFill>
-                  <a:srgbClr val="1F2937"/>
-                </a:solidFill>
-                <a:latin typeface="Calibri"/>
-              </a:rPr>
-              <a:t>Re-run a favourite question each month and export a report with the data date on it.</a:t>
-            </a:r>
-          </a:p>
-        </p:txBody>
-      </p:sp>
-      <p:sp>
-        <p:nvSpPr>
-          <p:cNvPr id="23" name="Rounded Rectangle 22"/>
-          <p:cNvSpPr/>
-          <p:nvPr/>
-        </p:nvSpPr>
-        <p:spPr>
-          <a:xfrm>
-            <a:off x="6172200" y="3749039"/>
-            <a:ext cx="5440680" cy="2148840"/>
-          </a:xfrm>
-          <a:prstGeom prst="roundRect">
-            <a:avLst>
-              <a:gd name="adj" fmla="val 8000"/>
-            </a:avLst>
-          </a:prstGeom>
-          <a:solidFill>
-            <a:srgbClr val="EAF0FB"/>
-          </a:solidFill>
-          <a:ln w="15875">
-            <a:solidFill>
-              <a:srgbClr val="D0DBF0"/>
-            </a:solidFill>
-          </a:ln>
-          <a:effectLst/>
-        </p:spPr>
-        <p:style>
-          <a:lnRef idx="1">
-            <a:schemeClr val="accent1"/>
-          </a:lnRef>
-          <a:fillRef idx="3">
-            <a:schemeClr val="accent1"/>
-          </a:fillRef>
-          <a:effectRef idx="2">
-            <a:schemeClr val="accent1"/>
-          </a:effectRef>
-          <a:fontRef idx="minor">
-            <a:schemeClr val="lt1"/>
-          </a:fontRef>
-        </p:style>
-        <p:txBody>
-          <a:bodyPr rtlCol="0" anchor="ctr"/>
-          <a:lstStyle/>
-          <a:p>
-            <a:pPr algn="ctr"/>
-            <a:endParaRPr/>
-          </a:p>
-        </p:txBody>
-      </p:sp>
-      <p:sp>
-        <p:nvSpPr>
-          <p:cNvPr id="24" name="Oval 23"/>
-          <p:cNvSpPr/>
-          <p:nvPr/>
-        </p:nvSpPr>
-        <p:spPr>
-          <a:xfrm>
-            <a:off x="6446520" y="4023359"/>
-            <a:ext cx="731520" cy="731520"/>
-          </a:xfrm>
-          <a:prstGeom prst="ellipse">
-            <a:avLst/>
-          </a:prstGeom>
-          <a:solidFill>
-            <a:srgbClr val="3E5CA8"/>
-          </a:solidFill>
-          <a:ln>
-            <a:noFill/>
-          </a:ln>
-          <a:effectLst/>
-        </p:spPr>
-        <p:style>
-          <a:lnRef idx="1">
-            <a:schemeClr val="accent1"/>
-          </a:lnRef>
-          <a:fillRef idx="3">
-            <a:schemeClr val="accent1"/>
-          </a:fillRef>
-          <a:effectRef idx="2">
-            <a:schemeClr val="accent1"/>
-          </a:effectRef>
-          <a:fontRef idx="minor">
-            <a:schemeClr val="lt1"/>
-          </a:fontRef>
-        </p:style>
-        <p:txBody>
-          <a:bodyPr rtlCol="0" anchor="ctr"/>
-          <a:lstStyle/>
-          <a:p>
-            <a:pPr algn="ctr"/>
-            <a:endParaRPr/>
-          </a:p>
-        </p:txBody>
-      </p:sp>
-      <p:pic>
-        <p:nvPicPr>
-          <p:cNvPr id="25" name="Picture 24" descr="users-white.png"/>
-          <p:cNvPicPr>
-            <a:picLocks noChangeAspect="1"/>
-          </p:cNvPicPr>
-          <p:nvPr/>
-        </p:nvPicPr>
-        <p:blipFill>
-          <a:blip r:embed="rId7"/>
-          <a:stretch>
-            <a:fillRect/>
-          </a:stretch>
-        </p:blipFill>
-        <p:spPr>
-          <a:xfrm>
-            <a:off x="6607454" y="4184294"/>
-            <a:ext cx="409651" cy="409651"/>
-          </a:xfrm>
-          <a:prstGeom prst="rect">
-            <a:avLst/>
-          </a:prstGeom>
-        </p:spPr>
-      </p:pic>
-      <p:sp>
-        <p:nvSpPr>
-          <p:cNvPr id="26" name="TextBox 25"/>
-          <p:cNvSpPr txBox="1"/>
-          <p:nvPr/>
-        </p:nvSpPr>
-        <p:spPr>
-          <a:xfrm>
-            <a:off x="7406640" y="4023359"/>
-            <a:ext cx="4023360" cy="548640"/>
-          </a:xfrm>
-          <a:prstGeom prst="rect">
-            <a:avLst/>
-          </a:prstGeom>
-          <a:noFill/>
-        </p:spPr>
-        <p:txBody>
-          <a:bodyPr wrap="square" lIns="45720" tIns="27432" rIns="45720" bIns="27432" anchor="ctr">
-            <a:spAutoFit/>
-          </a:bodyPr>
-          <a:lstStyle/>
-          <a:p>
-            <a:pPr algn="l"/>
-            <a:r>
-              <a:rPr sz="2200" b="1">
-                <a:solidFill>
-                  <a:srgbClr val="243B7A"/>
-                </a:solidFill>
-                <a:latin typeface="Calibri"/>
-              </a:rPr>
-              <a:t>Wider access</a:t>
-            </a:r>
-          </a:p>
-        </p:txBody>
-      </p:sp>
-      <p:sp>
-        <p:nvSpPr>
-          <p:cNvPr id="27" name="TextBox 26"/>
-          <p:cNvSpPr txBox="1"/>
-          <p:nvPr/>
-        </p:nvSpPr>
-        <p:spPr>
-          <a:xfrm>
-            <a:off x="6446520" y="4846320"/>
-            <a:ext cx="4937760" cy="1005840"/>
-          </a:xfrm>
-          <a:prstGeom prst="rect">
-            <a:avLst/>
-          </a:prstGeom>
-          <a:noFill/>
-        </p:spPr>
-        <p:txBody>
-          <a:bodyPr wrap="square" lIns="45720" tIns="27432" rIns="45720" bIns="27432" anchor="t">
-            <a:spAutoFit/>
-          </a:bodyPr>
-          <a:lstStyle/>
-          <a:p>
-            <a:pPr algn="l"/>
-            <a:r>
-              <a:rPr sz="1600" b="0">
-                <a:solidFill>
-                  <a:srgbClr val="1F2937"/>
-                </a:solidFill>
-                <a:latin typeface="Calibri"/>
-              </a:rPr>
-              <a:t>Roles for district and division officers, with their own question history.</a:t>
-            </a:r>
-          </a:p>
-        </p:txBody>
-      </p:sp>
-    </p:spTree>
-  </p:cSld>
-  <p:clrMapOvr>
-    <a:masterClrMapping/>
-  </p:clrMapOvr>
-</p:sld>
-</file>
-
-<file path=ppt/slides/slide15.xml><?xml version="1.0" encoding="utf-8"?>
-<p:sld xmlns:a="http://schemas.openxmlformats.org/drawingml/2006/main" xmlns:r="http://schemas.openxmlformats.org/officeDocument/2006/relationships" xmlns:p="http://schemas.openxmlformats.org/presentationml/2006/main">
-  <p:cSld>
-    <p:spTree>
-      <p:nvGrpSpPr>
-        <p:cNvPr id="1" name=""/>
-        <p:cNvGrpSpPr/>
-        <p:nvPr/>
-      </p:nvGrpSpPr>
-      <p:grpSpPr>
-        <a:xfrm>
-          <a:off x="0" y="0"/>
-          <a:ext cx="0" cy="0"/>
-          <a:chOff x="0" y="0"/>
-          <a:chExt cx="0" cy="0"/>
-        </a:xfrm>
-      </p:grpSpPr>
-      <p:sp>
-        <p:nvSpPr>
-          <p:cNvPr id="2" name="Rectangle 1"/>
-          <p:cNvSpPr/>
-          <p:nvPr/>
-        </p:nvSpPr>
-        <p:spPr>
-          <a:xfrm>
-            <a:off x="0" y="0"/>
-            <a:ext cx="12191695" cy="914400"/>
-          </a:xfrm>
-          <a:prstGeom prst="rect">
-            <a:avLst/>
-          </a:prstGeom>
-          <a:solidFill>
-            <a:srgbClr val="EAF0FB"/>
-          </a:solidFill>
-          <a:ln>
-            <a:noFill/>
-          </a:ln>
-        </p:spPr>
-        <p:style>
-          <a:lnRef idx="1">
-            <a:schemeClr val="accent1"/>
-          </a:lnRef>
-          <a:fillRef idx="3">
-            <a:schemeClr val="accent1"/>
-          </a:fillRef>
-          <a:effectRef idx="2">
-            <a:schemeClr val="accent1"/>
-          </a:effectRef>
-          <a:fontRef idx="minor">
-            <a:schemeClr val="lt1"/>
-          </a:fontRef>
-        </p:style>
-        <p:txBody>
-          <a:bodyPr rtlCol="0" anchor="ctr"/>
-          <a:lstStyle/>
-          <a:p>
-            <a:pPr algn="ctr"/>
-            <a:endParaRPr/>
-          </a:p>
-        </p:txBody>
-      </p:sp>
-      <p:sp>
-        <p:nvSpPr>
-          <p:cNvPr id="3" name="Rectangle 2"/>
-          <p:cNvSpPr/>
-          <p:nvPr/>
-        </p:nvSpPr>
-        <p:spPr>
-          <a:xfrm>
-            <a:off x="0" y="914400"/>
-            <a:ext cx="12191695" cy="64008"/>
-          </a:xfrm>
-          <a:prstGeom prst="rect">
-            <a:avLst/>
-          </a:prstGeom>
-          <a:solidFill>
-            <a:srgbClr val="E0B12A"/>
-          </a:solidFill>
-          <a:ln>
-            <a:noFill/>
-          </a:ln>
-        </p:spPr>
-        <p:style>
-          <a:lnRef idx="1">
-            <a:schemeClr val="accent1"/>
-          </a:lnRef>
-          <a:fillRef idx="3">
-            <a:schemeClr val="accent1"/>
-          </a:fillRef>
-          <a:effectRef idx="2">
-            <a:schemeClr val="accent1"/>
-          </a:effectRef>
-          <a:fontRef idx="minor">
-            <a:schemeClr val="lt1"/>
-          </a:fontRef>
-        </p:style>
-        <p:txBody>
-          <a:bodyPr rtlCol="0" anchor="ctr"/>
-          <a:lstStyle/>
-          <a:p>
-            <a:pPr algn="ctr"/>
-            <a:endParaRPr/>
-          </a:p>
-        </p:txBody>
-      </p:sp>
-      <p:sp>
-        <p:nvSpPr>
-          <p:cNvPr id="4" name="TextBox 3"/>
-          <p:cNvSpPr txBox="1"/>
-          <p:nvPr/>
-        </p:nvSpPr>
-        <p:spPr>
-          <a:xfrm>
-            <a:off x="548640" y="109728"/>
-            <a:ext cx="10424160" cy="694944"/>
-          </a:xfrm>
-          <a:prstGeom prst="rect">
-            <a:avLst/>
-          </a:prstGeom>
-          <a:noFill/>
-        </p:spPr>
-        <p:txBody>
-          <a:bodyPr wrap="square" lIns="45720" tIns="27432" rIns="45720" bIns="27432" anchor="ctr">
-            <a:spAutoFit/>
-          </a:bodyPr>
-          <a:lstStyle/>
-          <a:p>
-            <a:pPr algn="l"/>
-            <a:r>
-              <a:rPr sz="3000" b="1">
-                <a:solidFill>
-                  <a:srgbClr val="243B7A"/>
-                </a:solidFill>
-                <a:latin typeface="Calibri"/>
-              </a:rPr>
-              <a:t>The decision we are asking for</a:t>
-            </a:r>
-          </a:p>
-        </p:txBody>
-      </p:sp>
-      <p:pic>
-        <p:nvPicPr>
-          <p:cNvPr id="5" name="Picture 4" descr="emblem-dark.png"/>
-          <p:cNvPicPr>
-            <a:picLocks noChangeAspect="1"/>
-          </p:cNvPicPr>
-          <p:nvPr/>
-        </p:nvPicPr>
-        <p:blipFill>
-          <a:blip r:embed="rId3"/>
-          <a:stretch>
-            <a:fillRect/>
-          </a:stretch>
-        </p:blipFill>
-        <p:spPr>
-          <a:xfrm>
-            <a:off x="11247120" y="91440"/>
-            <a:ext cx="731520" cy="731520"/>
-          </a:xfrm>
-          <a:prstGeom prst="rect">
-            <a:avLst/>
-          </a:prstGeom>
-        </p:spPr>
-      </p:pic>
-      <p:sp>
-        <p:nvSpPr>
-          <p:cNvPr id="6" name="TextBox 5"/>
-          <p:cNvSpPr txBox="1"/>
-          <p:nvPr/>
-        </p:nvSpPr>
-        <p:spPr>
-          <a:xfrm>
-            <a:off x="548640" y="6455664"/>
-            <a:ext cx="8229600" cy="274320"/>
-          </a:xfrm>
-          <a:prstGeom prst="rect">
-            <a:avLst/>
-          </a:prstGeom>
-          <a:noFill/>
-        </p:spPr>
-        <p:txBody>
-          <a:bodyPr wrap="square" lIns="45720" tIns="27432" rIns="45720" bIns="27432" anchor="t">
-            <a:spAutoFit/>
-          </a:bodyPr>
-          <a:lstStyle/>
-          <a:p>
-            <a:pPr algn="l"/>
-            <a:r>
-              <a:rPr sz="1000" b="0">
-                <a:solidFill>
-                  <a:srgbClr val="4B5563"/>
-                </a:solidFill>
-                <a:latin typeface="Calibri"/>
-              </a:rPr>
-              <a:t>Government of Uttar Pradesh  |  Department of Excise  |  Ask the Data: proof of concept</a:t>
-            </a:r>
-          </a:p>
-        </p:txBody>
-      </p:sp>
-      <p:sp>
-        <p:nvSpPr>
-          <p:cNvPr id="7" name="TextBox 6"/>
-          <p:cNvSpPr txBox="1"/>
-          <p:nvPr/>
-        </p:nvSpPr>
-        <p:spPr>
-          <a:xfrm>
-            <a:off x="10972800" y="6455664"/>
-            <a:ext cx="731520" cy="274320"/>
-          </a:xfrm>
-          <a:prstGeom prst="rect">
-            <a:avLst/>
-          </a:prstGeom>
-          <a:noFill/>
-        </p:spPr>
-        <p:txBody>
-          <a:bodyPr wrap="square" lIns="45720" tIns="27432" rIns="45720" bIns="27432" anchor="t">
-            <a:spAutoFit/>
-          </a:bodyPr>
-          <a:lstStyle/>
-          <a:p>
-            <a:pPr algn="r"/>
-            <a:r>
-              <a:rPr sz="1000" b="0">
-                <a:solidFill>
-                  <a:srgbClr val="4B5563"/>
-                </a:solidFill>
-                <a:latin typeface="Calibri"/>
-              </a:rPr>
-              <a:t>8</a:t>
-            </a:r>
-          </a:p>
-        </p:txBody>
-      </p:sp>
-      <p:sp>
-        <p:nvSpPr>
-          <p:cNvPr id="8" name="Rounded Rectangle 7"/>
-          <p:cNvSpPr/>
-          <p:nvPr/>
-        </p:nvSpPr>
-        <p:spPr>
-          <a:xfrm>
-            <a:off x="548640" y="1371600"/>
-            <a:ext cx="11064240" cy="2011680"/>
-          </a:xfrm>
-          <a:prstGeom prst="roundRect">
-            <a:avLst>
-              <a:gd name="adj" fmla="val 8000"/>
-            </a:avLst>
-          </a:prstGeom>
-          <a:solidFill>
-            <a:srgbClr val="EAF0FB"/>
-          </a:solidFill>
-          <a:ln w="15875">
-            <a:solidFill>
-              <a:srgbClr val="D0DBF0"/>
-            </a:solidFill>
-          </a:ln>
-          <a:effectLst/>
-        </p:spPr>
-        <p:style>
-          <a:lnRef idx="1">
-            <a:schemeClr val="accent1"/>
-          </a:lnRef>
-          <a:fillRef idx="3">
-            <a:schemeClr val="accent1"/>
-          </a:fillRef>
-          <a:effectRef idx="2">
-            <a:schemeClr val="accent1"/>
-          </a:effectRef>
-          <a:fontRef idx="minor">
-            <a:schemeClr val="lt1"/>
-          </a:fontRef>
-        </p:style>
-        <p:txBody>
-          <a:bodyPr rtlCol="0" anchor="ctr"/>
-          <a:lstStyle/>
-          <a:p>
-            <a:pPr algn="ctr"/>
-            <a:endParaRPr/>
-          </a:p>
-        </p:txBody>
-      </p:sp>
-      <p:sp>
-        <p:nvSpPr>
-          <p:cNvPr id="9" name="Oval 8"/>
-          <p:cNvSpPr/>
-          <p:nvPr/>
-        </p:nvSpPr>
-        <p:spPr>
-          <a:xfrm>
-            <a:off x="822960" y="1737360"/>
-            <a:ext cx="822960" cy="822960"/>
-          </a:xfrm>
-          <a:prstGeom prst="ellipse">
-            <a:avLst/>
-          </a:prstGeom>
-          <a:solidFill>
-            <a:srgbClr val="3E5CA8"/>
-          </a:solidFill>
-          <a:ln>
-            <a:noFill/>
-          </a:ln>
-          <a:effectLst/>
-        </p:spPr>
-        <p:style>
-          <a:lnRef idx="1">
-            <a:schemeClr val="accent1"/>
-          </a:lnRef>
-          <a:fillRef idx="3">
-            <a:schemeClr val="accent1"/>
-          </a:fillRef>
-          <a:effectRef idx="2">
-            <a:schemeClr val="accent1"/>
-          </a:effectRef>
-          <a:fontRef idx="minor">
-            <a:schemeClr val="lt1"/>
-          </a:fontRef>
-        </p:style>
-        <p:txBody>
-          <a:bodyPr rtlCol="0" anchor="ctr"/>
-          <a:lstStyle/>
-          <a:p>
-            <a:pPr algn="ctr"/>
-            <a:endParaRPr/>
-          </a:p>
-        </p:txBody>
-      </p:sp>
-      <p:pic>
-        <p:nvPicPr>
-          <p:cNvPr id="10" name="Picture 9" descr="bulb-white.png"/>
-          <p:cNvPicPr>
-            <a:picLocks noChangeAspect="1"/>
-          </p:cNvPicPr>
-          <p:nvPr/>
-        </p:nvPicPr>
-        <p:blipFill>
-          <a:blip r:embed="rId4"/>
-          <a:stretch>
-            <a:fillRect/>
-          </a:stretch>
-        </p:blipFill>
-        <p:spPr>
-          <a:xfrm>
-            <a:off x="1004011" y="1918411"/>
-            <a:ext cx="460857" cy="460857"/>
-          </a:xfrm>
-          <a:prstGeom prst="rect">
-            <a:avLst/>
-          </a:prstGeom>
-        </p:spPr>
-      </p:pic>
-      <p:sp>
-        <p:nvSpPr>
-          <p:cNvPr id="11" name="TextBox 10"/>
-          <p:cNvSpPr txBox="1"/>
-          <p:nvPr/>
-        </p:nvSpPr>
-        <p:spPr>
-          <a:xfrm>
-            <a:off x="1920240" y="1554480"/>
-            <a:ext cx="9509760" cy="1737360"/>
-          </a:xfrm>
-          <a:prstGeom prst="rect">
-            <a:avLst/>
-          </a:prstGeom>
-          <a:noFill/>
-        </p:spPr>
-        <p:txBody>
-          <a:bodyPr wrap="square" lIns="45720" tIns="27432" rIns="45720" bIns="27432" anchor="t">
-            <a:spAutoFit/>
-          </a:bodyPr>
-          <a:lstStyle/>
-          <a:p>
-            <a:pPr algn="l">
-              <a:spcAft>
-                <a:spcPts val="800"/>
-              </a:spcAft>
-            </a:pPr>
-            <a:r>
-              <a:rPr sz="2000" b="1">
-                <a:solidFill>
-                  <a:srgbClr val="1F2937"/>
-                </a:solidFill>
-                <a:latin typeface="Calibri"/>
-              </a:rPr>
-              <a:t>This proof of concept shows that officers can get sourced answers from the department's own data in minutes, on the department's own server.</a:t>
-            </a:r>
-          </a:p>
-          <a:p>
-            <a:pPr algn="l">
-              <a:spcAft>
-                <a:spcPts val="800"/>
-              </a:spcAft>
-            </a:pPr>
-            <a:r>
-              <a:rPr sz="2000" b="1">
-                <a:solidFill>
-                  <a:srgbClr val="1F2937"/>
-                </a:solidFill>
-                <a:latin typeface="Calibri"/>
-              </a:rPr>
-              <a:t>We ask the respected authorities for a decision on the next step.</a:t>
-            </a:r>
-          </a:p>
-        </p:txBody>
-      </p:sp>
-      <p:sp>
-        <p:nvSpPr>
-          <p:cNvPr id="12" name="TextBox 11"/>
-          <p:cNvSpPr txBox="1"/>
-          <p:nvPr/>
-        </p:nvSpPr>
-        <p:spPr>
-          <a:xfrm>
-            <a:off x="548640" y="3749039"/>
-            <a:ext cx="11064240" cy="457200"/>
-          </a:xfrm>
-          <a:prstGeom prst="rect">
-            <a:avLst/>
-          </a:prstGeom>
-          <a:noFill/>
-        </p:spPr>
-        <p:txBody>
-          <a:bodyPr wrap="square" lIns="45720" tIns="27432" rIns="45720" bIns="27432" anchor="t">
-            <a:spAutoFit/>
-          </a:bodyPr>
-          <a:lstStyle/>
-          <a:p>
-            <a:pPr algn="l"/>
-            <a:r>
-              <a:rPr sz="2200" b="1">
-                <a:solidFill>
-                  <a:srgbClr val="243B7A"/>
-                </a:solidFill>
-                <a:latin typeface="Calibri"/>
-              </a:rPr>
-              <a:t>Proposed next steps</a:t>
-            </a:r>
-          </a:p>
-        </p:txBody>
-      </p:sp>
-      <p:sp>
-        <p:nvSpPr>
-          <p:cNvPr id="13" name="TextBox 12"/>
-          <p:cNvSpPr txBox="1"/>
-          <p:nvPr/>
-        </p:nvSpPr>
-        <p:spPr>
-          <a:xfrm>
-            <a:off x="548640" y="4297680"/>
-            <a:ext cx="11064240" cy="457200"/>
-          </a:xfrm>
-          <a:prstGeom prst="rect">
-            <a:avLst/>
-          </a:prstGeom>
-          <a:noFill/>
-        </p:spPr>
-        <p:txBody>
-          <a:bodyPr wrap="square" lIns="45720" tIns="27432" rIns="45720" bIns="27432" anchor="t">
-            <a:spAutoFit/>
-          </a:bodyPr>
-          <a:lstStyle/>
-          <a:p>
-            <a:pPr algn="l">
-              <a:spcAft>
-                <a:spcPts val="800"/>
-              </a:spcAft>
-            </a:pPr>
-            <a:r>
-              <a:rPr sz="1800" b="0">
-                <a:solidFill>
-                  <a:srgbClr val="1F2937"/>
-                </a:solidFill>
-                <a:latin typeface="Calibri"/>
-              </a:rPr>
-              <a:t>1.  A pilot with a small group of district and division officers.</a:t>
-            </a:r>
-          </a:p>
-          <a:p>
-            <a:pPr algn="l">
-              <a:spcAft>
-                <a:spcPts val="800"/>
-              </a:spcAft>
-            </a:pPr>
-            <a:r>
-              <a:rPr sz="1800" b="0">
-                <a:solidFill>
-                  <a:srgbClr val="1F2937"/>
-                </a:solidFill>
-                <a:latin typeface="Calibri"/>
-              </a:rPr>
-              <a:t>2.  A high-performance GPU compute node.</a:t>
-            </a:r>
-          </a:p>
-          <a:p>
-            <a:pPr algn="l">
-              <a:spcAft>
-                <a:spcPts val="800"/>
-              </a:spcAft>
-            </a:pPr>
-            <a:r>
-              <a:rPr sz="1800" b="0">
-                <a:solidFill>
-                  <a:srgbClr val="1F2937"/>
-                </a:solidFill>
-                <a:latin typeface="Calibri"/>
-              </a:rPr>
-              <a:t>3.  Monthly data feeds from the source systems and involved stakeholders.</a:t>
             </a:r>
           </a:p>
         </p:txBody>
@@ -6959,9 +4264,11 @@
       </p:sp>
       <p:sp>
         <p:nvSpPr>
-          <p:cNvPr id="4" name="TextBox 3"/>
-          <p:cNvSpPr txBox="1"/>
-          <p:nvPr/>
+          <p:cNvPr id="4" name="Title"/>
+          <p:cNvSpPr/>
+          <p:nvPr>
+            <p:ph type="title"/>
+          </p:nvPr>
         </p:nvSpPr>
         <p:spPr>
           <a:xfrm>
@@ -7800,9 +5107,11 @@
       </p:sp>
       <p:sp>
         <p:nvSpPr>
-          <p:cNvPr id="4" name="TextBox 3"/>
-          <p:cNvSpPr txBox="1"/>
-          <p:nvPr/>
+          <p:cNvPr id="4" name="Title"/>
+          <p:cNvSpPr/>
+          <p:nvPr>
+            <p:ph type="title"/>
+          </p:nvPr>
         </p:nvSpPr>
         <p:spPr>
           <a:xfrm>
@@ -8581,6 +5890,447 @@
           </a:p>
         </p:txBody>
       </p:sp>
+    </p:spTree>
+  </p:cSld>
+  <p:clrMapOvr>
+    <a:masterClrMapping/>
+  </p:clrMapOvr>
+</p:sld>
+</file>
+
+<file path=ppt/slides/slide4.xml><?xml version="1.0" encoding="utf-8"?>
+<p:sld xmlns:a="http://schemas.openxmlformats.org/drawingml/2006/main" xmlns:r="http://schemas.openxmlformats.org/officeDocument/2006/relationships" xmlns:p="http://schemas.openxmlformats.org/presentationml/2006/main">
+  <p:cSld>
+    <p:spTree>
+      <p:nvGrpSpPr>
+        <p:cNvPr id="1" name=""/>
+        <p:cNvGrpSpPr/>
+        <p:nvPr/>
+      </p:nvGrpSpPr>
+      <p:grpSpPr>
+        <a:xfrm>
+          <a:off x="0" y="0"/>
+          <a:ext cx="0" cy="0"/>
+          <a:chOff x="0" y="0"/>
+          <a:chExt cx="0" cy="0"/>
+        </a:xfrm>
+      </p:grpSpPr>
+      <p:sp>
+        <p:nvSpPr>
+          <p:cNvPr id="2" name="Rectangle 1"/>
+          <p:cNvSpPr/>
+          <p:nvPr/>
+        </p:nvSpPr>
+        <p:spPr>
+          <a:xfrm>
+            <a:off x="0" y="0"/>
+            <a:ext cx="12191695" cy="914400"/>
+          </a:xfrm>
+          <a:prstGeom prst="rect">
+            <a:avLst/>
+          </a:prstGeom>
+          <a:solidFill>
+            <a:srgbClr val="EAF0FB"/>
+          </a:solidFill>
+          <a:ln>
+            <a:noFill/>
+          </a:ln>
+        </p:spPr>
+        <p:style>
+          <a:lnRef idx="1">
+            <a:schemeClr val="accent1"/>
+          </a:lnRef>
+          <a:fillRef idx="3">
+            <a:schemeClr val="accent1"/>
+          </a:fillRef>
+          <a:effectRef idx="2">
+            <a:schemeClr val="accent1"/>
+          </a:effectRef>
+          <a:fontRef idx="minor">
+            <a:schemeClr val="lt1"/>
+          </a:fontRef>
+        </p:style>
+        <p:txBody>
+          <a:bodyPr rtlCol="0" anchor="ctr"/>
+          <a:lstStyle/>
+          <a:p>
+            <a:pPr algn="ctr"/>
+            <a:endParaRPr/>
+          </a:p>
+        </p:txBody>
+      </p:sp>
+      <p:sp>
+        <p:nvSpPr>
+          <p:cNvPr id="3" name="Rectangle 2"/>
+          <p:cNvSpPr/>
+          <p:nvPr/>
+        </p:nvSpPr>
+        <p:spPr>
+          <a:xfrm>
+            <a:off x="0" y="914400"/>
+            <a:ext cx="12191695" cy="64008"/>
+          </a:xfrm>
+          <a:prstGeom prst="rect">
+            <a:avLst/>
+          </a:prstGeom>
+          <a:solidFill>
+            <a:srgbClr val="E0B12A"/>
+          </a:solidFill>
+          <a:ln>
+            <a:noFill/>
+          </a:ln>
+        </p:spPr>
+        <p:style>
+          <a:lnRef idx="1">
+            <a:schemeClr val="accent1"/>
+          </a:lnRef>
+          <a:fillRef idx="3">
+            <a:schemeClr val="accent1"/>
+          </a:fillRef>
+          <a:effectRef idx="2">
+            <a:schemeClr val="accent1"/>
+          </a:effectRef>
+          <a:fontRef idx="minor">
+            <a:schemeClr val="lt1"/>
+          </a:fontRef>
+        </p:style>
+        <p:txBody>
+          <a:bodyPr rtlCol="0" anchor="ctr"/>
+          <a:lstStyle/>
+          <a:p>
+            <a:pPr algn="ctr"/>
+            <a:endParaRPr/>
+          </a:p>
+        </p:txBody>
+      </p:sp>
+      <p:sp>
+        <p:nvSpPr>
+          <p:cNvPr id="4" name="Title"/>
+          <p:cNvSpPr/>
+          <p:nvPr>
+            <p:ph type="title"/>
+          </p:nvPr>
+        </p:nvSpPr>
+        <p:spPr>
+          <a:xfrm>
+            <a:off x="548640" y="109728"/>
+            <a:ext cx="10424160" cy="694944"/>
+          </a:xfrm>
+          <a:prstGeom prst="rect">
+            <a:avLst/>
+          </a:prstGeom>
+          <a:noFill/>
+        </p:spPr>
+        <p:txBody>
+          <a:bodyPr wrap="square" lIns="45720" tIns="27432" rIns="45720" bIns="27432" anchor="ctr">
+            <a:spAutoFit/>
+          </a:bodyPr>
+          <a:lstStyle/>
+          <a:p>
+            <a:pPr algn="l"/>
+            <a:r>
+              <a:rPr sz="3000" b="1">
+                <a:solidFill>
+                  <a:srgbClr val="243B7A"/>
+                </a:solidFill>
+                <a:latin typeface="Calibri"/>
+              </a:rPr>
+              <a:t>Live example: how many shops, and of which kind?</a:t>
+            </a:r>
+          </a:p>
+        </p:txBody>
+      </p:sp>
+      <p:pic>
+        <p:nvPicPr>
+          <p:cNvPr id="5" name="Picture 4" descr="emblem-dark.png"/>
+          <p:cNvPicPr>
+            <a:picLocks noChangeAspect="1"/>
+          </p:cNvPicPr>
+          <p:nvPr/>
+        </p:nvPicPr>
+        <p:blipFill>
+          <a:blip r:embed="rId3"/>
+          <a:stretch>
+            <a:fillRect/>
+          </a:stretch>
+        </p:blipFill>
+        <p:spPr>
+          <a:xfrm>
+            <a:off x="11247120" y="91440"/>
+            <a:ext cx="731520" cy="731520"/>
+          </a:xfrm>
+          <a:prstGeom prst="rect">
+            <a:avLst/>
+          </a:prstGeom>
+        </p:spPr>
+      </p:pic>
+      <p:sp>
+        <p:nvSpPr>
+          <p:cNvPr id="6" name="TextBox 5"/>
+          <p:cNvSpPr txBox="1"/>
+          <p:nvPr/>
+        </p:nvSpPr>
+        <p:spPr>
+          <a:xfrm>
+            <a:off x="548640" y="6455664"/>
+            <a:ext cx="8229600" cy="274320"/>
+          </a:xfrm>
+          <a:prstGeom prst="rect">
+            <a:avLst/>
+          </a:prstGeom>
+          <a:noFill/>
+        </p:spPr>
+        <p:txBody>
+          <a:bodyPr wrap="square" lIns="45720" tIns="27432" rIns="45720" bIns="27432" anchor="t">
+            <a:spAutoFit/>
+          </a:bodyPr>
+          <a:lstStyle/>
+          <a:p>
+            <a:pPr algn="l"/>
+            <a:r>
+              <a:rPr sz="1000" b="0">
+                <a:solidFill>
+                  <a:srgbClr val="4B5563"/>
+                </a:solidFill>
+                <a:latin typeface="Calibri"/>
+              </a:rPr>
+              <a:t>Government of Uttar Pradesh  |  Department of Excise  |  Ask the Data: proof of concept</a:t>
+            </a:r>
+          </a:p>
+        </p:txBody>
+      </p:sp>
+      <p:sp>
+        <p:nvSpPr>
+          <p:cNvPr id="7" name="TextBox 6"/>
+          <p:cNvSpPr txBox="1"/>
+          <p:nvPr/>
+        </p:nvSpPr>
+        <p:spPr>
+          <a:xfrm>
+            <a:off x="10972800" y="6455664"/>
+            <a:ext cx="731520" cy="274320"/>
+          </a:xfrm>
+          <a:prstGeom prst="rect">
+            <a:avLst/>
+          </a:prstGeom>
+          <a:noFill/>
+        </p:spPr>
+        <p:txBody>
+          <a:bodyPr wrap="square" lIns="45720" tIns="27432" rIns="45720" bIns="27432" anchor="t">
+            <a:spAutoFit/>
+          </a:bodyPr>
+          <a:lstStyle/>
+          <a:p>
+            <a:pPr algn="r"/>
+            <a:r>
+              <a:rPr sz="1000" b="0">
+                <a:solidFill>
+                  <a:srgbClr val="4B5563"/>
+                </a:solidFill>
+                <a:latin typeface="Calibri"/>
+              </a:rPr>
+              <a:t>4</a:t>
+            </a:r>
+          </a:p>
+        </p:txBody>
+      </p:sp>
+      <p:sp>
+        <p:nvSpPr>
+          <p:cNvPr id="8" name="TextBox 7"/>
+          <p:cNvSpPr txBox="1"/>
+          <p:nvPr/>
+        </p:nvSpPr>
+        <p:spPr>
+          <a:xfrm>
+            <a:off x="548640" y="1143000"/>
+            <a:ext cx="3931920" cy="822960"/>
+          </a:xfrm>
+          <a:prstGeom prst="rect">
+            <a:avLst/>
+          </a:prstGeom>
+          <a:noFill/>
+        </p:spPr>
+        <p:txBody>
+          <a:bodyPr wrap="square" lIns="45720" tIns="27432" rIns="45720" bIns="27432" anchor="t">
+            <a:spAutoFit/>
+          </a:bodyPr>
+          <a:lstStyle/>
+          <a:p>
+            <a:pPr algn="l"/>
+            <a:r>
+              <a:rPr sz="1800" b="1">
+                <a:solidFill>
+                  <a:srgbClr val="243B7A"/>
+                </a:solidFill>
+                <a:latin typeface="Calibri"/>
+              </a:rPr>
+              <a:t>"How many country liquor and composite shops are in Lucknow in August 2026?"</a:t>
+            </a:r>
+          </a:p>
+        </p:txBody>
+      </p:sp>
+      <p:sp>
+        <p:nvSpPr>
+          <p:cNvPr id="9" name="TextBox 8"/>
+          <p:cNvSpPr txBox="1"/>
+          <p:nvPr/>
+        </p:nvSpPr>
+        <p:spPr>
+          <a:xfrm>
+            <a:off x="548640" y="2148840"/>
+            <a:ext cx="3931920" cy="457200"/>
+          </a:xfrm>
+          <a:prstGeom prst="rect">
+            <a:avLst/>
+          </a:prstGeom>
+          <a:noFill/>
+        </p:spPr>
+        <p:txBody>
+          <a:bodyPr wrap="square" lIns="45720" tIns="27432" rIns="45720" bIns="27432" anchor="t">
+            <a:spAutoFit/>
+          </a:bodyPr>
+          <a:lstStyle/>
+          <a:p>
+            <a:pPr algn="l">
+              <a:spcAft>
+                <a:spcPts val="1200"/>
+              </a:spcAft>
+            </a:pPr>
+            <a:r>
+              <a:rPr sz="1600" b="0">
+                <a:solidFill>
+                  <a:srgbClr val="1F2937"/>
+                </a:solidFill>
+                <a:latin typeface="Calibri"/>
+              </a:rPr>
+              <a:t>Total: 1,006 shops.</a:t>
+            </a:r>
+          </a:p>
+          <a:p>
+            <a:pPr algn="l">
+              <a:spcAft>
+                <a:spcPts val="1200"/>
+              </a:spcAft>
+            </a:pPr>
+            <a:r>
+              <a:rPr sz="1600" b="0">
+                <a:solidFill>
+                  <a:srgbClr val="1F2937"/>
+                </a:solidFill>
+                <a:latin typeface="Calibri"/>
+              </a:rPr>
+              <a:t>Split: 589 country liquor and 417 composite.</a:t>
+            </a:r>
+          </a:p>
+          <a:p>
+            <a:pPr algn="l">
+              <a:spcAft>
+                <a:spcPts val="1200"/>
+              </a:spcAft>
+            </a:pPr>
+            <a:r>
+              <a:rPr sz="1600" b="0">
+                <a:solidFill>
+                  <a:srgbClr val="1F2937"/>
+                </a:solidFill>
+                <a:latin typeface="Calibri"/>
+              </a:rPr>
+              <a:t>The database counts the total; the AI does not add it up.</a:t>
+            </a:r>
+          </a:p>
+          <a:p>
+            <a:pPr algn="l">
+              <a:spcAft>
+                <a:spcPts val="1200"/>
+              </a:spcAft>
+            </a:pPr>
+            <a:r>
+              <a:rPr sz="1600" b="0">
+                <a:solidFill>
+                  <a:srgbClr val="1F2937"/>
+                </a:solidFill>
+                <a:latin typeface="Calibri"/>
+              </a:rPr>
+              <a:t>Source: the monthly dispatch report from the Integrated Excise Supply Chain Management System (IESCMS).</a:t>
+            </a:r>
+          </a:p>
+        </p:txBody>
+      </p:sp>
+      <p:sp>
+        <p:nvSpPr>
+          <p:cNvPr id="10" name="Rounded Rectangle 9"/>
+          <p:cNvSpPr/>
+          <p:nvPr/>
+        </p:nvSpPr>
+        <p:spPr>
+          <a:xfrm>
+            <a:off x="4663440" y="1143000"/>
+            <a:ext cx="7040879" cy="5166359"/>
+          </a:xfrm>
+          <a:prstGeom prst="roundRect">
+            <a:avLst>
+              <a:gd name="adj" fmla="val 8000"/>
+            </a:avLst>
+          </a:prstGeom>
+          <a:solidFill>
+            <a:srgbClr val="FFFFFF"/>
+          </a:solidFill>
+          <a:ln w="15875">
+            <a:solidFill>
+              <a:srgbClr val="D5D2E8"/>
+            </a:solidFill>
+          </a:ln>
+          <a:effectLst/>
+        </p:spPr>
+        <p:style>
+          <a:lnRef idx="1">
+            <a:schemeClr val="accent1"/>
+          </a:lnRef>
+          <a:fillRef idx="3">
+            <a:schemeClr val="accent1"/>
+          </a:fillRef>
+          <a:effectRef idx="2">
+            <a:schemeClr val="accent1"/>
+          </a:effectRef>
+          <a:fontRef idx="minor">
+            <a:schemeClr val="lt1"/>
+          </a:fontRef>
+        </p:style>
+        <p:txBody>
+          <a:bodyPr rtlCol="0" anchor="ctr"/>
+          <a:lstStyle/>
+          <a:p>
+            <a:pPr algn="ctr"/>
+            <a:endParaRPr/>
+          </a:p>
+        </p:txBody>
+      </p:sp>
+      <p:pic>
+        <p:nvPicPr>
+          <p:cNvPr id="11" name="Picture 10" descr="ask-1-view.png">
+            <a:hlinkClick r:id="rId4"/>
+          </p:cNvPr>
+          <p:cNvPicPr>
+            <a:picLocks noChangeAspect="1"/>
+          </p:cNvPicPr>
+          <p:nvPr/>
+        </p:nvPicPr>
+        <p:blipFill>
+          <a:blip r:embed="rId5"/>
+          <a:stretch>
+            <a:fillRect/>
+          </a:stretch>
+        </p:blipFill>
+        <p:spPr>
+          <a:xfrm>
+            <a:off x="5666938" y="1188720"/>
+            <a:ext cx="5033882" cy="5074920"/>
+          </a:xfrm>
+          <a:prstGeom prst="rect">
+            <a:avLst/>
+          </a:prstGeom>
+        </p:spPr>
+      </p:pic>
     </p:spTree>
   </p:cSld>
   <p:clrMapOvr>
@@ -8696,9 +6446,11 @@
       </p:sp>
       <p:sp>
         <p:nvSpPr>
-          <p:cNvPr id="4" name="TextBox 3"/>
-          <p:cNvSpPr txBox="1"/>
-          <p:nvPr/>
+          <p:cNvPr id="4" name="Title"/>
+          <p:cNvSpPr/>
+          <p:nvPr>
+            <p:ph type="title"/>
+          </p:nvPr>
         </p:nvSpPr>
         <p:spPr>
           <a:xfrm>
@@ -8724,7 +6476,7 @@
                 </a:solidFill>
                 <a:latin typeface="Calibri"/>
               </a:rPr>
-              <a:t>Live example: how many shops, and of which kind?</a:t>
+              <a:t>Live example: revenue by district and for a product</a:t>
             </a:r>
           </a:p>
         </p:txBody>
@@ -8818,143 +6570,21 @@
                 </a:solidFill>
                 <a:latin typeface="Calibri"/>
               </a:rPr>
-              <a:t>4</a:t>
-            </a:r>
-          </a:p>
-        </p:txBody>
-      </p:sp>
-      <p:sp>
-        <p:nvSpPr>
-          <p:cNvPr id="8" name="TextBox 7"/>
-          <p:cNvSpPr txBox="1"/>
-          <p:nvPr/>
-        </p:nvSpPr>
-        <p:spPr>
-          <a:xfrm>
-            <a:off x="548640" y="1143000"/>
-            <a:ext cx="3931920" cy="822960"/>
-          </a:xfrm>
-          <a:prstGeom prst="rect">
-            <a:avLst/>
-          </a:prstGeom>
-          <a:noFill/>
-        </p:spPr>
-        <p:txBody>
-          <a:bodyPr wrap="square" lIns="45720" tIns="27432" rIns="45720" bIns="27432" anchor="t">
-            <a:spAutoFit/>
-          </a:bodyPr>
-          <a:lstStyle/>
-          <a:p>
-            <a:pPr algn="l"/>
-            <a:r>
-              <a:rPr sz="1800" b="1">
-                <a:solidFill>
-                  <a:srgbClr val="243B7A"/>
-                </a:solidFill>
-                <a:latin typeface="Calibri"/>
-              </a:rPr>
-              <a:t>"How many country liquor and composite shops are in Lucknow in August 2026?"</a:t>
-            </a:r>
-          </a:p>
-        </p:txBody>
-      </p:sp>
-      <p:sp>
-        <p:nvSpPr>
-          <p:cNvPr id="9" name="TextBox 8"/>
-          <p:cNvSpPr txBox="1"/>
-          <p:nvPr/>
-        </p:nvSpPr>
-        <p:spPr>
-          <a:xfrm>
-            <a:off x="548640" y="2148840"/>
-            <a:ext cx="3931920" cy="457200"/>
-          </a:xfrm>
-          <a:prstGeom prst="rect">
-            <a:avLst/>
-          </a:prstGeom>
-          <a:noFill/>
-        </p:spPr>
-        <p:txBody>
-          <a:bodyPr wrap="square" lIns="45720" tIns="27432" rIns="45720" bIns="27432" anchor="t">
-            <a:spAutoFit/>
-          </a:bodyPr>
-          <a:lstStyle/>
-          <a:p>
-            <a:pPr algn="l">
-              <a:spcAft>
-                <a:spcPts val="1200"/>
-              </a:spcAft>
-            </a:pPr>
-            <a:r>
-              <a:rPr sz="1600" b="0">
-                <a:solidFill>
-                  <a:srgbClr val="1F2937"/>
-                </a:solidFill>
-                <a:latin typeface="Calibri"/>
-              </a:rPr>
-              <a:t>Total: 1,006 shops.</a:t>
-            </a:r>
-          </a:p>
-          <a:p>
-            <a:pPr algn="l">
-              <a:spcAft>
-                <a:spcPts val="1200"/>
-              </a:spcAft>
-            </a:pPr>
-            <a:r>
-              <a:rPr sz="1600" b="0">
-                <a:solidFill>
-                  <a:srgbClr val="1F2937"/>
-                </a:solidFill>
-                <a:latin typeface="Calibri"/>
-              </a:rPr>
-              <a:t>Split: 589 country liquor and 417 composite.</a:t>
-            </a:r>
-          </a:p>
-          <a:p>
-            <a:pPr algn="l">
-              <a:spcAft>
-                <a:spcPts val="1200"/>
-              </a:spcAft>
-            </a:pPr>
-            <a:r>
-              <a:rPr sz="1600" b="0">
-                <a:solidFill>
-                  <a:srgbClr val="1F2937"/>
-                </a:solidFill>
-                <a:latin typeface="Calibri"/>
-              </a:rPr>
-              <a:t>The database counts the total; the AI does not add it up.</a:t>
-            </a:r>
-          </a:p>
-          <a:p>
-            <a:pPr algn="l">
-              <a:spcAft>
-                <a:spcPts val="1200"/>
-              </a:spcAft>
-            </a:pPr>
-            <a:r>
-              <a:rPr sz="1600" b="0">
-                <a:solidFill>
-                  <a:srgbClr val="1F2937"/>
-                </a:solidFill>
-                <a:latin typeface="Calibri"/>
-              </a:rPr>
-              <a:t>Source: the monthly dispatch report from the Integrated Excise Supply Chain Management System (IESCMS).</a:t>
-            </a:r>
-          </a:p>
-        </p:txBody>
-      </p:sp>
-      <p:sp>
-        <p:nvSpPr>
-          <p:cNvPr id="10" name="Rounded Rectangle 9"/>
+              <a:t>5</a:t>
+            </a:r>
+          </a:p>
+        </p:txBody>
+      </p:sp>
+      <p:sp>
+        <p:nvSpPr>
+          <p:cNvPr id="8" name="Rounded Rectangle 7"/>
           <p:cNvSpPr/>
           <p:nvPr/>
         </p:nvSpPr>
         <p:spPr>
           <a:xfrm>
-            <a:off x="4663440" y="1143000"/>
-            <a:ext cx="7040879" cy="5166359"/>
+            <a:off x="502919" y="1737360"/>
+            <a:ext cx="5577840" cy="3703320"/>
           </a:xfrm>
           <a:prstGeom prst="roundRect">
             <a:avLst>
@@ -8996,7 +6626,7 @@
       </p:sp>
       <p:pic>
         <p:nvPicPr>
-          <p:cNvPr id="11" name="Picture 10" descr="ask-1-view.png">
+          <p:cNvPr id="9" name="Picture 8" descr="ask-2-view.png">
             <a:hlinkClick r:id="rId4"/>
           </p:cNvPr>
           <p:cNvPicPr>
@@ -9012,14 +6642,229 @@
         </p:blipFill>
         <p:spPr>
           <a:xfrm>
-            <a:off x="5666938" y="1188720"/>
-            <a:ext cx="5033882" cy="5074920"/>
+            <a:off x="864656" y="1783080"/>
+            <a:ext cx="4854366" cy="3611880"/>
           </a:xfrm>
           <a:prstGeom prst="rect">
             <a:avLst/>
           </a:prstGeom>
         </p:spPr>
       </p:pic>
+      <p:sp>
+        <p:nvSpPr>
+          <p:cNvPr id="10" name="Rounded Rectangle 9"/>
+          <p:cNvSpPr/>
+          <p:nvPr/>
+        </p:nvSpPr>
+        <p:spPr>
+          <a:xfrm>
+            <a:off x="6126480" y="1737360"/>
+            <a:ext cx="5577840" cy="3703320"/>
+          </a:xfrm>
+          <a:prstGeom prst="roundRect">
+            <a:avLst>
+              <a:gd name="adj" fmla="val 8000"/>
+            </a:avLst>
+          </a:prstGeom>
+          <a:solidFill>
+            <a:srgbClr val="FFFFFF"/>
+          </a:solidFill>
+          <a:ln w="15875">
+            <a:solidFill>
+              <a:srgbClr val="D5D2E8"/>
+            </a:solidFill>
+          </a:ln>
+          <a:effectLst/>
+        </p:spPr>
+        <p:style>
+          <a:lnRef idx="1">
+            <a:schemeClr val="accent1"/>
+          </a:lnRef>
+          <a:fillRef idx="3">
+            <a:schemeClr val="accent1"/>
+          </a:fillRef>
+          <a:effectRef idx="2">
+            <a:schemeClr val="accent1"/>
+          </a:effectRef>
+          <a:fontRef idx="minor">
+            <a:schemeClr val="lt1"/>
+          </a:fontRef>
+        </p:style>
+        <p:txBody>
+          <a:bodyPr rtlCol="0" anchor="ctr"/>
+          <a:lstStyle/>
+          <a:p>
+            <a:pPr algn="ctr"/>
+            <a:endParaRPr/>
+          </a:p>
+        </p:txBody>
+      </p:sp>
+      <p:pic>
+        <p:nvPicPr>
+          <p:cNvPr id="11" name="Picture 10" descr="ask-3-view.png">
+            <a:hlinkClick r:id="rId6"/>
+          </p:cNvPr>
+          <p:cNvPicPr>
+            <a:picLocks noChangeAspect="1"/>
+          </p:cNvPicPr>
+          <p:nvPr/>
+        </p:nvPicPr>
+        <p:blipFill>
+          <a:blip r:embed="rId7"/>
+          <a:stretch>
+            <a:fillRect/>
+          </a:stretch>
+        </p:blipFill>
+        <p:spPr>
+          <a:xfrm>
+            <a:off x="6488216" y="1783080"/>
+            <a:ext cx="4854366" cy="3611880"/>
+          </a:xfrm>
+          <a:prstGeom prst="rect">
+            <a:avLst/>
+          </a:prstGeom>
+        </p:spPr>
+      </p:pic>
+      <p:sp>
+        <p:nvSpPr>
+          <p:cNvPr id="12" name="TextBox 11"/>
+          <p:cNvSpPr txBox="1"/>
+          <p:nvPr/>
+        </p:nvSpPr>
+        <p:spPr>
+          <a:xfrm>
+            <a:off x="548640" y="1097280"/>
+            <a:ext cx="5486400" cy="548640"/>
+          </a:xfrm>
+          <a:prstGeom prst="rect">
+            <a:avLst/>
+          </a:prstGeom>
+          <a:noFill/>
+        </p:spPr>
+        <p:txBody>
+          <a:bodyPr wrap="square" lIns="45720" tIns="27432" rIns="45720" bIns="27432" anchor="t">
+            <a:spAutoFit/>
+          </a:bodyPr>
+          <a:lstStyle/>
+          <a:p>
+            <a:pPr algn="l"/>
+            <a:r>
+              <a:rPr sz="1500" b="1">
+                <a:solidFill>
+                  <a:srgbClr val="243B7A"/>
+                </a:solidFill>
+                <a:latin typeface="Calibri"/>
+              </a:rPr>
+              <a:t>"Which district generated the highest revenue in FY2025-26?"</a:t>
+            </a:r>
+          </a:p>
+        </p:txBody>
+      </p:sp>
+      <p:sp>
+        <p:nvSpPr>
+          <p:cNvPr id="13" name="TextBox 12"/>
+          <p:cNvSpPr txBox="1"/>
+          <p:nvPr/>
+        </p:nvSpPr>
+        <p:spPr>
+          <a:xfrm>
+            <a:off x="6172200" y="1097280"/>
+            <a:ext cx="5486400" cy="548640"/>
+          </a:xfrm>
+          <a:prstGeom prst="rect">
+            <a:avLst/>
+          </a:prstGeom>
+          <a:noFill/>
+        </p:spPr>
+        <p:txBody>
+          <a:bodyPr wrap="square" lIns="45720" tIns="27432" rIns="45720" bIns="27432" anchor="t">
+            <a:spAutoFit/>
+          </a:bodyPr>
+          <a:lstStyle/>
+          <a:p>
+            <a:pPr algn="l"/>
+            <a:r>
+              <a:rPr sz="1500" b="1">
+                <a:solidFill>
+                  <a:srgbClr val="243B7A"/>
+                </a:solidFill>
+                <a:latin typeface="Calibri"/>
+              </a:rPr>
+              <a:t>"How much revenue came from beer sale across Uttar Pradesh in FY2025-26?"</a:t>
+            </a:r>
+          </a:p>
+        </p:txBody>
+      </p:sp>
+      <p:sp>
+        <p:nvSpPr>
+          <p:cNvPr id="14" name="TextBox 13"/>
+          <p:cNvSpPr txBox="1"/>
+          <p:nvPr/>
+        </p:nvSpPr>
+        <p:spPr>
+          <a:xfrm>
+            <a:off x="548640" y="5577840"/>
+            <a:ext cx="5486400" cy="822960"/>
+          </a:xfrm>
+          <a:prstGeom prst="rect">
+            <a:avLst/>
+          </a:prstGeom>
+          <a:noFill/>
+        </p:spPr>
+        <p:txBody>
+          <a:bodyPr wrap="square" lIns="45720" tIns="27432" rIns="45720" bIns="27432" anchor="t">
+            <a:spAutoFit/>
+          </a:bodyPr>
+          <a:lstStyle/>
+          <a:p>
+            <a:pPr algn="l"/>
+            <a:r>
+              <a:rPr sz="1600" b="0">
+                <a:solidFill>
+                  <a:srgbClr val="1F2937"/>
+                </a:solidFill>
+                <a:latin typeface="Calibri"/>
+              </a:rPr>
+              <a:t>Lucknow is the highest, at ₹2,860.80 crore out of a state total of about ₹55,463 crore.</a:t>
+            </a:r>
+          </a:p>
+        </p:txBody>
+      </p:sp>
+      <p:sp>
+        <p:nvSpPr>
+          <p:cNvPr id="15" name="TextBox 14"/>
+          <p:cNvSpPr txBox="1"/>
+          <p:nvPr/>
+        </p:nvSpPr>
+        <p:spPr>
+          <a:xfrm>
+            <a:off x="6172200" y="5577840"/>
+            <a:ext cx="5486400" cy="822960"/>
+          </a:xfrm>
+          <a:prstGeom prst="rect">
+            <a:avLst/>
+          </a:prstGeom>
+          <a:noFill/>
+        </p:spPr>
+        <p:txBody>
+          <a:bodyPr wrap="square" lIns="45720" tIns="27432" rIns="45720" bIns="27432" anchor="t">
+            <a:spAutoFit/>
+          </a:bodyPr>
+          <a:lstStyle/>
+          <a:p>
+            <a:pPr algn="l"/>
+            <a:r>
+              <a:rPr sz="1600" b="0">
+                <a:solidFill>
+                  <a:srgbClr val="1F2937"/>
+                </a:solidFill>
+                <a:latin typeface="Calibri"/>
+              </a:rPr>
+              <a:t>Beer revenue is ₹7,142.87 crore: ₹6,740.18 crore from composite shops and ₹402.69 crore from country liquor shops that also sell beer (CL5CC).</a:t>
+            </a:r>
+          </a:p>
+        </p:txBody>
+      </p:sp>
     </p:spTree>
   </p:cSld>
   <p:clrMapOvr>
@@ -9135,9 +6980,11 @@
       </p:sp>
       <p:sp>
         <p:nvSpPr>
-          <p:cNvPr id="4" name="TextBox 3"/>
-          <p:cNvSpPr txBox="1"/>
-          <p:nvPr/>
+          <p:cNvPr id="4" name="Title"/>
+          <p:cNvSpPr/>
+          <p:nvPr>
+            <p:ph type="title"/>
+          </p:nvPr>
         </p:nvSpPr>
         <p:spPr>
           <a:xfrm>
@@ -9163,7 +7010,7 @@
                 </a:solidFill>
                 <a:latin typeface="Calibri"/>
               </a:rPr>
-              <a:t>Live example: revenue by district and for a product</a:t>
+              <a:t>Safety and control</a:t>
             </a:r>
           </a:p>
         </p:txBody>
@@ -9257,7 +7104,7 @@
                 </a:solidFill>
                 <a:latin typeface="Calibri"/>
               </a:rPr>
-              <a:t>5</a:t>
+              <a:t>6</a:t>
             </a:r>
           </a:p>
         </p:txBody>
@@ -9270,8 +7117,8 @@
         </p:nvSpPr>
         <p:spPr>
           <a:xfrm>
-            <a:off x="502919" y="1737360"/>
-            <a:ext cx="5577840" cy="3703320"/>
+            <a:off x="548640" y="1280160"/>
+            <a:ext cx="11064240" cy="868680"/>
           </a:xfrm>
           <a:prstGeom prst="roundRect">
             <a:avLst>
@@ -9279,11 +7126,11 @@
             </a:avLst>
           </a:prstGeom>
           <a:solidFill>
-            <a:srgbClr val="FFFFFF"/>
+            <a:srgbClr val="EAF0FB"/>
           </a:solidFill>
           <a:ln w="15875">
             <a:solidFill>
-              <a:srgbClr val="D5D2E8"/>
+              <a:srgbClr val="D0DBF0"/>
             </a:solidFill>
           </a:ln>
           <a:effectLst/>
@@ -9311,11 +7158,242 @@
           </a:p>
         </p:txBody>
       </p:sp>
+      <p:sp>
+        <p:nvSpPr>
+          <p:cNvPr id="9" name="Oval 8"/>
+          <p:cNvSpPr/>
+          <p:nvPr/>
+        </p:nvSpPr>
+        <p:spPr>
+          <a:xfrm>
+            <a:off x="731520" y="1371600"/>
+            <a:ext cx="685800" cy="685800"/>
+          </a:xfrm>
+          <a:prstGeom prst="ellipse">
+            <a:avLst/>
+          </a:prstGeom>
+          <a:solidFill>
+            <a:srgbClr val="3E5CA8"/>
+          </a:solidFill>
+          <a:ln>
+            <a:noFill/>
+          </a:ln>
+          <a:effectLst/>
+        </p:spPr>
+        <p:style>
+          <a:lnRef idx="1">
+            <a:schemeClr val="accent1"/>
+          </a:lnRef>
+          <a:fillRef idx="3">
+            <a:schemeClr val="accent1"/>
+          </a:fillRef>
+          <a:effectRef idx="2">
+            <a:schemeClr val="accent1"/>
+          </a:effectRef>
+          <a:fontRef idx="minor">
+            <a:schemeClr val="lt1"/>
+          </a:fontRef>
+        </p:style>
+        <p:txBody>
+          <a:bodyPr rtlCol="0" anchor="ctr"/>
+          <a:lstStyle/>
+          <a:p>
+            <a:pPr algn="ctr"/>
+            <a:endParaRPr/>
+          </a:p>
+        </p:txBody>
+      </p:sp>
       <p:pic>
         <p:nvPicPr>
-          <p:cNvPr id="9" name="Picture 8" descr="ask-2-view.png">
-            <a:hlinkClick r:id="rId4"/>
-          </p:cNvPr>
+          <p:cNvPr id="10" name="Picture 9" descr="lock-white.png"/>
+          <p:cNvPicPr>
+            <a:picLocks noChangeAspect="1"/>
+          </p:cNvPicPr>
+          <p:nvPr/>
+        </p:nvPicPr>
+        <p:blipFill>
+          <a:blip r:embed="rId4"/>
+          <a:stretch>
+            <a:fillRect/>
+          </a:stretch>
+        </p:blipFill>
+        <p:spPr>
+          <a:xfrm>
+            <a:off x="882396" y="1522476"/>
+            <a:ext cx="384048" cy="384048"/>
+          </a:xfrm>
+          <a:prstGeom prst="rect">
+            <a:avLst/>
+          </a:prstGeom>
+        </p:spPr>
+      </p:pic>
+      <p:sp>
+        <p:nvSpPr>
+          <p:cNvPr id="11" name="TextBox 10"/>
+          <p:cNvSpPr txBox="1"/>
+          <p:nvPr/>
+        </p:nvSpPr>
+        <p:spPr>
+          <a:xfrm>
+            <a:off x="1600200" y="1325880"/>
+            <a:ext cx="3017520" cy="777240"/>
+          </a:xfrm>
+          <a:prstGeom prst="rect">
+            <a:avLst/>
+          </a:prstGeom>
+          <a:noFill/>
+        </p:spPr>
+        <p:txBody>
+          <a:bodyPr wrap="square" lIns="45720" tIns="27432" rIns="45720" bIns="27432" anchor="ctr">
+            <a:spAutoFit/>
+          </a:bodyPr>
+          <a:lstStyle/>
+          <a:p>
+            <a:pPr algn="l"/>
+            <a:r>
+              <a:rPr sz="2100" b="1">
+                <a:solidFill>
+                  <a:srgbClr val="243B7A"/>
+                </a:solidFill>
+                <a:latin typeface="Calibri"/>
+              </a:rPr>
+              <a:t>Sign-in</a:t>
+            </a:r>
+          </a:p>
+        </p:txBody>
+      </p:sp>
+      <p:sp>
+        <p:nvSpPr>
+          <p:cNvPr id="12" name="TextBox 11"/>
+          <p:cNvSpPr txBox="1"/>
+          <p:nvPr/>
+        </p:nvSpPr>
+        <p:spPr>
+          <a:xfrm>
+            <a:off x="4572000" y="1325880"/>
+            <a:ext cx="6949440" cy="777240"/>
+          </a:xfrm>
+          <a:prstGeom prst="rect">
+            <a:avLst/>
+          </a:prstGeom>
+          <a:noFill/>
+        </p:spPr>
+        <p:txBody>
+          <a:bodyPr wrap="square" lIns="45720" tIns="27432" rIns="45720" bIns="27432" anchor="ctr">
+            <a:spAutoFit/>
+          </a:bodyPr>
+          <a:lstStyle/>
+          <a:p>
+            <a:pPr algn="l"/>
+            <a:r>
+              <a:rPr sz="1600" b="0">
+                <a:solidFill>
+                  <a:srgbClr val="1F2937"/>
+                </a:solidFill>
+                <a:latin typeface="Calibri"/>
+              </a:rPr>
+              <a:t>Email one-time code. Each person has a role: Admin or Analyst.</a:t>
+            </a:r>
+          </a:p>
+        </p:txBody>
+      </p:sp>
+      <p:sp>
+        <p:nvSpPr>
+          <p:cNvPr id="13" name="Rounded Rectangle 12"/>
+          <p:cNvSpPr/>
+          <p:nvPr/>
+        </p:nvSpPr>
+        <p:spPr>
+          <a:xfrm>
+            <a:off x="548640" y="2267712"/>
+            <a:ext cx="11064240" cy="868680"/>
+          </a:xfrm>
+          <a:prstGeom prst="roundRect">
+            <a:avLst>
+              <a:gd name="adj" fmla="val 8000"/>
+            </a:avLst>
+          </a:prstGeom>
+          <a:solidFill>
+            <a:srgbClr val="EAF0FB"/>
+          </a:solidFill>
+          <a:ln w="15875">
+            <a:solidFill>
+              <a:srgbClr val="D0DBF0"/>
+            </a:solidFill>
+          </a:ln>
+          <a:effectLst/>
+        </p:spPr>
+        <p:style>
+          <a:lnRef idx="1">
+            <a:schemeClr val="accent1"/>
+          </a:lnRef>
+          <a:fillRef idx="3">
+            <a:schemeClr val="accent1"/>
+          </a:fillRef>
+          <a:effectRef idx="2">
+            <a:schemeClr val="accent1"/>
+          </a:effectRef>
+          <a:fontRef idx="minor">
+            <a:schemeClr val="lt1"/>
+          </a:fontRef>
+        </p:style>
+        <p:txBody>
+          <a:bodyPr rtlCol="0" anchor="ctr"/>
+          <a:lstStyle/>
+          <a:p>
+            <a:pPr algn="ctr"/>
+            <a:endParaRPr/>
+          </a:p>
+        </p:txBody>
+      </p:sp>
+      <p:sp>
+        <p:nvSpPr>
+          <p:cNvPr id="14" name="Oval 13"/>
+          <p:cNvSpPr/>
+          <p:nvPr/>
+        </p:nvSpPr>
+        <p:spPr>
+          <a:xfrm>
+            <a:off x="731520" y="2359152"/>
+            <a:ext cx="685800" cy="685800"/>
+          </a:xfrm>
+          <a:prstGeom prst="ellipse">
+            <a:avLst/>
+          </a:prstGeom>
+          <a:solidFill>
+            <a:srgbClr val="3E5CA8"/>
+          </a:solidFill>
+          <a:ln>
+            <a:noFill/>
+          </a:ln>
+          <a:effectLst/>
+        </p:spPr>
+        <p:style>
+          <a:lnRef idx="1">
+            <a:schemeClr val="accent1"/>
+          </a:lnRef>
+          <a:fillRef idx="3">
+            <a:schemeClr val="accent1"/>
+          </a:fillRef>
+          <a:effectRef idx="2">
+            <a:schemeClr val="accent1"/>
+          </a:effectRef>
+          <a:fontRef idx="minor">
+            <a:schemeClr val="lt1"/>
+          </a:fontRef>
+        </p:style>
+        <p:txBody>
+          <a:bodyPr rtlCol="0" anchor="ctr"/>
+          <a:lstStyle/>
+          <a:p>
+            <a:pPr algn="ctr"/>
+            <a:endParaRPr/>
+          </a:p>
+        </p:txBody>
+      </p:sp>
+      <p:pic>
+        <p:nvPicPr>
+          <p:cNvPr id="15" name="Picture 14" descr="eye-white.png"/>
           <p:cNvPicPr>
             <a:picLocks noChangeAspect="1"/>
           </p:cNvPicPr>
@@ -9329,8 +7407,8 @@
         </p:blipFill>
         <p:spPr>
           <a:xfrm>
-            <a:off x="864656" y="1783080"/>
-            <a:ext cx="4854366" cy="3611880"/>
+            <a:off x="882396" y="2510028"/>
+            <a:ext cx="384048" cy="384048"/>
           </a:xfrm>
           <a:prstGeom prst="rect">
             <a:avLst/>
@@ -9339,14 +7417,84 @@
       </p:pic>
       <p:sp>
         <p:nvSpPr>
-          <p:cNvPr id="10" name="Rounded Rectangle 9"/>
+          <p:cNvPr id="16" name="TextBox 15"/>
+          <p:cNvSpPr txBox="1"/>
+          <p:nvPr/>
+        </p:nvSpPr>
+        <p:spPr>
+          <a:xfrm>
+            <a:off x="1600200" y="2313432"/>
+            <a:ext cx="3017520" cy="777240"/>
+          </a:xfrm>
+          <a:prstGeom prst="rect">
+            <a:avLst/>
+          </a:prstGeom>
+          <a:noFill/>
+        </p:spPr>
+        <p:txBody>
+          <a:bodyPr wrap="square" lIns="45720" tIns="27432" rIns="45720" bIns="27432" anchor="ctr">
+            <a:spAutoFit/>
+          </a:bodyPr>
+          <a:lstStyle/>
+          <a:p>
+            <a:pPr algn="l"/>
+            <a:r>
+              <a:rPr sz="2100" b="1">
+                <a:solidFill>
+                  <a:srgbClr val="243B7A"/>
+                </a:solidFill>
+                <a:latin typeface="Calibri"/>
+              </a:rPr>
+              <a:t>Read-only data</a:t>
+            </a:r>
+          </a:p>
+        </p:txBody>
+      </p:sp>
+      <p:sp>
+        <p:nvSpPr>
+          <p:cNvPr id="17" name="TextBox 16"/>
+          <p:cNvSpPr txBox="1"/>
+          <p:nvPr/>
+        </p:nvSpPr>
+        <p:spPr>
+          <a:xfrm>
+            <a:off x="4572000" y="2313432"/>
+            <a:ext cx="6949440" cy="777240"/>
+          </a:xfrm>
+          <a:prstGeom prst="rect">
+            <a:avLst/>
+          </a:prstGeom>
+          <a:noFill/>
+        </p:spPr>
+        <p:txBody>
+          <a:bodyPr wrap="square" lIns="45720" tIns="27432" rIns="45720" bIns="27432" anchor="ctr">
+            <a:spAutoFit/>
+          </a:bodyPr>
+          <a:lstStyle/>
+          <a:p>
+            <a:pPr algn="l"/>
+            <a:r>
+              <a:rPr sz="1600" b="0">
+                <a:solidFill>
+                  <a:srgbClr val="1F2937"/>
+                </a:solidFill>
+                <a:latin typeface="Calibri"/>
+              </a:rPr>
+              <a:t>The AI connects with a database account that can read but cannot change anything.</a:t>
+            </a:r>
+          </a:p>
+        </p:txBody>
+      </p:sp>
+      <p:sp>
+        <p:nvSpPr>
+          <p:cNvPr id="18" name="Rounded Rectangle 17"/>
           <p:cNvSpPr/>
           <p:nvPr/>
         </p:nvSpPr>
         <p:spPr>
           <a:xfrm>
-            <a:off x="6126480" y="1737360"/>
-            <a:ext cx="5577840" cy="3703320"/>
+            <a:off x="548640" y="3255264"/>
+            <a:ext cx="11064240" cy="868680"/>
           </a:xfrm>
           <a:prstGeom prst="roundRect">
             <a:avLst>
@@ -9354,11 +7502,11 @@
             </a:avLst>
           </a:prstGeom>
           <a:solidFill>
-            <a:srgbClr val="FFFFFF"/>
+            <a:srgbClr val="EAF0FB"/>
           </a:solidFill>
           <a:ln w="15875">
             <a:solidFill>
-              <a:srgbClr val="D5D2E8"/>
+              <a:srgbClr val="D0DBF0"/>
             </a:solidFill>
           </a:ln>
           <a:effectLst/>
@@ -9386,11 +7534,242 @@
           </a:p>
         </p:txBody>
       </p:sp>
+      <p:sp>
+        <p:nvSpPr>
+          <p:cNvPr id="19" name="Oval 18"/>
+          <p:cNvSpPr/>
+          <p:nvPr/>
+        </p:nvSpPr>
+        <p:spPr>
+          <a:xfrm>
+            <a:off x="731520" y="3346704"/>
+            <a:ext cx="685800" cy="685800"/>
+          </a:xfrm>
+          <a:prstGeom prst="ellipse">
+            <a:avLst/>
+          </a:prstGeom>
+          <a:solidFill>
+            <a:srgbClr val="3E5CA8"/>
+          </a:solidFill>
+          <a:ln>
+            <a:noFill/>
+          </a:ln>
+          <a:effectLst/>
+        </p:spPr>
+        <p:style>
+          <a:lnRef idx="1">
+            <a:schemeClr val="accent1"/>
+          </a:lnRef>
+          <a:fillRef idx="3">
+            <a:schemeClr val="accent1"/>
+          </a:fillRef>
+          <a:effectRef idx="2">
+            <a:schemeClr val="accent1"/>
+          </a:effectRef>
+          <a:fontRef idx="minor">
+            <a:schemeClr val="lt1"/>
+          </a:fontRef>
+        </p:style>
+        <p:txBody>
+          <a:bodyPr rtlCol="0" anchor="ctr"/>
+          <a:lstStyle/>
+          <a:p>
+            <a:pPr algn="ctr"/>
+            <a:endParaRPr/>
+          </a:p>
+        </p:txBody>
+      </p:sp>
       <p:pic>
         <p:nvPicPr>
-          <p:cNvPr id="11" name="Picture 10" descr="ask-3-view.png">
-            <a:hlinkClick r:id="rId6"/>
-          </p:cNvPr>
+          <p:cNvPr id="20" name="Picture 19" descr="search-white.png"/>
+          <p:cNvPicPr>
+            <a:picLocks noChangeAspect="1"/>
+          </p:cNvPicPr>
+          <p:nvPr/>
+        </p:nvPicPr>
+        <p:blipFill>
+          <a:blip r:embed="rId6"/>
+          <a:stretch>
+            <a:fillRect/>
+          </a:stretch>
+        </p:blipFill>
+        <p:spPr>
+          <a:xfrm>
+            <a:off x="882396" y="3497580"/>
+            <a:ext cx="384048" cy="384048"/>
+          </a:xfrm>
+          <a:prstGeom prst="rect">
+            <a:avLst/>
+          </a:prstGeom>
+        </p:spPr>
+      </p:pic>
+      <p:sp>
+        <p:nvSpPr>
+          <p:cNvPr id="21" name="TextBox 20"/>
+          <p:cNvSpPr txBox="1"/>
+          <p:nvPr/>
+        </p:nvSpPr>
+        <p:spPr>
+          <a:xfrm>
+            <a:off x="1600200" y="3300984"/>
+            <a:ext cx="3017520" cy="777240"/>
+          </a:xfrm>
+          <a:prstGeom prst="rect">
+            <a:avLst/>
+          </a:prstGeom>
+          <a:noFill/>
+        </p:spPr>
+        <p:txBody>
+          <a:bodyPr wrap="square" lIns="45720" tIns="27432" rIns="45720" bIns="27432" anchor="ctr">
+            <a:spAutoFit/>
+          </a:bodyPr>
+          <a:lstStyle/>
+          <a:p>
+            <a:pPr algn="l"/>
+            <a:r>
+              <a:rPr sz="2100" b="1">
+                <a:solidFill>
+                  <a:srgbClr val="243B7A"/>
+                </a:solidFill>
+                <a:latin typeface="Calibri"/>
+              </a:rPr>
+              <a:t>Checked queries</a:t>
+            </a:r>
+          </a:p>
+        </p:txBody>
+      </p:sp>
+      <p:sp>
+        <p:nvSpPr>
+          <p:cNvPr id="22" name="TextBox 21"/>
+          <p:cNvSpPr txBox="1"/>
+          <p:nvPr/>
+        </p:nvSpPr>
+        <p:spPr>
+          <a:xfrm>
+            <a:off x="4572000" y="3300984"/>
+            <a:ext cx="6949440" cy="777240"/>
+          </a:xfrm>
+          <a:prstGeom prst="rect">
+            <a:avLst/>
+          </a:prstGeom>
+          <a:noFill/>
+        </p:spPr>
+        <p:txBody>
+          <a:bodyPr wrap="square" lIns="45720" tIns="27432" rIns="45720" bIns="27432" anchor="ctr">
+            <a:spAutoFit/>
+          </a:bodyPr>
+          <a:lstStyle/>
+          <a:p>
+            <a:pPr algn="l"/>
+            <a:r>
+              <a:rPr sz="1600" b="0">
+                <a:solidFill>
+                  <a:srgbClr val="1F2937"/>
+                </a:solidFill>
+                <a:latin typeface="Calibri"/>
+              </a:rPr>
+              <a:t>Every query is inspected first. Only a single read request is allowed.</a:t>
+            </a:r>
+          </a:p>
+        </p:txBody>
+      </p:sp>
+      <p:sp>
+        <p:nvSpPr>
+          <p:cNvPr id="23" name="Rounded Rectangle 22"/>
+          <p:cNvSpPr/>
+          <p:nvPr/>
+        </p:nvSpPr>
+        <p:spPr>
+          <a:xfrm>
+            <a:off x="548640" y="4242816"/>
+            <a:ext cx="11064240" cy="868680"/>
+          </a:xfrm>
+          <a:prstGeom prst="roundRect">
+            <a:avLst>
+              <a:gd name="adj" fmla="val 8000"/>
+            </a:avLst>
+          </a:prstGeom>
+          <a:solidFill>
+            <a:srgbClr val="EAF0FB"/>
+          </a:solidFill>
+          <a:ln w="15875">
+            <a:solidFill>
+              <a:srgbClr val="D0DBF0"/>
+            </a:solidFill>
+          </a:ln>
+          <a:effectLst/>
+        </p:spPr>
+        <p:style>
+          <a:lnRef idx="1">
+            <a:schemeClr val="accent1"/>
+          </a:lnRef>
+          <a:fillRef idx="3">
+            <a:schemeClr val="accent1"/>
+          </a:fillRef>
+          <a:effectRef idx="2">
+            <a:schemeClr val="accent1"/>
+          </a:effectRef>
+          <a:fontRef idx="minor">
+            <a:schemeClr val="lt1"/>
+          </a:fontRef>
+        </p:style>
+        <p:txBody>
+          <a:bodyPr rtlCol="0" anchor="ctr"/>
+          <a:lstStyle/>
+          <a:p>
+            <a:pPr algn="ctr"/>
+            <a:endParaRPr/>
+          </a:p>
+        </p:txBody>
+      </p:sp>
+      <p:sp>
+        <p:nvSpPr>
+          <p:cNvPr id="24" name="Oval 23"/>
+          <p:cNvSpPr/>
+          <p:nvPr/>
+        </p:nvSpPr>
+        <p:spPr>
+          <a:xfrm>
+            <a:off x="731520" y="4334256"/>
+            <a:ext cx="685800" cy="685800"/>
+          </a:xfrm>
+          <a:prstGeom prst="ellipse">
+            <a:avLst/>
+          </a:prstGeom>
+          <a:solidFill>
+            <a:srgbClr val="3E5CA8"/>
+          </a:solidFill>
+          <a:ln>
+            <a:noFill/>
+          </a:ln>
+          <a:effectLst/>
+        </p:spPr>
+        <p:style>
+          <a:lnRef idx="1">
+            <a:schemeClr val="accent1"/>
+          </a:lnRef>
+          <a:fillRef idx="3">
+            <a:schemeClr val="accent1"/>
+          </a:fillRef>
+          <a:effectRef idx="2">
+            <a:schemeClr val="accent1"/>
+          </a:effectRef>
+          <a:fontRef idx="minor">
+            <a:schemeClr val="lt1"/>
+          </a:fontRef>
+        </p:style>
+        <p:txBody>
+          <a:bodyPr rtlCol="0" anchor="ctr"/>
+          <a:lstStyle/>
+          <a:p>
+            <a:pPr algn="ctr"/>
+            <a:endParaRPr/>
+          </a:p>
+        </p:txBody>
+      </p:sp>
+      <p:pic>
+        <p:nvPicPr>
+          <p:cNvPr id="25" name="Picture 24" descr="shield-white.png"/>
           <p:cNvPicPr>
             <a:picLocks noChangeAspect="1"/>
           </p:cNvPicPr>
@@ -9404,8 +7783,8 @@
         </p:blipFill>
         <p:spPr>
           <a:xfrm>
-            <a:off x="6488216" y="1783080"/>
-            <a:ext cx="4854366" cy="3611880"/>
+            <a:off x="882396" y="4485132"/>
+            <a:ext cx="384048" cy="384048"/>
           </a:xfrm>
           <a:prstGeom prst="rect">
             <a:avLst/>
@@ -9414,14 +7793,14 @@
       </p:pic>
       <p:sp>
         <p:nvSpPr>
-          <p:cNvPr id="12" name="TextBox 11"/>
+          <p:cNvPr id="26" name="TextBox 25"/>
           <p:cNvSpPr txBox="1"/>
           <p:nvPr/>
         </p:nvSpPr>
         <p:spPr>
           <a:xfrm>
-            <a:off x="548640" y="1097280"/>
-            <a:ext cx="5486400" cy="548640"/>
+            <a:off x="1600200" y="4288536"/>
+            <a:ext cx="3017520" cy="777240"/>
           </a:xfrm>
           <a:prstGeom prst="rect">
             <a:avLst/>
@@ -9429,34 +7808,34 @@
           <a:noFill/>
         </p:spPr>
         <p:txBody>
-          <a:bodyPr wrap="square" lIns="45720" tIns="27432" rIns="45720" bIns="27432" anchor="t">
+          <a:bodyPr wrap="square" lIns="45720" tIns="27432" rIns="45720" bIns="27432" anchor="ctr">
             <a:spAutoFit/>
           </a:bodyPr>
           <a:lstStyle/>
           <a:p>
             <a:pPr algn="l"/>
             <a:r>
-              <a:rPr sz="1500" b="1">
+              <a:rPr sz="2100" b="1">
                 <a:solidFill>
                   <a:srgbClr val="243B7A"/>
                 </a:solidFill>
                 <a:latin typeface="Calibri"/>
               </a:rPr>
-              <a:t>"Which district generated the highest revenue in FY2025-26?"</a:t>
-            </a:r>
-          </a:p>
-        </p:txBody>
-      </p:sp>
-      <p:sp>
-        <p:nvSpPr>
-          <p:cNvPr id="13" name="TextBox 12"/>
+              <a:t>Locked box for charts</a:t>
+            </a:r>
+          </a:p>
+        </p:txBody>
+      </p:sp>
+      <p:sp>
+        <p:nvSpPr>
+          <p:cNvPr id="27" name="TextBox 26"/>
           <p:cNvSpPr txBox="1"/>
           <p:nvPr/>
         </p:nvSpPr>
         <p:spPr>
           <a:xfrm>
-            <a:off x="6172200" y="1097280"/>
-            <a:ext cx="5486400" cy="548640"/>
+            <a:off x="4572000" y="4288536"/>
+            <a:ext cx="6949440" cy="777240"/>
           </a:xfrm>
           <a:prstGeom prst="rect">
             <a:avLst/>
@@ -9464,42 +7843,7 @@
           <a:noFill/>
         </p:spPr>
         <p:txBody>
-          <a:bodyPr wrap="square" lIns="45720" tIns="27432" rIns="45720" bIns="27432" anchor="t">
-            <a:spAutoFit/>
-          </a:bodyPr>
-          <a:lstStyle/>
-          <a:p>
-            <a:pPr algn="l"/>
-            <a:r>
-              <a:rPr sz="1500" b="1">
-                <a:solidFill>
-                  <a:srgbClr val="243B7A"/>
-                </a:solidFill>
-                <a:latin typeface="Calibri"/>
-              </a:rPr>
-              <a:t>"How much revenue came from beer sale across Uttar Pradesh in FY2025-26?"</a:t>
-            </a:r>
-          </a:p>
-        </p:txBody>
-      </p:sp>
-      <p:sp>
-        <p:nvSpPr>
-          <p:cNvPr id="14" name="TextBox 13"/>
-          <p:cNvSpPr txBox="1"/>
-          <p:nvPr/>
-        </p:nvSpPr>
-        <p:spPr>
-          <a:xfrm>
-            <a:off x="548640" y="5577840"/>
-            <a:ext cx="5486400" cy="822960"/>
-          </a:xfrm>
-          <a:prstGeom prst="rect">
-            <a:avLst/>
-          </a:prstGeom>
-          <a:noFill/>
-        </p:spPr>
-        <p:txBody>
-          <a:bodyPr wrap="square" lIns="45720" tIns="27432" rIns="45720" bIns="27432" anchor="t">
+          <a:bodyPr wrap="square" lIns="45720" tIns="27432" rIns="45720" bIns="27432" anchor="ctr">
             <a:spAutoFit/>
           </a:bodyPr>
           <a:lstStyle/>
@@ -9512,21 +7856,139 @@
                 </a:solidFill>
                 <a:latin typeface="Calibri"/>
               </a:rPr>
-              <a:t>Lucknow is the highest, at ₹2,860.80 crore out of a state total of about ₹55,463 crore.</a:t>
-            </a:r>
-          </a:p>
-        </p:txBody>
-      </p:sp>
-      <p:sp>
-        <p:nvSpPr>
-          <p:cNvPr id="15" name="TextBox 14"/>
+              <a:t>Chart code runs in an isolated space: no network, limited time and memory.</a:t>
+            </a:r>
+          </a:p>
+        </p:txBody>
+      </p:sp>
+      <p:sp>
+        <p:nvSpPr>
+          <p:cNvPr id="28" name="Rounded Rectangle 27"/>
+          <p:cNvSpPr/>
+          <p:nvPr/>
+        </p:nvSpPr>
+        <p:spPr>
+          <a:xfrm>
+            <a:off x="548640" y="5230368"/>
+            <a:ext cx="11064240" cy="868680"/>
+          </a:xfrm>
+          <a:prstGeom prst="roundRect">
+            <a:avLst>
+              <a:gd name="adj" fmla="val 8000"/>
+            </a:avLst>
+          </a:prstGeom>
+          <a:solidFill>
+            <a:srgbClr val="EAF0FB"/>
+          </a:solidFill>
+          <a:ln w="15875">
+            <a:solidFill>
+              <a:srgbClr val="D0DBF0"/>
+            </a:solidFill>
+          </a:ln>
+          <a:effectLst/>
+        </p:spPr>
+        <p:style>
+          <a:lnRef idx="1">
+            <a:schemeClr val="accent1"/>
+          </a:lnRef>
+          <a:fillRef idx="3">
+            <a:schemeClr val="accent1"/>
+          </a:fillRef>
+          <a:effectRef idx="2">
+            <a:schemeClr val="accent1"/>
+          </a:effectRef>
+          <a:fontRef idx="minor">
+            <a:schemeClr val="lt1"/>
+          </a:fontRef>
+        </p:style>
+        <p:txBody>
+          <a:bodyPr rtlCol="0" anchor="ctr"/>
+          <a:lstStyle/>
+          <a:p>
+            <a:pPr algn="ctr"/>
+            <a:endParaRPr/>
+          </a:p>
+        </p:txBody>
+      </p:sp>
+      <p:sp>
+        <p:nvSpPr>
+          <p:cNvPr id="29" name="Oval 28"/>
+          <p:cNvSpPr/>
+          <p:nvPr/>
+        </p:nvSpPr>
+        <p:spPr>
+          <a:xfrm>
+            <a:off x="731520" y="5321808"/>
+            <a:ext cx="685800" cy="685800"/>
+          </a:xfrm>
+          <a:prstGeom prst="ellipse">
+            <a:avLst/>
+          </a:prstGeom>
+          <a:solidFill>
+            <a:srgbClr val="3E5CA8"/>
+          </a:solidFill>
+          <a:ln>
+            <a:noFill/>
+          </a:ln>
+          <a:effectLst/>
+        </p:spPr>
+        <p:style>
+          <a:lnRef idx="1">
+            <a:schemeClr val="accent1"/>
+          </a:lnRef>
+          <a:fillRef idx="3">
+            <a:schemeClr val="accent1"/>
+          </a:fillRef>
+          <a:effectRef idx="2">
+            <a:schemeClr val="accent1"/>
+          </a:effectRef>
+          <a:fontRef idx="minor">
+            <a:schemeClr val="lt1"/>
+          </a:fontRef>
+        </p:style>
+        <p:txBody>
+          <a:bodyPr rtlCol="0" anchor="ctr"/>
+          <a:lstStyle/>
+          <a:p>
+            <a:pPr algn="ctr"/>
+            <a:endParaRPr/>
+          </a:p>
+        </p:txBody>
+      </p:sp>
+      <p:pic>
+        <p:nvPicPr>
+          <p:cNvPr id="30" name="Picture 29" descr="report-white.png"/>
+          <p:cNvPicPr>
+            <a:picLocks noChangeAspect="1"/>
+          </p:cNvPicPr>
+          <p:nvPr/>
+        </p:nvPicPr>
+        <p:blipFill>
+          <a:blip r:embed="rId8"/>
+          <a:stretch>
+            <a:fillRect/>
+          </a:stretch>
+        </p:blipFill>
+        <p:spPr>
+          <a:xfrm>
+            <a:off x="882396" y="5472684"/>
+            <a:ext cx="384048" cy="384048"/>
+          </a:xfrm>
+          <a:prstGeom prst="rect">
+            <a:avLst/>
+          </a:prstGeom>
+        </p:spPr>
+      </p:pic>
+      <p:sp>
+        <p:nvSpPr>
+          <p:cNvPr id="31" name="TextBox 30"/>
           <p:cNvSpPr txBox="1"/>
           <p:nvPr/>
         </p:nvSpPr>
         <p:spPr>
           <a:xfrm>
-            <a:off x="6172200" y="5577840"/>
-            <a:ext cx="5486400" cy="822960"/>
+            <a:off x="1600200" y="5276088"/>
+            <a:ext cx="3017520" cy="777240"/>
           </a:xfrm>
           <a:prstGeom prst="rect">
             <a:avLst/>
@@ -9534,7 +7996,42 @@
           <a:noFill/>
         </p:spPr>
         <p:txBody>
-          <a:bodyPr wrap="square" lIns="45720" tIns="27432" rIns="45720" bIns="27432" anchor="t">
+          <a:bodyPr wrap="square" lIns="45720" tIns="27432" rIns="45720" bIns="27432" anchor="ctr">
+            <a:spAutoFit/>
+          </a:bodyPr>
+          <a:lstStyle/>
+          <a:p>
+            <a:pPr algn="l"/>
+            <a:r>
+              <a:rPr sz="2100" b="1">
+                <a:solidFill>
+                  <a:srgbClr val="243B7A"/>
+                </a:solidFill>
+                <a:latin typeface="Calibri"/>
+              </a:rPr>
+              <a:t>Full record</a:t>
+            </a:r>
+          </a:p>
+        </p:txBody>
+      </p:sp>
+      <p:sp>
+        <p:nvSpPr>
+          <p:cNvPr id="32" name="TextBox 31"/>
+          <p:cNvSpPr txBox="1"/>
+          <p:nvPr/>
+        </p:nvSpPr>
+        <p:spPr>
+          <a:xfrm>
+            <a:off x="4572000" y="5276088"/>
+            <a:ext cx="6949440" cy="777240"/>
+          </a:xfrm>
+          <a:prstGeom prst="rect">
+            <a:avLst/>
+          </a:prstGeom>
+          <a:noFill/>
+        </p:spPr>
+        <p:txBody>
+          <a:bodyPr wrap="square" lIns="45720" tIns="27432" rIns="45720" bIns="27432" anchor="ctr">
             <a:spAutoFit/>
           </a:bodyPr>
           <a:lstStyle/>
@@ -9547,7 +8044,1526 @@
                 </a:solidFill>
                 <a:latin typeface="Calibri"/>
               </a:rPr>
-              <a:t>Beer revenue is ₹7,142.87 crore: ₹6,740.18 crore from composite shops and ₹402.69 crore from country liquor shops that also sell beer (CL5CC).</a:t>
+              <a:t>Every question, query and action is logged for audit.</a:t>
+            </a:r>
+          </a:p>
+        </p:txBody>
+      </p:sp>
+    </p:spTree>
+  </p:cSld>
+  <p:clrMapOvr>
+    <a:masterClrMapping/>
+  </p:clrMapOvr>
+</p:sld>
+</file>
+
+<file path=ppt/slides/slide7.xml><?xml version="1.0" encoding="utf-8"?>
+<p:sld xmlns:a="http://schemas.openxmlformats.org/drawingml/2006/main" xmlns:r="http://schemas.openxmlformats.org/officeDocument/2006/relationships" xmlns:p="http://schemas.openxmlformats.org/presentationml/2006/main">
+  <p:cSld>
+    <p:spTree>
+      <p:nvGrpSpPr>
+        <p:cNvPr id="1" name=""/>
+        <p:cNvGrpSpPr/>
+        <p:nvPr/>
+      </p:nvGrpSpPr>
+      <p:grpSpPr>
+        <a:xfrm>
+          <a:off x="0" y="0"/>
+          <a:ext cx="0" cy="0"/>
+          <a:chOff x="0" y="0"/>
+          <a:chExt cx="0" cy="0"/>
+        </a:xfrm>
+      </p:grpSpPr>
+      <p:sp>
+        <p:nvSpPr>
+          <p:cNvPr id="2" name="Rectangle 1"/>
+          <p:cNvSpPr/>
+          <p:nvPr/>
+        </p:nvSpPr>
+        <p:spPr>
+          <a:xfrm>
+            <a:off x="0" y="0"/>
+            <a:ext cx="12191695" cy="914400"/>
+          </a:xfrm>
+          <a:prstGeom prst="rect">
+            <a:avLst/>
+          </a:prstGeom>
+          <a:solidFill>
+            <a:srgbClr val="EAF0FB"/>
+          </a:solidFill>
+          <a:ln>
+            <a:noFill/>
+          </a:ln>
+        </p:spPr>
+        <p:style>
+          <a:lnRef idx="1">
+            <a:schemeClr val="accent1"/>
+          </a:lnRef>
+          <a:fillRef idx="3">
+            <a:schemeClr val="accent1"/>
+          </a:fillRef>
+          <a:effectRef idx="2">
+            <a:schemeClr val="accent1"/>
+          </a:effectRef>
+          <a:fontRef idx="minor">
+            <a:schemeClr val="lt1"/>
+          </a:fontRef>
+        </p:style>
+        <p:txBody>
+          <a:bodyPr rtlCol="0" anchor="ctr"/>
+          <a:lstStyle/>
+          <a:p>
+            <a:pPr algn="ctr"/>
+            <a:endParaRPr/>
+          </a:p>
+        </p:txBody>
+      </p:sp>
+      <p:sp>
+        <p:nvSpPr>
+          <p:cNvPr id="3" name="Rectangle 2"/>
+          <p:cNvSpPr/>
+          <p:nvPr/>
+        </p:nvSpPr>
+        <p:spPr>
+          <a:xfrm>
+            <a:off x="0" y="914400"/>
+            <a:ext cx="12191695" cy="64008"/>
+          </a:xfrm>
+          <a:prstGeom prst="rect">
+            <a:avLst/>
+          </a:prstGeom>
+          <a:solidFill>
+            <a:srgbClr val="E0B12A"/>
+          </a:solidFill>
+          <a:ln>
+            <a:noFill/>
+          </a:ln>
+        </p:spPr>
+        <p:style>
+          <a:lnRef idx="1">
+            <a:schemeClr val="accent1"/>
+          </a:lnRef>
+          <a:fillRef idx="3">
+            <a:schemeClr val="accent1"/>
+          </a:fillRef>
+          <a:effectRef idx="2">
+            <a:schemeClr val="accent1"/>
+          </a:effectRef>
+          <a:fontRef idx="minor">
+            <a:schemeClr val="lt1"/>
+          </a:fontRef>
+        </p:style>
+        <p:txBody>
+          <a:bodyPr rtlCol="0" anchor="ctr"/>
+          <a:lstStyle/>
+          <a:p>
+            <a:pPr algn="ctr"/>
+            <a:endParaRPr/>
+          </a:p>
+        </p:txBody>
+      </p:sp>
+      <p:sp>
+        <p:nvSpPr>
+          <p:cNvPr id="4" name="Title"/>
+          <p:cNvSpPr/>
+          <p:nvPr>
+            <p:ph type="title"/>
+          </p:nvPr>
+        </p:nvSpPr>
+        <p:spPr>
+          <a:xfrm>
+            <a:off x="548640" y="109728"/>
+            <a:ext cx="10424160" cy="694944"/>
+          </a:xfrm>
+          <a:prstGeom prst="rect">
+            <a:avLst/>
+          </a:prstGeom>
+          <a:noFill/>
+        </p:spPr>
+        <p:txBody>
+          <a:bodyPr wrap="square" lIns="45720" tIns="27432" rIns="45720" bIns="27432" anchor="ctr">
+            <a:spAutoFit/>
+          </a:bodyPr>
+          <a:lstStyle/>
+          <a:p>
+            <a:pPr algn="l"/>
+            <a:r>
+              <a:rPr sz="3000" b="1">
+                <a:solidFill>
+                  <a:srgbClr val="243B7A"/>
+                </a:solidFill>
+                <a:latin typeface="Calibri"/>
+              </a:rPr>
+              <a:t>What comes next</a:t>
+            </a:r>
+          </a:p>
+        </p:txBody>
+      </p:sp>
+      <p:pic>
+        <p:nvPicPr>
+          <p:cNvPr id="5" name="Picture 4" descr="emblem-dark.png"/>
+          <p:cNvPicPr>
+            <a:picLocks noChangeAspect="1"/>
+          </p:cNvPicPr>
+          <p:nvPr/>
+        </p:nvPicPr>
+        <p:blipFill>
+          <a:blip r:embed="rId3"/>
+          <a:stretch>
+            <a:fillRect/>
+          </a:stretch>
+        </p:blipFill>
+        <p:spPr>
+          <a:xfrm>
+            <a:off x="11247120" y="91440"/>
+            <a:ext cx="731520" cy="731520"/>
+          </a:xfrm>
+          <a:prstGeom prst="rect">
+            <a:avLst/>
+          </a:prstGeom>
+        </p:spPr>
+      </p:pic>
+      <p:sp>
+        <p:nvSpPr>
+          <p:cNvPr id="6" name="TextBox 5"/>
+          <p:cNvSpPr txBox="1"/>
+          <p:nvPr/>
+        </p:nvSpPr>
+        <p:spPr>
+          <a:xfrm>
+            <a:off x="548640" y="6455664"/>
+            <a:ext cx="8229600" cy="274320"/>
+          </a:xfrm>
+          <a:prstGeom prst="rect">
+            <a:avLst/>
+          </a:prstGeom>
+          <a:noFill/>
+        </p:spPr>
+        <p:txBody>
+          <a:bodyPr wrap="square" lIns="45720" tIns="27432" rIns="45720" bIns="27432" anchor="t">
+            <a:spAutoFit/>
+          </a:bodyPr>
+          <a:lstStyle/>
+          <a:p>
+            <a:pPr algn="l"/>
+            <a:r>
+              <a:rPr sz="1000" b="0">
+                <a:solidFill>
+                  <a:srgbClr val="4B5563"/>
+                </a:solidFill>
+                <a:latin typeface="Calibri"/>
+              </a:rPr>
+              <a:t>Government of Uttar Pradesh  |  Department of Excise  |  Ask the Data: proof of concept</a:t>
+            </a:r>
+          </a:p>
+        </p:txBody>
+      </p:sp>
+      <p:sp>
+        <p:nvSpPr>
+          <p:cNvPr id="7" name="TextBox 6"/>
+          <p:cNvSpPr txBox="1"/>
+          <p:nvPr/>
+        </p:nvSpPr>
+        <p:spPr>
+          <a:xfrm>
+            <a:off x="10972800" y="6455664"/>
+            <a:ext cx="731520" cy="274320"/>
+          </a:xfrm>
+          <a:prstGeom prst="rect">
+            <a:avLst/>
+          </a:prstGeom>
+          <a:noFill/>
+        </p:spPr>
+        <p:txBody>
+          <a:bodyPr wrap="square" lIns="45720" tIns="27432" rIns="45720" bIns="27432" anchor="t">
+            <a:spAutoFit/>
+          </a:bodyPr>
+          <a:lstStyle/>
+          <a:p>
+            <a:pPr algn="r"/>
+            <a:r>
+              <a:rPr sz="1000" b="0">
+                <a:solidFill>
+                  <a:srgbClr val="4B5563"/>
+                </a:solidFill>
+                <a:latin typeface="Calibri"/>
+              </a:rPr>
+              <a:t>7</a:t>
+            </a:r>
+          </a:p>
+        </p:txBody>
+      </p:sp>
+      <p:sp>
+        <p:nvSpPr>
+          <p:cNvPr id="8" name="Rounded Rectangle 7"/>
+          <p:cNvSpPr/>
+          <p:nvPr/>
+        </p:nvSpPr>
+        <p:spPr>
+          <a:xfrm>
+            <a:off x="548640" y="1371600"/>
+            <a:ext cx="5440680" cy="2148840"/>
+          </a:xfrm>
+          <a:prstGeom prst="roundRect">
+            <a:avLst>
+              <a:gd name="adj" fmla="val 8000"/>
+            </a:avLst>
+          </a:prstGeom>
+          <a:solidFill>
+            <a:srgbClr val="EAF0FB"/>
+          </a:solidFill>
+          <a:ln w="15875">
+            <a:solidFill>
+              <a:srgbClr val="D0DBF0"/>
+            </a:solidFill>
+          </a:ln>
+          <a:effectLst/>
+        </p:spPr>
+        <p:style>
+          <a:lnRef idx="1">
+            <a:schemeClr val="accent1"/>
+          </a:lnRef>
+          <a:fillRef idx="3">
+            <a:schemeClr val="accent1"/>
+          </a:fillRef>
+          <a:effectRef idx="2">
+            <a:schemeClr val="accent1"/>
+          </a:effectRef>
+          <a:fontRef idx="minor">
+            <a:schemeClr val="lt1"/>
+          </a:fontRef>
+        </p:style>
+        <p:txBody>
+          <a:bodyPr rtlCol="0" anchor="ctr"/>
+          <a:lstStyle/>
+          <a:p>
+            <a:pPr algn="ctr"/>
+            <a:endParaRPr/>
+          </a:p>
+        </p:txBody>
+      </p:sp>
+      <p:sp>
+        <p:nvSpPr>
+          <p:cNvPr id="9" name="Oval 8"/>
+          <p:cNvSpPr/>
+          <p:nvPr/>
+        </p:nvSpPr>
+        <p:spPr>
+          <a:xfrm>
+            <a:off x="822959" y="1645920"/>
+            <a:ext cx="731520" cy="731520"/>
+          </a:xfrm>
+          <a:prstGeom prst="ellipse">
+            <a:avLst/>
+          </a:prstGeom>
+          <a:solidFill>
+            <a:srgbClr val="3E5CA8"/>
+          </a:solidFill>
+          <a:ln>
+            <a:noFill/>
+          </a:ln>
+          <a:effectLst/>
+        </p:spPr>
+        <p:style>
+          <a:lnRef idx="1">
+            <a:schemeClr val="accent1"/>
+          </a:lnRef>
+          <a:fillRef idx="3">
+            <a:schemeClr val="accent1"/>
+          </a:fillRef>
+          <a:effectRef idx="2">
+            <a:schemeClr val="accent1"/>
+          </a:effectRef>
+          <a:fontRef idx="minor">
+            <a:schemeClr val="lt1"/>
+          </a:fontRef>
+        </p:style>
+        <p:txBody>
+          <a:bodyPr rtlCol="0" anchor="ctr"/>
+          <a:lstStyle/>
+          <a:p>
+            <a:pPr algn="ctr"/>
+            <a:endParaRPr/>
+          </a:p>
+        </p:txBody>
+      </p:sp>
+      <p:pic>
+        <p:nvPicPr>
+          <p:cNvPr id="10" name="Picture 9" descr="server-white.png"/>
+          <p:cNvPicPr>
+            <a:picLocks noChangeAspect="1"/>
+          </p:cNvPicPr>
+          <p:nvPr/>
+        </p:nvPicPr>
+        <p:blipFill>
+          <a:blip r:embed="rId4"/>
+          <a:stretch>
+            <a:fillRect/>
+          </a:stretch>
+        </p:blipFill>
+        <p:spPr>
+          <a:xfrm>
+            <a:off x="983894" y="1806854"/>
+            <a:ext cx="409651" cy="409651"/>
+          </a:xfrm>
+          <a:prstGeom prst="rect">
+            <a:avLst/>
+          </a:prstGeom>
+        </p:spPr>
+      </p:pic>
+      <p:sp>
+        <p:nvSpPr>
+          <p:cNvPr id="11" name="TextBox 10"/>
+          <p:cNvSpPr txBox="1"/>
+          <p:nvPr/>
+        </p:nvSpPr>
+        <p:spPr>
+          <a:xfrm>
+            <a:off x="1783080" y="1645920"/>
+            <a:ext cx="4023360" cy="548640"/>
+          </a:xfrm>
+          <a:prstGeom prst="rect">
+            <a:avLst/>
+          </a:prstGeom>
+          <a:noFill/>
+        </p:spPr>
+        <p:txBody>
+          <a:bodyPr wrap="square" lIns="45720" tIns="27432" rIns="45720" bIns="27432" anchor="ctr">
+            <a:spAutoFit/>
+          </a:bodyPr>
+          <a:lstStyle/>
+          <a:p>
+            <a:pPr algn="l"/>
+            <a:r>
+              <a:rPr sz="2200" b="1">
+                <a:solidFill>
+                  <a:srgbClr val="243B7A"/>
+                </a:solidFill>
+                <a:latin typeface="Calibri"/>
+              </a:rPr>
+              <a:t>High-performance compute</a:t>
+            </a:r>
+          </a:p>
+        </p:txBody>
+      </p:sp>
+      <p:sp>
+        <p:nvSpPr>
+          <p:cNvPr id="12" name="TextBox 11"/>
+          <p:cNvSpPr txBox="1"/>
+          <p:nvPr/>
+        </p:nvSpPr>
+        <p:spPr>
+          <a:xfrm>
+            <a:off x="822959" y="2468880"/>
+            <a:ext cx="4937760" cy="1005840"/>
+          </a:xfrm>
+          <a:prstGeom prst="rect">
+            <a:avLst/>
+          </a:prstGeom>
+          <a:noFill/>
+        </p:spPr>
+        <p:txBody>
+          <a:bodyPr wrap="square" lIns="45720" tIns="27432" rIns="45720" bIns="27432" anchor="t">
+            <a:spAutoFit/>
+          </a:bodyPr>
+          <a:lstStyle/>
+          <a:p>
+            <a:pPr algn="l"/>
+            <a:r>
+              <a:rPr sz="1600" b="0">
+                <a:solidFill>
+                  <a:srgbClr val="1F2937"/>
+                </a:solidFill>
+                <a:latin typeface="Calibri"/>
+              </a:rPr>
+              <a:t>A high-performance computing (HPC) node with high-end GPU servers runs larger, more capable models and shortens response times.</a:t>
+            </a:r>
+          </a:p>
+        </p:txBody>
+      </p:sp>
+      <p:sp>
+        <p:nvSpPr>
+          <p:cNvPr id="13" name="Rounded Rectangle 12"/>
+          <p:cNvSpPr/>
+          <p:nvPr/>
+        </p:nvSpPr>
+        <p:spPr>
+          <a:xfrm>
+            <a:off x="6172200" y="1371600"/>
+            <a:ext cx="5440680" cy="2148840"/>
+          </a:xfrm>
+          <a:prstGeom prst="roundRect">
+            <a:avLst>
+              <a:gd name="adj" fmla="val 8000"/>
+            </a:avLst>
+          </a:prstGeom>
+          <a:solidFill>
+            <a:srgbClr val="EAF0FB"/>
+          </a:solidFill>
+          <a:ln w="15875">
+            <a:solidFill>
+              <a:srgbClr val="D0DBF0"/>
+            </a:solidFill>
+          </a:ln>
+          <a:effectLst/>
+        </p:spPr>
+        <p:style>
+          <a:lnRef idx="1">
+            <a:schemeClr val="accent1"/>
+          </a:lnRef>
+          <a:fillRef idx="3">
+            <a:schemeClr val="accent1"/>
+          </a:fillRef>
+          <a:effectRef idx="2">
+            <a:schemeClr val="accent1"/>
+          </a:effectRef>
+          <a:fontRef idx="minor">
+            <a:schemeClr val="lt1"/>
+          </a:fontRef>
+        </p:style>
+        <p:txBody>
+          <a:bodyPr rtlCol="0" anchor="ctr"/>
+          <a:lstStyle/>
+          <a:p>
+            <a:pPr algn="ctr"/>
+            <a:endParaRPr/>
+          </a:p>
+        </p:txBody>
+      </p:sp>
+      <p:sp>
+        <p:nvSpPr>
+          <p:cNvPr id="14" name="Oval 13"/>
+          <p:cNvSpPr/>
+          <p:nvPr/>
+        </p:nvSpPr>
+        <p:spPr>
+          <a:xfrm>
+            <a:off x="6446520" y="1645920"/>
+            <a:ext cx="731520" cy="731520"/>
+          </a:xfrm>
+          <a:prstGeom prst="ellipse">
+            <a:avLst/>
+          </a:prstGeom>
+          <a:solidFill>
+            <a:srgbClr val="3E5CA8"/>
+          </a:solidFill>
+          <a:ln>
+            <a:noFill/>
+          </a:ln>
+          <a:effectLst/>
+        </p:spPr>
+        <p:style>
+          <a:lnRef idx="1">
+            <a:schemeClr val="accent1"/>
+          </a:lnRef>
+          <a:fillRef idx="3">
+            <a:schemeClr val="accent1"/>
+          </a:fillRef>
+          <a:effectRef idx="2">
+            <a:schemeClr val="accent1"/>
+          </a:effectRef>
+          <a:fontRef idx="minor">
+            <a:schemeClr val="lt1"/>
+          </a:fontRef>
+        </p:style>
+        <p:txBody>
+          <a:bodyPr rtlCol="0" anchor="ctr"/>
+          <a:lstStyle/>
+          <a:p>
+            <a:pPr algn="ctr"/>
+            <a:endParaRPr/>
+          </a:p>
+        </p:txBody>
+      </p:sp>
+      <p:pic>
+        <p:nvPicPr>
+          <p:cNvPr id="15" name="Picture 14" descr="database-white.png"/>
+          <p:cNvPicPr>
+            <a:picLocks noChangeAspect="1"/>
+          </p:cNvPicPr>
+          <p:nvPr/>
+        </p:nvPicPr>
+        <p:blipFill>
+          <a:blip r:embed="rId5"/>
+          <a:stretch>
+            <a:fillRect/>
+          </a:stretch>
+        </p:blipFill>
+        <p:spPr>
+          <a:xfrm>
+            <a:off x="6607454" y="1806854"/>
+            <a:ext cx="409651" cy="409651"/>
+          </a:xfrm>
+          <a:prstGeom prst="rect">
+            <a:avLst/>
+          </a:prstGeom>
+        </p:spPr>
+      </p:pic>
+      <p:sp>
+        <p:nvSpPr>
+          <p:cNvPr id="16" name="TextBox 15"/>
+          <p:cNvSpPr txBox="1"/>
+          <p:nvPr/>
+        </p:nvSpPr>
+        <p:spPr>
+          <a:xfrm>
+            <a:off x="7406640" y="1645920"/>
+            <a:ext cx="4023360" cy="548640"/>
+          </a:xfrm>
+          <a:prstGeom prst="rect">
+            <a:avLst/>
+          </a:prstGeom>
+          <a:noFill/>
+        </p:spPr>
+        <p:txBody>
+          <a:bodyPr wrap="square" lIns="45720" tIns="27432" rIns="45720" bIns="27432" anchor="ctr">
+            <a:spAutoFit/>
+          </a:bodyPr>
+          <a:lstStyle/>
+          <a:p>
+            <a:pPr algn="l"/>
+            <a:r>
+              <a:rPr sz="2200" b="1">
+                <a:solidFill>
+                  <a:srgbClr val="243B7A"/>
+                </a:solidFill>
+                <a:latin typeface="Calibri"/>
+              </a:rPr>
+              <a:t>More data</a:t>
+            </a:r>
+          </a:p>
+        </p:txBody>
+      </p:sp>
+      <p:sp>
+        <p:nvSpPr>
+          <p:cNvPr id="17" name="TextBox 16"/>
+          <p:cNvSpPr txBox="1"/>
+          <p:nvPr/>
+        </p:nvSpPr>
+        <p:spPr>
+          <a:xfrm>
+            <a:off x="6446520" y="2468880"/>
+            <a:ext cx="4937760" cy="1005840"/>
+          </a:xfrm>
+          <a:prstGeom prst="rect">
+            <a:avLst/>
+          </a:prstGeom>
+          <a:noFill/>
+        </p:spPr>
+        <p:txBody>
+          <a:bodyPr wrap="square" lIns="45720" tIns="27432" rIns="45720" bIns="27432" anchor="t">
+            <a:spAutoFit/>
+          </a:bodyPr>
+          <a:lstStyle/>
+          <a:p>
+            <a:pPr algn="l"/>
+            <a:r>
+              <a:rPr sz="1600" b="0">
+                <a:solidFill>
+                  <a:srgbClr val="1F2937"/>
+                </a:solidFill>
+                <a:latin typeface="Calibri"/>
+              </a:rPr>
+              <a:t>Monthly feeds for every district, and the missing sources such as Bhang shops.</a:t>
+            </a:r>
+          </a:p>
+        </p:txBody>
+      </p:sp>
+      <p:sp>
+        <p:nvSpPr>
+          <p:cNvPr id="18" name="Rounded Rectangle 17"/>
+          <p:cNvSpPr/>
+          <p:nvPr/>
+        </p:nvSpPr>
+        <p:spPr>
+          <a:xfrm>
+            <a:off x="548640" y="3749039"/>
+            <a:ext cx="5440680" cy="2148840"/>
+          </a:xfrm>
+          <a:prstGeom prst="roundRect">
+            <a:avLst>
+              <a:gd name="adj" fmla="val 8000"/>
+            </a:avLst>
+          </a:prstGeom>
+          <a:solidFill>
+            <a:srgbClr val="EAF0FB"/>
+          </a:solidFill>
+          <a:ln w="15875">
+            <a:solidFill>
+              <a:srgbClr val="D0DBF0"/>
+            </a:solidFill>
+          </a:ln>
+          <a:effectLst/>
+        </p:spPr>
+        <p:style>
+          <a:lnRef idx="1">
+            <a:schemeClr val="accent1"/>
+          </a:lnRef>
+          <a:fillRef idx="3">
+            <a:schemeClr val="accent1"/>
+          </a:fillRef>
+          <a:effectRef idx="2">
+            <a:schemeClr val="accent1"/>
+          </a:effectRef>
+          <a:fontRef idx="minor">
+            <a:schemeClr val="lt1"/>
+          </a:fontRef>
+        </p:style>
+        <p:txBody>
+          <a:bodyPr rtlCol="0" anchor="ctr"/>
+          <a:lstStyle/>
+          <a:p>
+            <a:pPr algn="ctr"/>
+            <a:endParaRPr/>
+          </a:p>
+        </p:txBody>
+      </p:sp>
+      <p:sp>
+        <p:nvSpPr>
+          <p:cNvPr id="19" name="Oval 18"/>
+          <p:cNvSpPr/>
+          <p:nvPr/>
+        </p:nvSpPr>
+        <p:spPr>
+          <a:xfrm>
+            <a:off x="822959" y="4023359"/>
+            <a:ext cx="731520" cy="731520"/>
+          </a:xfrm>
+          <a:prstGeom prst="ellipse">
+            <a:avLst/>
+          </a:prstGeom>
+          <a:solidFill>
+            <a:srgbClr val="3E5CA8"/>
+          </a:solidFill>
+          <a:ln>
+            <a:noFill/>
+          </a:ln>
+          <a:effectLst/>
+        </p:spPr>
+        <p:style>
+          <a:lnRef idx="1">
+            <a:schemeClr val="accent1"/>
+          </a:lnRef>
+          <a:fillRef idx="3">
+            <a:schemeClr val="accent1"/>
+          </a:fillRef>
+          <a:effectRef idx="2">
+            <a:schemeClr val="accent1"/>
+          </a:effectRef>
+          <a:fontRef idx="minor">
+            <a:schemeClr val="lt1"/>
+          </a:fontRef>
+        </p:style>
+        <p:txBody>
+          <a:bodyPr rtlCol="0" anchor="ctr"/>
+          <a:lstStyle/>
+          <a:p>
+            <a:pPr algn="ctr"/>
+            <a:endParaRPr/>
+          </a:p>
+        </p:txBody>
+      </p:sp>
+      <p:pic>
+        <p:nvPicPr>
+          <p:cNvPr id="20" name="Picture 19" descr="doc-white.png"/>
+          <p:cNvPicPr>
+            <a:picLocks noChangeAspect="1"/>
+          </p:cNvPicPr>
+          <p:nvPr/>
+        </p:nvPicPr>
+        <p:blipFill>
+          <a:blip r:embed="rId6"/>
+          <a:stretch>
+            <a:fillRect/>
+          </a:stretch>
+        </p:blipFill>
+        <p:spPr>
+          <a:xfrm>
+            <a:off x="983894" y="4184294"/>
+            <a:ext cx="409651" cy="409651"/>
+          </a:xfrm>
+          <a:prstGeom prst="rect">
+            <a:avLst/>
+          </a:prstGeom>
+        </p:spPr>
+      </p:pic>
+      <p:sp>
+        <p:nvSpPr>
+          <p:cNvPr id="21" name="TextBox 20"/>
+          <p:cNvSpPr txBox="1"/>
+          <p:nvPr/>
+        </p:nvSpPr>
+        <p:spPr>
+          <a:xfrm>
+            <a:off x="1783080" y="4023359"/>
+            <a:ext cx="4023360" cy="548640"/>
+          </a:xfrm>
+          <a:prstGeom prst="rect">
+            <a:avLst/>
+          </a:prstGeom>
+          <a:noFill/>
+        </p:spPr>
+        <p:txBody>
+          <a:bodyPr wrap="square" lIns="45720" tIns="27432" rIns="45720" bIns="27432" anchor="ctr">
+            <a:spAutoFit/>
+          </a:bodyPr>
+          <a:lstStyle/>
+          <a:p>
+            <a:pPr algn="l"/>
+            <a:r>
+              <a:rPr sz="2200" b="1">
+                <a:solidFill>
+                  <a:srgbClr val="243B7A"/>
+                </a:solidFill>
+                <a:latin typeface="Calibri"/>
+              </a:rPr>
+              <a:t>Saved analyses and reports</a:t>
+            </a:r>
+          </a:p>
+        </p:txBody>
+      </p:sp>
+      <p:sp>
+        <p:nvSpPr>
+          <p:cNvPr id="22" name="TextBox 21"/>
+          <p:cNvSpPr txBox="1"/>
+          <p:nvPr/>
+        </p:nvSpPr>
+        <p:spPr>
+          <a:xfrm>
+            <a:off x="822959" y="4846320"/>
+            <a:ext cx="4937760" cy="1005840"/>
+          </a:xfrm>
+          <a:prstGeom prst="rect">
+            <a:avLst/>
+          </a:prstGeom>
+          <a:noFill/>
+        </p:spPr>
+        <p:txBody>
+          <a:bodyPr wrap="square" lIns="45720" tIns="27432" rIns="45720" bIns="27432" anchor="t">
+            <a:spAutoFit/>
+          </a:bodyPr>
+          <a:lstStyle/>
+          <a:p>
+            <a:pPr algn="l"/>
+            <a:r>
+              <a:rPr sz="1600" b="0">
+                <a:solidFill>
+                  <a:srgbClr val="1F2937"/>
+                </a:solidFill>
+                <a:latin typeface="Calibri"/>
+              </a:rPr>
+              <a:t>Re-run a favourite question each month and export a report with the data date on it.</a:t>
+            </a:r>
+          </a:p>
+        </p:txBody>
+      </p:sp>
+      <p:sp>
+        <p:nvSpPr>
+          <p:cNvPr id="23" name="Rounded Rectangle 22"/>
+          <p:cNvSpPr/>
+          <p:nvPr/>
+        </p:nvSpPr>
+        <p:spPr>
+          <a:xfrm>
+            <a:off x="6172200" y="3749039"/>
+            <a:ext cx="5440680" cy="2148840"/>
+          </a:xfrm>
+          <a:prstGeom prst="roundRect">
+            <a:avLst>
+              <a:gd name="adj" fmla="val 8000"/>
+            </a:avLst>
+          </a:prstGeom>
+          <a:solidFill>
+            <a:srgbClr val="EAF0FB"/>
+          </a:solidFill>
+          <a:ln w="15875">
+            <a:solidFill>
+              <a:srgbClr val="D0DBF0"/>
+            </a:solidFill>
+          </a:ln>
+          <a:effectLst/>
+        </p:spPr>
+        <p:style>
+          <a:lnRef idx="1">
+            <a:schemeClr val="accent1"/>
+          </a:lnRef>
+          <a:fillRef idx="3">
+            <a:schemeClr val="accent1"/>
+          </a:fillRef>
+          <a:effectRef idx="2">
+            <a:schemeClr val="accent1"/>
+          </a:effectRef>
+          <a:fontRef idx="minor">
+            <a:schemeClr val="lt1"/>
+          </a:fontRef>
+        </p:style>
+        <p:txBody>
+          <a:bodyPr rtlCol="0" anchor="ctr"/>
+          <a:lstStyle/>
+          <a:p>
+            <a:pPr algn="ctr"/>
+            <a:endParaRPr/>
+          </a:p>
+        </p:txBody>
+      </p:sp>
+      <p:sp>
+        <p:nvSpPr>
+          <p:cNvPr id="24" name="Oval 23"/>
+          <p:cNvSpPr/>
+          <p:nvPr/>
+        </p:nvSpPr>
+        <p:spPr>
+          <a:xfrm>
+            <a:off x="6446520" y="4023359"/>
+            <a:ext cx="731520" cy="731520"/>
+          </a:xfrm>
+          <a:prstGeom prst="ellipse">
+            <a:avLst/>
+          </a:prstGeom>
+          <a:solidFill>
+            <a:srgbClr val="3E5CA8"/>
+          </a:solidFill>
+          <a:ln>
+            <a:noFill/>
+          </a:ln>
+          <a:effectLst/>
+        </p:spPr>
+        <p:style>
+          <a:lnRef idx="1">
+            <a:schemeClr val="accent1"/>
+          </a:lnRef>
+          <a:fillRef idx="3">
+            <a:schemeClr val="accent1"/>
+          </a:fillRef>
+          <a:effectRef idx="2">
+            <a:schemeClr val="accent1"/>
+          </a:effectRef>
+          <a:fontRef idx="minor">
+            <a:schemeClr val="lt1"/>
+          </a:fontRef>
+        </p:style>
+        <p:txBody>
+          <a:bodyPr rtlCol="0" anchor="ctr"/>
+          <a:lstStyle/>
+          <a:p>
+            <a:pPr algn="ctr"/>
+            <a:endParaRPr/>
+          </a:p>
+        </p:txBody>
+      </p:sp>
+      <p:pic>
+        <p:nvPicPr>
+          <p:cNvPr id="25" name="Picture 24" descr="users-white.png"/>
+          <p:cNvPicPr>
+            <a:picLocks noChangeAspect="1"/>
+          </p:cNvPicPr>
+          <p:nvPr/>
+        </p:nvPicPr>
+        <p:blipFill>
+          <a:blip r:embed="rId7"/>
+          <a:stretch>
+            <a:fillRect/>
+          </a:stretch>
+        </p:blipFill>
+        <p:spPr>
+          <a:xfrm>
+            <a:off x="6607454" y="4184294"/>
+            <a:ext cx="409651" cy="409651"/>
+          </a:xfrm>
+          <a:prstGeom prst="rect">
+            <a:avLst/>
+          </a:prstGeom>
+        </p:spPr>
+      </p:pic>
+      <p:sp>
+        <p:nvSpPr>
+          <p:cNvPr id="26" name="TextBox 25"/>
+          <p:cNvSpPr txBox="1"/>
+          <p:nvPr/>
+        </p:nvSpPr>
+        <p:spPr>
+          <a:xfrm>
+            <a:off x="7406640" y="4023359"/>
+            <a:ext cx="4023360" cy="548640"/>
+          </a:xfrm>
+          <a:prstGeom prst="rect">
+            <a:avLst/>
+          </a:prstGeom>
+          <a:noFill/>
+        </p:spPr>
+        <p:txBody>
+          <a:bodyPr wrap="square" lIns="45720" tIns="27432" rIns="45720" bIns="27432" anchor="ctr">
+            <a:spAutoFit/>
+          </a:bodyPr>
+          <a:lstStyle/>
+          <a:p>
+            <a:pPr algn="l"/>
+            <a:r>
+              <a:rPr sz="2200" b="1">
+                <a:solidFill>
+                  <a:srgbClr val="243B7A"/>
+                </a:solidFill>
+                <a:latin typeface="Calibri"/>
+              </a:rPr>
+              <a:t>Wider access</a:t>
+            </a:r>
+          </a:p>
+        </p:txBody>
+      </p:sp>
+      <p:sp>
+        <p:nvSpPr>
+          <p:cNvPr id="27" name="TextBox 26"/>
+          <p:cNvSpPr txBox="1"/>
+          <p:nvPr/>
+        </p:nvSpPr>
+        <p:spPr>
+          <a:xfrm>
+            <a:off x="6446520" y="4846320"/>
+            <a:ext cx="4937760" cy="1005840"/>
+          </a:xfrm>
+          <a:prstGeom prst="rect">
+            <a:avLst/>
+          </a:prstGeom>
+          <a:noFill/>
+        </p:spPr>
+        <p:txBody>
+          <a:bodyPr wrap="square" lIns="45720" tIns="27432" rIns="45720" bIns="27432" anchor="t">
+            <a:spAutoFit/>
+          </a:bodyPr>
+          <a:lstStyle/>
+          <a:p>
+            <a:pPr algn="l"/>
+            <a:r>
+              <a:rPr sz="1600" b="0">
+                <a:solidFill>
+                  <a:srgbClr val="1F2937"/>
+                </a:solidFill>
+                <a:latin typeface="Calibri"/>
+              </a:rPr>
+              <a:t>Roles for district and division officers, with their own question history.</a:t>
+            </a:r>
+          </a:p>
+        </p:txBody>
+      </p:sp>
+    </p:spTree>
+  </p:cSld>
+  <p:clrMapOvr>
+    <a:masterClrMapping/>
+  </p:clrMapOvr>
+</p:sld>
+</file>
+
+<file path=ppt/slides/slide8.xml><?xml version="1.0" encoding="utf-8"?>
+<p:sld xmlns:a="http://schemas.openxmlformats.org/drawingml/2006/main" xmlns:r="http://schemas.openxmlformats.org/officeDocument/2006/relationships" xmlns:p="http://schemas.openxmlformats.org/presentationml/2006/main">
+  <p:cSld>
+    <p:spTree>
+      <p:nvGrpSpPr>
+        <p:cNvPr id="1" name=""/>
+        <p:cNvGrpSpPr/>
+        <p:nvPr/>
+      </p:nvGrpSpPr>
+      <p:grpSpPr>
+        <a:xfrm>
+          <a:off x="0" y="0"/>
+          <a:ext cx="0" cy="0"/>
+          <a:chOff x="0" y="0"/>
+          <a:chExt cx="0" cy="0"/>
+        </a:xfrm>
+      </p:grpSpPr>
+      <p:sp>
+        <p:nvSpPr>
+          <p:cNvPr id="2" name="Rectangle 1"/>
+          <p:cNvSpPr/>
+          <p:nvPr/>
+        </p:nvSpPr>
+        <p:spPr>
+          <a:xfrm>
+            <a:off x="0" y="0"/>
+            <a:ext cx="12191695" cy="914400"/>
+          </a:xfrm>
+          <a:prstGeom prst="rect">
+            <a:avLst/>
+          </a:prstGeom>
+          <a:solidFill>
+            <a:srgbClr val="EAF0FB"/>
+          </a:solidFill>
+          <a:ln>
+            <a:noFill/>
+          </a:ln>
+        </p:spPr>
+        <p:style>
+          <a:lnRef idx="1">
+            <a:schemeClr val="accent1"/>
+          </a:lnRef>
+          <a:fillRef idx="3">
+            <a:schemeClr val="accent1"/>
+          </a:fillRef>
+          <a:effectRef idx="2">
+            <a:schemeClr val="accent1"/>
+          </a:effectRef>
+          <a:fontRef idx="minor">
+            <a:schemeClr val="lt1"/>
+          </a:fontRef>
+        </p:style>
+        <p:txBody>
+          <a:bodyPr rtlCol="0" anchor="ctr"/>
+          <a:lstStyle/>
+          <a:p>
+            <a:pPr algn="ctr"/>
+            <a:endParaRPr/>
+          </a:p>
+        </p:txBody>
+      </p:sp>
+      <p:sp>
+        <p:nvSpPr>
+          <p:cNvPr id="3" name="Rectangle 2"/>
+          <p:cNvSpPr/>
+          <p:nvPr/>
+        </p:nvSpPr>
+        <p:spPr>
+          <a:xfrm>
+            <a:off x="0" y="914400"/>
+            <a:ext cx="12191695" cy="64008"/>
+          </a:xfrm>
+          <a:prstGeom prst="rect">
+            <a:avLst/>
+          </a:prstGeom>
+          <a:solidFill>
+            <a:srgbClr val="E0B12A"/>
+          </a:solidFill>
+          <a:ln>
+            <a:noFill/>
+          </a:ln>
+        </p:spPr>
+        <p:style>
+          <a:lnRef idx="1">
+            <a:schemeClr val="accent1"/>
+          </a:lnRef>
+          <a:fillRef idx="3">
+            <a:schemeClr val="accent1"/>
+          </a:fillRef>
+          <a:effectRef idx="2">
+            <a:schemeClr val="accent1"/>
+          </a:effectRef>
+          <a:fontRef idx="minor">
+            <a:schemeClr val="lt1"/>
+          </a:fontRef>
+        </p:style>
+        <p:txBody>
+          <a:bodyPr rtlCol="0" anchor="ctr"/>
+          <a:lstStyle/>
+          <a:p>
+            <a:pPr algn="ctr"/>
+            <a:endParaRPr/>
+          </a:p>
+        </p:txBody>
+      </p:sp>
+      <p:sp>
+        <p:nvSpPr>
+          <p:cNvPr id="4" name="Title"/>
+          <p:cNvSpPr/>
+          <p:nvPr>
+            <p:ph type="title"/>
+          </p:nvPr>
+        </p:nvSpPr>
+        <p:spPr>
+          <a:xfrm>
+            <a:off x="548640" y="109728"/>
+            <a:ext cx="10424160" cy="694944"/>
+          </a:xfrm>
+          <a:prstGeom prst="rect">
+            <a:avLst/>
+          </a:prstGeom>
+          <a:noFill/>
+        </p:spPr>
+        <p:txBody>
+          <a:bodyPr wrap="square" lIns="45720" tIns="27432" rIns="45720" bIns="27432" anchor="ctr">
+            <a:spAutoFit/>
+          </a:bodyPr>
+          <a:lstStyle/>
+          <a:p>
+            <a:pPr algn="l"/>
+            <a:r>
+              <a:rPr sz="3000" b="1">
+                <a:solidFill>
+                  <a:srgbClr val="243B7A"/>
+                </a:solidFill>
+                <a:latin typeface="Calibri"/>
+              </a:rPr>
+              <a:t>The decision we are asking for</a:t>
+            </a:r>
+          </a:p>
+        </p:txBody>
+      </p:sp>
+      <p:pic>
+        <p:nvPicPr>
+          <p:cNvPr id="5" name="Picture 4" descr="emblem-dark.png"/>
+          <p:cNvPicPr>
+            <a:picLocks noChangeAspect="1"/>
+          </p:cNvPicPr>
+          <p:nvPr/>
+        </p:nvPicPr>
+        <p:blipFill>
+          <a:blip r:embed="rId3"/>
+          <a:stretch>
+            <a:fillRect/>
+          </a:stretch>
+        </p:blipFill>
+        <p:spPr>
+          <a:xfrm>
+            <a:off x="11247120" y="91440"/>
+            <a:ext cx="731520" cy="731520"/>
+          </a:xfrm>
+          <a:prstGeom prst="rect">
+            <a:avLst/>
+          </a:prstGeom>
+        </p:spPr>
+      </p:pic>
+      <p:sp>
+        <p:nvSpPr>
+          <p:cNvPr id="6" name="TextBox 5"/>
+          <p:cNvSpPr txBox="1"/>
+          <p:nvPr/>
+        </p:nvSpPr>
+        <p:spPr>
+          <a:xfrm>
+            <a:off x="548640" y="6455664"/>
+            <a:ext cx="8229600" cy="274320"/>
+          </a:xfrm>
+          <a:prstGeom prst="rect">
+            <a:avLst/>
+          </a:prstGeom>
+          <a:noFill/>
+        </p:spPr>
+        <p:txBody>
+          <a:bodyPr wrap="square" lIns="45720" tIns="27432" rIns="45720" bIns="27432" anchor="t">
+            <a:spAutoFit/>
+          </a:bodyPr>
+          <a:lstStyle/>
+          <a:p>
+            <a:pPr algn="l"/>
+            <a:r>
+              <a:rPr sz="1000" b="0">
+                <a:solidFill>
+                  <a:srgbClr val="4B5563"/>
+                </a:solidFill>
+                <a:latin typeface="Calibri"/>
+              </a:rPr>
+              <a:t>Government of Uttar Pradesh  |  Department of Excise  |  Ask the Data: proof of concept</a:t>
+            </a:r>
+          </a:p>
+        </p:txBody>
+      </p:sp>
+      <p:sp>
+        <p:nvSpPr>
+          <p:cNvPr id="7" name="TextBox 6"/>
+          <p:cNvSpPr txBox="1"/>
+          <p:nvPr/>
+        </p:nvSpPr>
+        <p:spPr>
+          <a:xfrm>
+            <a:off x="10972800" y="6455664"/>
+            <a:ext cx="731520" cy="274320"/>
+          </a:xfrm>
+          <a:prstGeom prst="rect">
+            <a:avLst/>
+          </a:prstGeom>
+          <a:noFill/>
+        </p:spPr>
+        <p:txBody>
+          <a:bodyPr wrap="square" lIns="45720" tIns="27432" rIns="45720" bIns="27432" anchor="t">
+            <a:spAutoFit/>
+          </a:bodyPr>
+          <a:lstStyle/>
+          <a:p>
+            <a:pPr algn="r"/>
+            <a:r>
+              <a:rPr sz="1000" b="0">
+                <a:solidFill>
+                  <a:srgbClr val="4B5563"/>
+                </a:solidFill>
+                <a:latin typeface="Calibri"/>
+              </a:rPr>
+              <a:t>8</a:t>
+            </a:r>
+          </a:p>
+        </p:txBody>
+      </p:sp>
+      <p:sp>
+        <p:nvSpPr>
+          <p:cNvPr id="8" name="Rounded Rectangle 7"/>
+          <p:cNvSpPr/>
+          <p:nvPr/>
+        </p:nvSpPr>
+        <p:spPr>
+          <a:xfrm>
+            <a:off x="548640" y="1371600"/>
+            <a:ext cx="11064240" cy="2011680"/>
+          </a:xfrm>
+          <a:prstGeom prst="roundRect">
+            <a:avLst>
+              <a:gd name="adj" fmla="val 8000"/>
+            </a:avLst>
+          </a:prstGeom>
+          <a:solidFill>
+            <a:srgbClr val="EAF0FB"/>
+          </a:solidFill>
+          <a:ln w="15875">
+            <a:solidFill>
+              <a:srgbClr val="D0DBF0"/>
+            </a:solidFill>
+          </a:ln>
+          <a:effectLst/>
+        </p:spPr>
+        <p:style>
+          <a:lnRef idx="1">
+            <a:schemeClr val="accent1"/>
+          </a:lnRef>
+          <a:fillRef idx="3">
+            <a:schemeClr val="accent1"/>
+          </a:fillRef>
+          <a:effectRef idx="2">
+            <a:schemeClr val="accent1"/>
+          </a:effectRef>
+          <a:fontRef idx="minor">
+            <a:schemeClr val="lt1"/>
+          </a:fontRef>
+        </p:style>
+        <p:txBody>
+          <a:bodyPr rtlCol="0" anchor="ctr"/>
+          <a:lstStyle/>
+          <a:p>
+            <a:pPr algn="ctr"/>
+            <a:endParaRPr/>
+          </a:p>
+        </p:txBody>
+      </p:sp>
+      <p:sp>
+        <p:nvSpPr>
+          <p:cNvPr id="9" name="Oval 8"/>
+          <p:cNvSpPr/>
+          <p:nvPr/>
+        </p:nvSpPr>
+        <p:spPr>
+          <a:xfrm>
+            <a:off x="822960" y="1737360"/>
+            <a:ext cx="822960" cy="822960"/>
+          </a:xfrm>
+          <a:prstGeom prst="ellipse">
+            <a:avLst/>
+          </a:prstGeom>
+          <a:solidFill>
+            <a:srgbClr val="3E5CA8"/>
+          </a:solidFill>
+          <a:ln>
+            <a:noFill/>
+          </a:ln>
+          <a:effectLst/>
+        </p:spPr>
+        <p:style>
+          <a:lnRef idx="1">
+            <a:schemeClr val="accent1"/>
+          </a:lnRef>
+          <a:fillRef idx="3">
+            <a:schemeClr val="accent1"/>
+          </a:fillRef>
+          <a:effectRef idx="2">
+            <a:schemeClr val="accent1"/>
+          </a:effectRef>
+          <a:fontRef idx="minor">
+            <a:schemeClr val="lt1"/>
+          </a:fontRef>
+        </p:style>
+        <p:txBody>
+          <a:bodyPr rtlCol="0" anchor="ctr"/>
+          <a:lstStyle/>
+          <a:p>
+            <a:pPr algn="ctr"/>
+            <a:endParaRPr/>
+          </a:p>
+        </p:txBody>
+      </p:sp>
+      <p:pic>
+        <p:nvPicPr>
+          <p:cNvPr id="10" name="Picture 9" descr="bulb-white.png"/>
+          <p:cNvPicPr>
+            <a:picLocks noChangeAspect="1"/>
+          </p:cNvPicPr>
+          <p:nvPr/>
+        </p:nvPicPr>
+        <p:blipFill>
+          <a:blip r:embed="rId4"/>
+          <a:stretch>
+            <a:fillRect/>
+          </a:stretch>
+        </p:blipFill>
+        <p:spPr>
+          <a:xfrm>
+            <a:off x="1004011" y="1918411"/>
+            <a:ext cx="460857" cy="460857"/>
+          </a:xfrm>
+          <a:prstGeom prst="rect">
+            <a:avLst/>
+          </a:prstGeom>
+        </p:spPr>
+      </p:pic>
+      <p:sp>
+        <p:nvSpPr>
+          <p:cNvPr id="11" name="TextBox 10"/>
+          <p:cNvSpPr txBox="1"/>
+          <p:nvPr/>
+        </p:nvSpPr>
+        <p:spPr>
+          <a:xfrm>
+            <a:off x="1920240" y="1554480"/>
+            <a:ext cx="9509760" cy="1737360"/>
+          </a:xfrm>
+          <a:prstGeom prst="rect">
+            <a:avLst/>
+          </a:prstGeom>
+          <a:noFill/>
+        </p:spPr>
+        <p:txBody>
+          <a:bodyPr wrap="square" lIns="45720" tIns="27432" rIns="45720" bIns="27432" anchor="t">
+            <a:spAutoFit/>
+          </a:bodyPr>
+          <a:lstStyle/>
+          <a:p>
+            <a:pPr algn="l">
+              <a:spcAft>
+                <a:spcPts val="800"/>
+              </a:spcAft>
+            </a:pPr>
+            <a:r>
+              <a:rPr sz="2000" b="1">
+                <a:solidFill>
+                  <a:srgbClr val="1F2937"/>
+                </a:solidFill>
+                <a:latin typeface="Calibri"/>
+              </a:rPr>
+              <a:t>This proof of concept shows that officers can get sourced answers from the department's own data in minutes, on the department's own server.</a:t>
+            </a:r>
+          </a:p>
+          <a:p>
+            <a:pPr algn="l">
+              <a:spcAft>
+                <a:spcPts val="800"/>
+              </a:spcAft>
+            </a:pPr>
+            <a:r>
+              <a:rPr sz="2000" b="1">
+                <a:solidFill>
+                  <a:srgbClr val="1F2937"/>
+                </a:solidFill>
+                <a:latin typeface="Calibri"/>
+              </a:rPr>
+              <a:t>We ask the respected authorities for a decision on the next step.</a:t>
+            </a:r>
+          </a:p>
+        </p:txBody>
+      </p:sp>
+      <p:sp>
+        <p:nvSpPr>
+          <p:cNvPr id="12" name="TextBox 11"/>
+          <p:cNvSpPr txBox="1"/>
+          <p:nvPr/>
+        </p:nvSpPr>
+        <p:spPr>
+          <a:xfrm>
+            <a:off x="548640" y="3749039"/>
+            <a:ext cx="11064240" cy="457200"/>
+          </a:xfrm>
+          <a:prstGeom prst="rect">
+            <a:avLst/>
+          </a:prstGeom>
+          <a:noFill/>
+        </p:spPr>
+        <p:txBody>
+          <a:bodyPr wrap="square" lIns="45720" tIns="27432" rIns="45720" bIns="27432" anchor="t">
+            <a:spAutoFit/>
+          </a:bodyPr>
+          <a:lstStyle/>
+          <a:p>
+            <a:pPr algn="l"/>
+            <a:r>
+              <a:rPr sz="2200" b="1">
+                <a:solidFill>
+                  <a:srgbClr val="243B7A"/>
+                </a:solidFill>
+                <a:latin typeface="Calibri"/>
+              </a:rPr>
+              <a:t>Proposed next steps</a:t>
+            </a:r>
+          </a:p>
+        </p:txBody>
+      </p:sp>
+      <p:sp>
+        <p:nvSpPr>
+          <p:cNvPr id="13" name="TextBox 12"/>
+          <p:cNvSpPr txBox="1"/>
+          <p:nvPr/>
+        </p:nvSpPr>
+        <p:spPr>
+          <a:xfrm>
+            <a:off x="548640" y="4297680"/>
+            <a:ext cx="11064240" cy="457200"/>
+          </a:xfrm>
+          <a:prstGeom prst="rect">
+            <a:avLst/>
+          </a:prstGeom>
+          <a:noFill/>
+        </p:spPr>
+        <p:txBody>
+          <a:bodyPr wrap="square" lIns="45720" tIns="27432" rIns="45720" bIns="27432" anchor="t">
+            <a:spAutoFit/>
+          </a:bodyPr>
+          <a:lstStyle/>
+          <a:p>
+            <a:pPr algn="l">
+              <a:spcAft>
+                <a:spcPts val="800"/>
+              </a:spcAft>
+            </a:pPr>
+            <a:r>
+              <a:rPr sz="1800" b="0">
+                <a:solidFill>
+                  <a:srgbClr val="1F2937"/>
+                </a:solidFill>
+                <a:latin typeface="Calibri"/>
+              </a:rPr>
+              <a:t>1.  A pilot with a small group of district and division officers.</a:t>
+            </a:r>
+          </a:p>
+          <a:p>
+            <a:pPr algn="l">
+              <a:spcAft>
+                <a:spcPts val="800"/>
+              </a:spcAft>
+            </a:pPr>
+            <a:r>
+              <a:rPr sz="1800" b="0">
+                <a:solidFill>
+                  <a:srgbClr val="1F2937"/>
+                </a:solidFill>
+                <a:latin typeface="Calibri"/>
+              </a:rPr>
+              <a:t>2.  A high-performance GPU compute node.</a:t>
+            </a:r>
+          </a:p>
+          <a:p>
+            <a:pPr algn="l">
+              <a:spcAft>
+                <a:spcPts val="800"/>
+              </a:spcAft>
+            </a:pPr>
+            <a:r>
+              <a:rPr sz="1800" b="0">
+                <a:solidFill>
+                  <a:srgbClr val="1F2937"/>
+                </a:solidFill>
+                <a:latin typeface="Calibri"/>
+              </a:rPr>
+              <a:t>3.  Monthly data feeds from the source systems and involved stakeholders.</a:t>
             </a:r>
           </a:p>
         </p:txBody>

--- a/deck/UP-Excise-Ask-the-Data-Demo-Short.pptx
+++ b/deck/UP-Excise-Ask-the-Data-Demo-Short.pptx
@@ -3939,7 +3939,7 @@
           <a:p>
             <a:pPr algn="l"/>
             <a:r>
-              <a:rPr sz="2200" b="0">
+              <a:rPr sz="2200" b="0" lang="en-IN">
                 <a:solidFill>
                   <a:srgbClr val="1F2937"/>
                 </a:solidFill>
@@ -3974,7 +3974,7 @@
           <a:p>
             <a:pPr algn="l"/>
             <a:r>
-              <a:rPr sz="3600" b="1">
+              <a:rPr sz="3600" b="1" lang="en-IN">
                 <a:solidFill>
                   <a:srgbClr val="243B7A"/>
                 </a:solidFill>
@@ -4048,7 +4048,7 @@
           <a:p>
             <a:pPr algn="l"/>
             <a:r>
-              <a:rPr sz="6000" b="1">
+              <a:rPr sz="6000" b="1" lang="en-IN">
                 <a:solidFill>
                   <a:srgbClr val="243B7A"/>
                 </a:solidFill>
@@ -4087,7 +4087,7 @@
               </a:spcAft>
             </a:pPr>
             <a:r>
-              <a:rPr sz="2400" b="0">
+              <a:rPr sz="2400" b="0" lang="en-IN">
                 <a:solidFill>
                   <a:srgbClr val="1F2937"/>
                 </a:solidFill>
@@ -4103,7 +4103,7 @@
               </a:spcAft>
             </a:pPr>
             <a:r>
-              <a:rPr sz="2400" b="0">
+              <a:rPr sz="2400" b="0" lang="en-IN">
                 <a:solidFill>
                   <a:srgbClr val="1F2937"/>
                 </a:solidFill>
@@ -4138,7 +4138,7 @@
           <a:p>
             <a:pPr algn="l"/>
             <a:r>
-              <a:rPr sz="1800" b="0">
+              <a:rPr sz="1800" b="0" lang="en-IN">
                 <a:solidFill>
                   <a:srgbClr val="243B7A"/>
                 </a:solidFill>
@@ -4288,7 +4288,7 @@
           <a:p>
             <a:pPr algn="l"/>
             <a:r>
-              <a:rPr sz="3000" b="1">
+              <a:rPr sz="3000" b="1" lang="en-IN">
                 <a:solidFill>
                   <a:srgbClr val="243B7A"/>
                 </a:solidFill>
@@ -4347,7 +4347,7 @@
           <a:p>
             <a:pPr algn="l"/>
             <a:r>
-              <a:rPr sz="1000" b="0">
+              <a:rPr sz="1000" b="0" lang="en-IN">
                 <a:solidFill>
                   <a:srgbClr val="4B5563"/>
                 </a:solidFill>
@@ -4382,7 +4382,7 @@
           <a:p>
             <a:pPr algn="r"/>
             <a:r>
-              <a:rPr sz="1000" b="0">
+              <a:rPr sz="1000" b="0" lang="en-IN">
                 <a:solidFill>
                   <a:srgbClr val="4B5563"/>
                 </a:solidFill>
@@ -4535,7 +4535,7 @@
           <a:p>
             <a:pPr algn="l"/>
             <a:r>
-              <a:rPr sz="2200" b="1">
+              <a:rPr sz="2200" b="1" lang="en-IN">
                 <a:solidFill>
                   <a:srgbClr val="243B7A"/>
                 </a:solidFill>
@@ -4570,7 +4570,7 @@
           <a:p>
             <a:pPr algn="l"/>
             <a:r>
-              <a:rPr sz="1600" b="0">
+              <a:rPr sz="1600" b="0" lang="en-IN">
                 <a:solidFill>
                   <a:srgbClr val="1F2937"/>
                 </a:solidFill>
@@ -4723,7 +4723,7 @@
           <a:p>
             <a:pPr algn="l"/>
             <a:r>
-              <a:rPr sz="2200" b="1">
+              <a:rPr sz="2200" b="1" lang="en-IN">
                 <a:solidFill>
                   <a:srgbClr val="243B7A"/>
                 </a:solidFill>
@@ -4758,7 +4758,7 @@
           <a:p>
             <a:pPr algn="l"/>
             <a:r>
-              <a:rPr sz="1600" b="0">
+              <a:rPr sz="1600" b="0" lang="en-IN">
                 <a:solidFill>
                   <a:srgbClr val="1F2937"/>
                 </a:solidFill>
@@ -4911,7 +4911,7 @@
           <a:p>
             <a:pPr algn="l"/>
             <a:r>
-              <a:rPr sz="2200" b="1">
+              <a:rPr sz="2200" b="1" lang="en-IN">
                 <a:solidFill>
                   <a:srgbClr val="243B7A"/>
                 </a:solidFill>
@@ -4946,7 +4946,7 @@
           <a:p>
             <a:pPr algn="l"/>
             <a:r>
-              <a:rPr sz="1600" b="0">
+              <a:rPr sz="1600" b="0" lang="en-IN">
                 <a:solidFill>
                   <a:srgbClr val="1F2937"/>
                 </a:solidFill>
@@ -4981,7 +4981,7 @@
           <a:p>
             <a:pPr algn="l"/>
             <a:r>
-              <a:rPr sz="2000" b="1">
+              <a:rPr sz="2000" b="1" lang="en-IN">
                 <a:solidFill>
                   <a:srgbClr val="1F2937"/>
                 </a:solidFill>
@@ -5131,7 +5131,7 @@
           <a:p>
             <a:pPr algn="l"/>
             <a:r>
-              <a:rPr sz="3000" b="1">
+              <a:rPr sz="3000" b="1" lang="en-IN">
                 <a:solidFill>
                   <a:srgbClr val="243B7A"/>
                 </a:solidFill>
@@ -5190,7 +5190,7 @@
           <a:p>
             <a:pPr algn="l"/>
             <a:r>
-              <a:rPr sz="1000" b="0">
+              <a:rPr sz="1000" b="0" lang="en-IN">
                 <a:solidFill>
                   <a:srgbClr val="4B5563"/>
                 </a:solidFill>
@@ -5225,7 +5225,7 @@
           <a:p>
             <a:pPr algn="r"/>
             <a:r>
-              <a:rPr sz="1000" b="0">
+              <a:rPr sz="1000" b="0" lang="en-IN">
                 <a:solidFill>
                   <a:srgbClr val="4B5563"/>
                 </a:solidFill>
@@ -5260,7 +5260,7 @@
           <a:p>
             <a:pPr algn="l"/>
             <a:r>
-              <a:rPr sz="2000" b="0">
+              <a:rPr sz="2000" b="0" lang="en-IN">
                 <a:solidFill>
                   <a:srgbClr val="1F2937"/>
                 </a:solidFill>
@@ -5413,7 +5413,7 @@
           <a:p>
             <a:pPr algn="l"/>
             <a:r>
-              <a:rPr sz="2400" b="1">
+              <a:rPr sz="2400" b="1" lang="en-IN">
                 <a:solidFill>
                   <a:srgbClr val="243B7A"/>
                 </a:solidFill>
@@ -5448,7 +5448,7 @@
           <a:p>
             <a:pPr algn="l"/>
             <a:r>
-              <a:rPr sz="1700" b="0">
+              <a:rPr sz="1700" b="0" lang="en-IN">
                 <a:solidFill>
                   <a:srgbClr val="1F2937"/>
                 </a:solidFill>
@@ -5601,7 +5601,7 @@
           <a:p>
             <a:pPr algn="l"/>
             <a:r>
-              <a:rPr sz="2400" b="1">
+              <a:rPr sz="2400" b="1" lang="en-IN">
                 <a:solidFill>
                   <a:srgbClr val="243B7A"/>
                 </a:solidFill>
@@ -5636,7 +5636,7 @@
           <a:p>
             <a:pPr algn="l"/>
             <a:r>
-              <a:rPr sz="1700" b="0">
+              <a:rPr sz="1700" b="0" lang="en-IN">
                 <a:solidFill>
                   <a:srgbClr val="1F2937"/>
                 </a:solidFill>
@@ -5789,7 +5789,7 @@
           <a:p>
             <a:pPr algn="l"/>
             <a:r>
-              <a:rPr sz="2400" b="1">
+              <a:rPr sz="2400" b="1" lang="en-IN">
                 <a:solidFill>
                   <a:srgbClr val="243B7A"/>
                 </a:solidFill>
@@ -5824,7 +5824,7 @@
           <a:p>
             <a:pPr algn="l"/>
             <a:r>
-              <a:rPr sz="1700" b="0">
+              <a:rPr sz="1700" b="0" lang="en-IN">
                 <a:solidFill>
                   <a:srgbClr val="1F2937"/>
                 </a:solidFill>
@@ -5863,7 +5863,7 @@
               </a:spcAft>
             </a:pPr>
             <a:r>
-              <a:rPr sz="1900" b="1">
+              <a:rPr sz="1900" b="1" lang="en-IN">
                 <a:solidFill>
                   <a:srgbClr val="243B7A"/>
                 </a:solidFill>
@@ -5879,7 +5879,7 @@
               </a:spcAft>
             </a:pPr>
             <a:r>
-              <a:rPr sz="1900" b="1">
+              <a:rPr sz="1900" b="1" lang="en-IN">
                 <a:solidFill>
                   <a:srgbClr val="243B7A"/>
                 </a:solidFill>
@@ -6029,7 +6029,7 @@
           <a:p>
             <a:pPr algn="l"/>
             <a:r>
-              <a:rPr sz="3000" b="1">
+              <a:rPr sz="3000" b="1" lang="en-IN">
                 <a:solidFill>
                   <a:srgbClr val="243B7A"/>
                 </a:solidFill>
@@ -6088,7 +6088,7 @@
           <a:p>
             <a:pPr algn="l"/>
             <a:r>
-              <a:rPr sz="1000" b="0">
+              <a:rPr sz="1000" b="0" lang="en-IN">
                 <a:solidFill>
                   <a:srgbClr val="4B5563"/>
                 </a:solidFill>
@@ -6123,7 +6123,7 @@
           <a:p>
             <a:pPr algn="r"/>
             <a:r>
-              <a:rPr sz="1000" b="0">
+              <a:rPr sz="1000" b="0" lang="en-IN">
                 <a:solidFill>
                   <a:srgbClr val="4B5563"/>
                 </a:solidFill>
@@ -6158,7 +6158,7 @@
           <a:p>
             <a:pPr algn="l"/>
             <a:r>
-              <a:rPr sz="1800" b="1">
+              <a:rPr sz="1800" b="1" lang="en-IN">
                 <a:solidFill>
                   <a:srgbClr val="243B7A"/>
                 </a:solidFill>
@@ -6197,7 +6197,7 @@
               </a:spcAft>
             </a:pPr>
             <a:r>
-              <a:rPr sz="1600" b="0">
+              <a:rPr sz="1600" b="0" lang="en-IN">
                 <a:solidFill>
                   <a:srgbClr val="1F2937"/>
                 </a:solidFill>
@@ -6213,7 +6213,7 @@
               </a:spcAft>
             </a:pPr>
             <a:r>
-              <a:rPr sz="1600" b="0">
+              <a:rPr sz="1600" b="0" lang="en-IN">
                 <a:solidFill>
                   <a:srgbClr val="1F2937"/>
                 </a:solidFill>
@@ -6229,7 +6229,7 @@
               </a:spcAft>
             </a:pPr>
             <a:r>
-              <a:rPr sz="1600" b="0">
+              <a:rPr sz="1600" b="0" lang="en-IN">
                 <a:solidFill>
                   <a:srgbClr val="1F2937"/>
                 </a:solidFill>
@@ -6245,7 +6245,7 @@
               </a:spcAft>
             </a:pPr>
             <a:r>
-              <a:rPr sz="1600" b="0">
+              <a:rPr sz="1600" b="0" lang="en-IN">
                 <a:solidFill>
                   <a:srgbClr val="1F2937"/>
                 </a:solidFill>
@@ -6470,7 +6470,7 @@
           <a:p>
             <a:pPr algn="l"/>
             <a:r>
-              <a:rPr sz="3000" b="1">
+              <a:rPr sz="3000" b="1" lang="en-IN">
                 <a:solidFill>
                   <a:srgbClr val="243B7A"/>
                 </a:solidFill>
@@ -6529,7 +6529,7 @@
           <a:p>
             <a:pPr algn="l"/>
             <a:r>
-              <a:rPr sz="1000" b="0">
+              <a:rPr sz="1000" b="0" lang="en-IN">
                 <a:solidFill>
                   <a:srgbClr val="4B5563"/>
                 </a:solidFill>
@@ -6564,7 +6564,7 @@
           <a:p>
             <a:pPr algn="r"/>
             <a:r>
-              <a:rPr sz="1000" b="0">
+              <a:rPr sz="1000" b="0" lang="en-IN">
                 <a:solidFill>
                   <a:srgbClr val="4B5563"/>
                 </a:solidFill>
@@ -6749,7 +6749,7 @@
           <a:p>
             <a:pPr algn="l"/>
             <a:r>
-              <a:rPr sz="1500" b="1">
+              <a:rPr sz="1500" b="1" lang="en-IN">
                 <a:solidFill>
                   <a:srgbClr val="243B7A"/>
                 </a:solidFill>
@@ -6784,7 +6784,7 @@
           <a:p>
             <a:pPr algn="l"/>
             <a:r>
-              <a:rPr sz="1500" b="1">
+              <a:rPr sz="1500" b="1" lang="en-IN">
                 <a:solidFill>
                   <a:srgbClr val="243B7A"/>
                 </a:solidFill>
@@ -6819,7 +6819,7 @@
           <a:p>
             <a:pPr algn="l"/>
             <a:r>
-              <a:rPr sz="1600" b="0">
+              <a:rPr sz="1600" b="0" lang="en-IN">
                 <a:solidFill>
                   <a:srgbClr val="1F2937"/>
                 </a:solidFill>
@@ -6854,7 +6854,7 @@
           <a:p>
             <a:pPr algn="l"/>
             <a:r>
-              <a:rPr sz="1600" b="0">
+              <a:rPr sz="1600" b="0" lang="en-IN">
                 <a:solidFill>
                   <a:srgbClr val="1F2937"/>
                 </a:solidFill>
@@ -7004,7 +7004,7 @@
           <a:p>
             <a:pPr algn="l"/>
             <a:r>
-              <a:rPr sz="3000" b="1">
+              <a:rPr sz="3000" b="1" lang="en-IN">
                 <a:solidFill>
                   <a:srgbClr val="243B7A"/>
                 </a:solidFill>
@@ -7063,7 +7063,7 @@
           <a:p>
             <a:pPr algn="l"/>
             <a:r>
-              <a:rPr sz="1000" b="0">
+              <a:rPr sz="1000" b="0" lang="en-IN">
                 <a:solidFill>
                   <a:srgbClr val="4B5563"/>
                 </a:solidFill>
@@ -7098,7 +7098,7 @@
           <a:p>
             <a:pPr algn="r"/>
             <a:r>
-              <a:rPr sz="1000" b="0">
+              <a:rPr sz="1000" b="0" lang="en-IN">
                 <a:solidFill>
                   <a:srgbClr val="4B5563"/>
                 </a:solidFill>
@@ -7251,7 +7251,7 @@
           <a:p>
             <a:pPr algn="l"/>
             <a:r>
-              <a:rPr sz="2100" b="1">
+              <a:rPr sz="2100" b="1" lang="en-IN">
                 <a:solidFill>
                   <a:srgbClr val="243B7A"/>
                 </a:solidFill>
@@ -7286,7 +7286,7 @@
           <a:p>
             <a:pPr algn="l"/>
             <a:r>
-              <a:rPr sz="1600" b="0">
+              <a:rPr sz="1600" b="0" lang="en-IN">
                 <a:solidFill>
                   <a:srgbClr val="1F2937"/>
                 </a:solidFill>
@@ -7439,7 +7439,7 @@
           <a:p>
             <a:pPr algn="l"/>
             <a:r>
-              <a:rPr sz="2100" b="1">
+              <a:rPr sz="2100" b="1" lang="en-IN">
                 <a:solidFill>
                   <a:srgbClr val="243B7A"/>
                 </a:solidFill>
@@ -7474,7 +7474,7 @@
           <a:p>
             <a:pPr algn="l"/>
             <a:r>
-              <a:rPr sz="1600" b="0">
+              <a:rPr sz="1600" b="0" lang="en-IN">
                 <a:solidFill>
                   <a:srgbClr val="1F2937"/>
                 </a:solidFill>
@@ -7627,7 +7627,7 @@
           <a:p>
             <a:pPr algn="l"/>
             <a:r>
-              <a:rPr sz="2100" b="1">
+              <a:rPr sz="2100" b="1" lang="en-IN">
                 <a:solidFill>
                   <a:srgbClr val="243B7A"/>
                 </a:solidFill>
@@ -7662,7 +7662,7 @@
           <a:p>
             <a:pPr algn="l"/>
             <a:r>
-              <a:rPr sz="1600" b="0">
+              <a:rPr sz="1600" b="0" lang="en-IN">
                 <a:solidFill>
                   <a:srgbClr val="1F2937"/>
                 </a:solidFill>
@@ -7815,7 +7815,7 @@
           <a:p>
             <a:pPr algn="l"/>
             <a:r>
-              <a:rPr sz="2100" b="1">
+              <a:rPr sz="2100" b="1" lang="en-IN">
                 <a:solidFill>
                   <a:srgbClr val="243B7A"/>
                 </a:solidFill>
@@ -7850,7 +7850,7 @@
           <a:p>
             <a:pPr algn="l"/>
             <a:r>
-              <a:rPr sz="1600" b="0">
+              <a:rPr sz="1600" b="0" lang="en-IN">
                 <a:solidFill>
                   <a:srgbClr val="1F2937"/>
                 </a:solidFill>
@@ -8003,7 +8003,7 @@
           <a:p>
             <a:pPr algn="l"/>
             <a:r>
-              <a:rPr sz="2100" b="1">
+              <a:rPr sz="2100" b="1" lang="en-IN">
                 <a:solidFill>
                   <a:srgbClr val="243B7A"/>
                 </a:solidFill>
@@ -8038,7 +8038,7 @@
           <a:p>
             <a:pPr algn="l"/>
             <a:r>
-              <a:rPr sz="1600" b="0">
+              <a:rPr sz="1600" b="0" lang="en-IN">
                 <a:solidFill>
                   <a:srgbClr val="1F2937"/>
                 </a:solidFill>
@@ -8188,7 +8188,7 @@
           <a:p>
             <a:pPr algn="l"/>
             <a:r>
-              <a:rPr sz="3000" b="1">
+              <a:rPr sz="3000" b="1" lang="en-IN">
                 <a:solidFill>
                   <a:srgbClr val="243B7A"/>
                 </a:solidFill>
@@ -8247,7 +8247,7 @@
           <a:p>
             <a:pPr algn="l"/>
             <a:r>
-              <a:rPr sz="1000" b="0">
+              <a:rPr sz="1000" b="0" lang="en-IN">
                 <a:solidFill>
                   <a:srgbClr val="4B5563"/>
                 </a:solidFill>
@@ -8282,7 +8282,7 @@
           <a:p>
             <a:pPr algn="r"/>
             <a:r>
-              <a:rPr sz="1000" b="0">
+              <a:rPr sz="1000" b="0" lang="en-IN">
                 <a:solidFill>
                   <a:srgbClr val="4B5563"/>
                 </a:solidFill>
@@ -8435,7 +8435,7 @@
           <a:p>
             <a:pPr algn="l"/>
             <a:r>
-              <a:rPr sz="2200" b="1">
+              <a:rPr sz="2200" b="1" lang="en-IN">
                 <a:solidFill>
                   <a:srgbClr val="243B7A"/>
                 </a:solidFill>
@@ -8470,7 +8470,7 @@
           <a:p>
             <a:pPr algn="l"/>
             <a:r>
-              <a:rPr sz="1600" b="0">
+              <a:rPr sz="1600" b="0" lang="en-IN">
                 <a:solidFill>
                   <a:srgbClr val="1F2937"/>
                 </a:solidFill>
@@ -8623,7 +8623,7 @@
           <a:p>
             <a:pPr algn="l"/>
             <a:r>
-              <a:rPr sz="2200" b="1">
+              <a:rPr sz="2200" b="1" lang="en-IN">
                 <a:solidFill>
                   <a:srgbClr val="243B7A"/>
                 </a:solidFill>
@@ -8658,7 +8658,7 @@
           <a:p>
             <a:pPr algn="l"/>
             <a:r>
-              <a:rPr sz="1600" b="0">
+              <a:rPr sz="1600" b="0" lang="en-IN">
                 <a:solidFill>
                   <a:srgbClr val="1F2937"/>
                 </a:solidFill>
@@ -8811,7 +8811,7 @@
           <a:p>
             <a:pPr algn="l"/>
             <a:r>
-              <a:rPr sz="2200" b="1">
+              <a:rPr sz="2200" b="1" lang="en-IN">
                 <a:solidFill>
                   <a:srgbClr val="243B7A"/>
                 </a:solidFill>
@@ -8846,7 +8846,7 @@
           <a:p>
             <a:pPr algn="l"/>
             <a:r>
-              <a:rPr sz="1600" b="0">
+              <a:rPr sz="1600" b="0" lang="en-IN">
                 <a:solidFill>
                   <a:srgbClr val="1F2937"/>
                 </a:solidFill>
@@ -8999,7 +8999,7 @@
           <a:p>
             <a:pPr algn="l"/>
             <a:r>
-              <a:rPr sz="2200" b="1">
+              <a:rPr sz="2200" b="1" lang="en-IN">
                 <a:solidFill>
                   <a:srgbClr val="243B7A"/>
                 </a:solidFill>
@@ -9034,7 +9034,7 @@
           <a:p>
             <a:pPr algn="l"/>
             <a:r>
-              <a:rPr sz="1600" b="0">
+              <a:rPr sz="1600" b="0" lang="en-IN">
                 <a:solidFill>
                   <a:srgbClr val="1F2937"/>
                 </a:solidFill>
@@ -9184,7 +9184,7 @@
           <a:p>
             <a:pPr algn="l"/>
             <a:r>
-              <a:rPr sz="3000" b="1">
+              <a:rPr sz="3000" b="1" lang="en-IN">
                 <a:solidFill>
                   <a:srgbClr val="243B7A"/>
                 </a:solidFill>
@@ -9243,7 +9243,7 @@
           <a:p>
             <a:pPr algn="l"/>
             <a:r>
-              <a:rPr sz="1000" b="0">
+              <a:rPr sz="1000" b="0" lang="en-IN">
                 <a:solidFill>
                   <a:srgbClr val="4B5563"/>
                 </a:solidFill>
@@ -9278,7 +9278,7 @@
           <a:p>
             <a:pPr algn="r"/>
             <a:r>
-              <a:rPr sz="1000" b="0">
+              <a:rPr sz="1000" b="0" lang="en-IN">
                 <a:solidFill>
                   <a:srgbClr val="4B5563"/>
                 </a:solidFill>
@@ -9435,7 +9435,7 @@
               </a:spcAft>
             </a:pPr>
             <a:r>
-              <a:rPr sz="2000" b="1">
+              <a:rPr sz="2000" b="1" lang="en-IN">
                 <a:solidFill>
                   <a:srgbClr val="1F2937"/>
                 </a:solidFill>
@@ -9451,7 +9451,7 @@
               </a:spcAft>
             </a:pPr>
             <a:r>
-              <a:rPr sz="2000" b="1">
+              <a:rPr sz="2000" b="1" lang="en-IN">
                 <a:solidFill>
                   <a:srgbClr val="1F2937"/>
                 </a:solidFill>
@@ -9486,7 +9486,7 @@
           <a:p>
             <a:pPr algn="l"/>
             <a:r>
-              <a:rPr sz="2200" b="1">
+              <a:rPr sz="2200" b="1" lang="en-IN">
                 <a:solidFill>
                   <a:srgbClr val="243B7A"/>
                 </a:solidFill>
@@ -9525,7 +9525,7 @@
               </a:spcAft>
             </a:pPr>
             <a:r>
-              <a:rPr sz="1800" b="0">
+              <a:rPr sz="1800" b="0" lang="en-IN">
                 <a:solidFill>
                   <a:srgbClr val="1F2937"/>
                 </a:solidFill>
@@ -9541,7 +9541,7 @@
               </a:spcAft>
             </a:pPr>
             <a:r>
-              <a:rPr sz="1800" b="0">
+              <a:rPr sz="1800" b="0" lang="en-IN">
                 <a:solidFill>
                   <a:srgbClr val="1F2937"/>
                 </a:solidFill>
@@ -9557,7 +9557,7 @@
               </a:spcAft>
             </a:pPr>
             <a:r>
-              <a:rPr sz="1800" b="0">
+              <a:rPr sz="1800" b="0" lang="en-IN">
                 <a:solidFill>
                   <a:srgbClr val="1F2937"/>
                 </a:solidFill>
